--- a/docs/基于大模型智能体的教育本体构建系统_成果展示版.pptx
+++ b/docs/基于大模型智能体的教育本体构建系统_成果展示版.pptx
@@ -4,6 +4,9 @@
   <p:sldMasterIdLst>
     <p:sldMasterId id="2147483648" r:id="rId1"/>
   </p:sldMasterIdLst>
+  <p:notesMasterIdLst>
+    <p:notesMasterId r:id="rId27"/>
+  </p:notesMasterIdLst>
   <p:sldIdLst>
     <p:sldId id="256" r:id="rId3"/>
     <p:sldId id="257" r:id="rId4"/>
@@ -28,9 +31,12 @@
     <p:sldId id="276" r:id="rId23"/>
     <p:sldId id="277" r:id="rId24"/>
     <p:sldId id="278" r:id="rId25"/>
-    <p:sldId id="279" r:id="rId29"/>
-    <p:sldId id="280" r:id="rId30"/>
-    <p:sldId id="281" r:id="rId31"/>
+    <p:sldId id="284" r:id="rId26"/>
+    <p:sldId id="286" r:id="rId28"/>
+    <p:sldId id="288" r:id="rId29"/>
+    <p:sldId id="287" r:id="rId30"/>
+    <p:sldId id="280" r:id="rId31"/>
+    <p:sldId id="281" r:id="rId32"/>
   </p:sldIdLst>
   <p:sldSz cx="12191365" cy="6858000" type="screen4x3"/>
   <p:notesSz cx="6858000" cy="9144000"/>
@@ -132,7 +138,7 @@
   <p:extLst>
     <p:ext uri="{EFAFB233-063F-42B5-8137-9DF3F51BA10A}">
       <p15:sldGuideLst xmlns:p15="http://schemas.microsoft.com/office/powerpoint/2012/main">
-        <p15:guide id="1" orient="horz" pos="2200" userDrawn="1">
+        <p15:guide id="1" orient="horz" pos="2246" userDrawn="1">
           <p15:clr>
             <a:srgbClr val="A4A3A4"/>
           </p15:clr>
@@ -146,6 +152,545 @@
     </p:ext>
   </p:extLst>
 </p:presentation>
+</file>
+
+<file path=ppt/notesMasters/notesMaster1.xml><?xml version="1.0" encoding="utf-8"?>
+<p:notesMaster xmlns:a="http://schemas.openxmlformats.org/drawingml/2006/main" xmlns:r="http://schemas.openxmlformats.org/officeDocument/2006/relationships" xmlns:p="http://schemas.openxmlformats.org/presentationml/2006/main">
+  <p:cSld>
+    <p:bg>
+      <p:bgRef idx="1001">
+        <a:schemeClr val="bg1"/>
+      </p:bgRef>
+    </p:bg>
+    <p:spTree>
+      <p:nvGrpSpPr>
+        <p:cNvPr id="1" name=""/>
+        <p:cNvGrpSpPr/>
+        <p:nvPr/>
+      </p:nvGrpSpPr>
+      <p:grpSpPr>
+        <a:xfrm>
+          <a:off x="0" y="0"/>
+          <a:ext cx="0" cy="0"/>
+          <a:chOff x="0" y="0"/>
+          <a:chExt cx="0" cy="0"/>
+        </a:xfrm>
+      </p:grpSpPr>
+      <p:sp>
+        <p:nvSpPr>
+          <p:cNvPr id="2" name="页眉占位符 1"/>
+          <p:cNvSpPr>
+            <a:spLocks noGrp="1"/>
+          </p:cNvSpPr>
+          <p:nvPr>
+            <p:ph type="hdr" sz="quarter"/>
+          </p:nvPr>
+        </p:nvSpPr>
+        <p:spPr>
+          <a:xfrm>
+            <a:off x="0" y="0"/>
+            <a:ext cx="2971800" cy="458788"/>
+          </a:xfrm>
+          <a:prstGeom prst="rect">
+            <a:avLst/>
+          </a:prstGeom>
+        </p:spPr>
+        <p:txBody>
+          <a:bodyPr vert="horz" lIns="91440" tIns="45720" rIns="91440" bIns="45720" rtlCol="0"/>
+          <a:lstStyle>
+            <a:lvl1pPr algn="l">
+              <a:defRPr sz="1200"/>
+            </a:lvl1pPr>
+          </a:lstStyle>
+          <a:p>
+            <a:endParaRPr lang="zh-CN" altLang="en-US"/>
+          </a:p>
+        </p:txBody>
+      </p:sp>
+      <p:sp>
+        <p:nvSpPr>
+          <p:cNvPr id="3" name="日期占位符 2"/>
+          <p:cNvSpPr>
+            <a:spLocks noGrp="1"/>
+          </p:cNvSpPr>
+          <p:nvPr>
+            <p:ph type="dt" idx="1"/>
+          </p:nvPr>
+        </p:nvSpPr>
+        <p:spPr>
+          <a:xfrm>
+            <a:off x="3884613" y="0"/>
+            <a:ext cx="2971800" cy="458788"/>
+          </a:xfrm>
+          <a:prstGeom prst="rect">
+            <a:avLst/>
+          </a:prstGeom>
+        </p:spPr>
+        <p:txBody>
+          <a:bodyPr vert="horz" lIns="91440" tIns="45720" rIns="91440" bIns="45720" rtlCol="0"/>
+          <a:lstStyle>
+            <a:lvl1pPr algn="r">
+              <a:defRPr sz="1200"/>
+            </a:lvl1pPr>
+          </a:lstStyle>
+          <a:p>
+            <a:fld id="{D2A48B96-639E-45A3-A0BA-2464DFDB1FAA}" type="datetimeFigureOut">
+              <a:rPr lang="zh-CN" altLang="en-US" smtClean="0"/>
+            </a:fld>
+            <a:endParaRPr lang="zh-CN" altLang="en-US"/>
+          </a:p>
+        </p:txBody>
+      </p:sp>
+      <p:sp>
+        <p:nvSpPr>
+          <p:cNvPr id="4" name="幻灯片图像占位符 3"/>
+          <p:cNvSpPr>
+            <a:spLocks noGrp="1" noRot="1" noChangeAspect="1"/>
+          </p:cNvSpPr>
+          <p:nvPr>
+            <p:ph type="sldImg" idx="2"/>
+          </p:nvPr>
+        </p:nvSpPr>
+        <p:spPr>
+          <a:xfrm>
+            <a:off x="685943" y="1143000"/>
+            <a:ext cx="5486114" cy="3086100"/>
+          </a:xfrm>
+          <a:prstGeom prst="rect">
+            <a:avLst/>
+          </a:prstGeom>
+          <a:noFill/>
+          <a:ln w="12700">
+            <a:solidFill>
+              <a:prstClr val="black"/>
+            </a:solidFill>
+          </a:ln>
+        </p:spPr>
+        <p:txBody>
+          <a:bodyPr vert="horz" lIns="91440" tIns="45720" rIns="91440" bIns="45720" rtlCol="0" anchor="ctr"/>
+          <a:lstStyle/>
+          <a:p>
+            <a:endParaRPr lang="zh-CN" altLang="en-US"/>
+          </a:p>
+        </p:txBody>
+      </p:sp>
+      <p:sp>
+        <p:nvSpPr>
+          <p:cNvPr id="5" name="备注占位符 4"/>
+          <p:cNvSpPr>
+            <a:spLocks noGrp="1"/>
+          </p:cNvSpPr>
+          <p:nvPr>
+            <p:ph type="body" sz="quarter" idx="3"/>
+          </p:nvPr>
+        </p:nvSpPr>
+        <p:spPr>
+          <a:xfrm>
+            <a:off x="685800" y="4400550"/>
+            <a:ext cx="5486400" cy="3600450"/>
+          </a:xfrm>
+          <a:prstGeom prst="rect">
+            <a:avLst/>
+          </a:prstGeom>
+        </p:spPr>
+        <p:txBody>
+          <a:bodyPr vert="horz" lIns="91440" tIns="45720" rIns="91440" bIns="45720" rtlCol="0"/>
+          <a:lstStyle/>
+          <a:p>
+            <a:pPr lvl="0"/>
+            <a:r>
+              <a:rPr lang="zh-CN" altLang="en-US" smtClean="0"/>
+              <a:t>单击此处编辑母版文本样式</a:t>
+            </a:r>
+            <a:endParaRPr lang="zh-CN" altLang="en-US" smtClean="0"/>
+          </a:p>
+          <a:p>
+            <a:pPr lvl="1"/>
+            <a:r>
+              <a:rPr lang="zh-CN" altLang="en-US" smtClean="0"/>
+              <a:t>第二级</a:t>
+            </a:r>
+            <a:endParaRPr lang="zh-CN" altLang="en-US" smtClean="0"/>
+          </a:p>
+          <a:p>
+            <a:pPr lvl="2"/>
+            <a:r>
+              <a:rPr lang="zh-CN" altLang="en-US" smtClean="0"/>
+              <a:t>第三级</a:t>
+            </a:r>
+            <a:endParaRPr lang="zh-CN" altLang="en-US" smtClean="0"/>
+          </a:p>
+          <a:p>
+            <a:pPr lvl="3"/>
+            <a:r>
+              <a:rPr lang="zh-CN" altLang="en-US" smtClean="0"/>
+              <a:t>第四级</a:t>
+            </a:r>
+            <a:endParaRPr lang="zh-CN" altLang="en-US" smtClean="0"/>
+          </a:p>
+          <a:p>
+            <a:pPr lvl="4"/>
+            <a:r>
+              <a:rPr lang="zh-CN" altLang="en-US" smtClean="0"/>
+              <a:t>第五级</a:t>
+            </a:r>
+            <a:endParaRPr lang="zh-CN" altLang="en-US"/>
+          </a:p>
+        </p:txBody>
+      </p:sp>
+      <p:sp>
+        <p:nvSpPr>
+          <p:cNvPr id="6" name="页脚占位符 5"/>
+          <p:cNvSpPr>
+            <a:spLocks noGrp="1"/>
+          </p:cNvSpPr>
+          <p:nvPr>
+            <p:ph type="ftr" sz="quarter" idx="4"/>
+          </p:nvPr>
+        </p:nvSpPr>
+        <p:spPr>
+          <a:xfrm>
+            <a:off x="0" y="8685213"/>
+            <a:ext cx="2971800" cy="458787"/>
+          </a:xfrm>
+          <a:prstGeom prst="rect">
+            <a:avLst/>
+          </a:prstGeom>
+        </p:spPr>
+        <p:txBody>
+          <a:bodyPr vert="horz" lIns="91440" tIns="45720" rIns="91440" bIns="45720" rtlCol="0" anchor="b"/>
+          <a:lstStyle>
+            <a:lvl1pPr algn="l">
+              <a:defRPr sz="1200"/>
+            </a:lvl1pPr>
+          </a:lstStyle>
+          <a:p>
+            <a:endParaRPr lang="zh-CN" altLang="en-US"/>
+          </a:p>
+        </p:txBody>
+      </p:sp>
+      <p:sp>
+        <p:nvSpPr>
+          <p:cNvPr id="7" name="灯片编号占位符 6"/>
+          <p:cNvSpPr>
+            <a:spLocks noGrp="1"/>
+          </p:cNvSpPr>
+          <p:nvPr>
+            <p:ph type="sldNum" sz="quarter" idx="5"/>
+          </p:nvPr>
+        </p:nvSpPr>
+        <p:spPr>
+          <a:xfrm>
+            <a:off x="3884613" y="8685213"/>
+            <a:ext cx="2971800" cy="458787"/>
+          </a:xfrm>
+          <a:prstGeom prst="rect">
+            <a:avLst/>
+          </a:prstGeom>
+        </p:spPr>
+        <p:txBody>
+          <a:bodyPr vert="horz" lIns="91440" tIns="45720" rIns="91440" bIns="45720" rtlCol="0" anchor="b"/>
+          <a:lstStyle>
+            <a:lvl1pPr algn="r">
+              <a:defRPr sz="1200"/>
+            </a:lvl1pPr>
+          </a:lstStyle>
+          <a:p>
+            <a:fld id="{A6837353-30EB-4A48-80EB-173D804AEFBD}" type="slidenum">
+              <a:rPr lang="zh-CN" altLang="en-US" smtClean="0"/>
+            </a:fld>
+            <a:endParaRPr lang="zh-CN" altLang="en-US"/>
+          </a:p>
+        </p:txBody>
+      </p:sp>
+    </p:spTree>
+  </p:cSld>
+  <p:clrMap bg1="lt1" tx1="dk1" bg2="lt2" tx2="dk2" accent1="accent1" accent2="accent2" accent3="accent3" accent4="accent4" accent5="accent5" accent6="accent6" hlink="hlink" folHlink="folHlink"/>
+  <p:notesStyle>
+    <a:lvl1pPr marL="0" algn="l" defTabSz="914400" rtl="0" eaLnBrk="1" latinLnBrk="0" hangingPunct="1">
+      <a:defRPr sz="1200" kern="1200">
+        <a:solidFill>
+          <a:schemeClr val="tx1"/>
+        </a:solidFill>
+        <a:latin typeface="+mn-lt"/>
+        <a:ea typeface="+mn-ea"/>
+        <a:cs typeface="+mn-cs"/>
+      </a:defRPr>
+    </a:lvl1pPr>
+    <a:lvl2pPr marL="457200" algn="l" defTabSz="914400" rtl="0" eaLnBrk="1" latinLnBrk="0" hangingPunct="1">
+      <a:defRPr sz="1200" kern="1200">
+        <a:solidFill>
+          <a:schemeClr val="tx1"/>
+        </a:solidFill>
+        <a:latin typeface="+mn-lt"/>
+        <a:ea typeface="+mn-ea"/>
+        <a:cs typeface="+mn-cs"/>
+      </a:defRPr>
+    </a:lvl2pPr>
+    <a:lvl3pPr marL="914400" algn="l" defTabSz="914400" rtl="0" eaLnBrk="1" latinLnBrk="0" hangingPunct="1">
+      <a:defRPr sz="1200" kern="1200">
+        <a:solidFill>
+          <a:schemeClr val="tx1"/>
+        </a:solidFill>
+        <a:latin typeface="+mn-lt"/>
+        <a:ea typeface="+mn-ea"/>
+        <a:cs typeface="+mn-cs"/>
+      </a:defRPr>
+    </a:lvl3pPr>
+    <a:lvl4pPr marL="1371600" algn="l" defTabSz="914400" rtl="0" eaLnBrk="1" latinLnBrk="0" hangingPunct="1">
+      <a:defRPr sz="1200" kern="1200">
+        <a:solidFill>
+          <a:schemeClr val="tx1"/>
+        </a:solidFill>
+        <a:latin typeface="+mn-lt"/>
+        <a:ea typeface="+mn-ea"/>
+        <a:cs typeface="+mn-cs"/>
+      </a:defRPr>
+    </a:lvl4pPr>
+    <a:lvl5pPr marL="1828800" algn="l" defTabSz="914400" rtl="0" eaLnBrk="1" latinLnBrk="0" hangingPunct="1">
+      <a:defRPr sz="1200" kern="1200">
+        <a:solidFill>
+          <a:schemeClr val="tx1"/>
+        </a:solidFill>
+        <a:latin typeface="+mn-lt"/>
+        <a:ea typeface="+mn-ea"/>
+        <a:cs typeface="+mn-cs"/>
+      </a:defRPr>
+    </a:lvl5pPr>
+    <a:lvl6pPr marL="2286000" algn="l" defTabSz="914400" rtl="0" eaLnBrk="1" latinLnBrk="0" hangingPunct="1">
+      <a:defRPr sz="1200" kern="1200">
+        <a:solidFill>
+          <a:schemeClr val="tx1"/>
+        </a:solidFill>
+        <a:latin typeface="+mn-lt"/>
+        <a:ea typeface="+mn-ea"/>
+        <a:cs typeface="+mn-cs"/>
+      </a:defRPr>
+    </a:lvl6pPr>
+    <a:lvl7pPr marL="2743200" algn="l" defTabSz="914400" rtl="0" eaLnBrk="1" latinLnBrk="0" hangingPunct="1">
+      <a:defRPr sz="1200" kern="1200">
+        <a:solidFill>
+          <a:schemeClr val="tx1"/>
+        </a:solidFill>
+        <a:latin typeface="+mn-lt"/>
+        <a:ea typeface="+mn-ea"/>
+        <a:cs typeface="+mn-cs"/>
+      </a:defRPr>
+    </a:lvl7pPr>
+    <a:lvl8pPr marL="3200400" algn="l" defTabSz="914400" rtl="0" eaLnBrk="1" latinLnBrk="0" hangingPunct="1">
+      <a:defRPr sz="1200" kern="1200">
+        <a:solidFill>
+          <a:schemeClr val="tx1"/>
+        </a:solidFill>
+        <a:latin typeface="+mn-lt"/>
+        <a:ea typeface="+mn-ea"/>
+        <a:cs typeface="+mn-cs"/>
+      </a:defRPr>
+    </a:lvl8pPr>
+    <a:lvl9pPr marL="3657600" algn="l" defTabSz="914400" rtl="0" eaLnBrk="1" latinLnBrk="0" hangingPunct="1">
+      <a:defRPr sz="1200" kern="1200">
+        <a:solidFill>
+          <a:schemeClr val="tx1"/>
+        </a:solidFill>
+        <a:latin typeface="+mn-lt"/>
+        <a:ea typeface="+mn-ea"/>
+        <a:cs typeface="+mn-cs"/>
+      </a:defRPr>
+    </a:lvl9pPr>
+  </p:notesStyle>
+</p:notesMaster>
+</file>
+
+<file path=ppt/notesSlides/notesSlide1.xml><?xml version="1.0" encoding="utf-8"?>
+<p:notes xmlns:a="http://schemas.openxmlformats.org/drawingml/2006/main" xmlns:r="http://schemas.openxmlformats.org/officeDocument/2006/relationships" xmlns:p="http://schemas.openxmlformats.org/presentationml/2006/main">
+  <p:cSld>
+    <p:spTree>
+      <p:nvGrpSpPr>
+        <p:cNvPr id="1" name=""/>
+        <p:cNvGrpSpPr/>
+        <p:nvPr/>
+      </p:nvGrpSpPr>
+      <p:grpSpPr/>
+      <p:sp>
+        <p:nvSpPr>
+          <p:cNvPr id="2" name="幻灯片图像占位符 1"/>
+          <p:cNvSpPr>
+            <a:spLocks noGrp="1"/>
+          </p:cNvSpPr>
+          <p:nvPr>
+            <p:ph type="sldImg" idx="2"/>
+          </p:nvPr>
+        </p:nvSpPr>
+        <p:spPr/>
+      </p:sp>
+      <p:sp>
+        <p:nvSpPr>
+          <p:cNvPr id="3" name="文本占位符 2"/>
+          <p:cNvSpPr>
+            <a:spLocks noGrp="1"/>
+          </p:cNvSpPr>
+          <p:nvPr>
+            <p:ph type="body" idx="3"/>
+          </p:nvPr>
+        </p:nvSpPr>
+        <p:spPr/>
+        <p:txBody>
+          <a:bodyPr/>
+          <a:p>
+            <a:endParaRPr lang="zh-CN" altLang="en-US"/>
+          </a:p>
+        </p:txBody>
+      </p:sp>
+    </p:spTree>
+  </p:cSld>
+  <p:clrMapOvr>
+    <a:masterClrMapping/>
+  </p:clrMapOvr>
+</p:notes>
+</file>
+
+<file path=ppt/notesSlides/notesSlide2.xml><?xml version="1.0" encoding="utf-8"?>
+<p:notes xmlns:a="http://schemas.openxmlformats.org/drawingml/2006/main" xmlns:r="http://schemas.openxmlformats.org/officeDocument/2006/relationships" xmlns:p="http://schemas.openxmlformats.org/presentationml/2006/main">
+  <p:cSld>
+    <p:spTree>
+      <p:nvGrpSpPr>
+        <p:cNvPr id="1" name=""/>
+        <p:cNvGrpSpPr/>
+        <p:nvPr/>
+      </p:nvGrpSpPr>
+      <p:grpSpPr/>
+      <p:sp>
+        <p:nvSpPr>
+          <p:cNvPr id="2" name="幻灯片图像占位符 1"/>
+          <p:cNvSpPr>
+            <a:spLocks noGrp="1"/>
+          </p:cNvSpPr>
+          <p:nvPr>
+            <p:ph type="sldImg" idx="2"/>
+          </p:nvPr>
+        </p:nvSpPr>
+        <p:spPr/>
+      </p:sp>
+      <p:sp>
+        <p:nvSpPr>
+          <p:cNvPr id="3" name="文本占位符 2"/>
+          <p:cNvSpPr>
+            <a:spLocks noGrp="1"/>
+          </p:cNvSpPr>
+          <p:nvPr>
+            <p:ph type="body" idx="3"/>
+          </p:nvPr>
+        </p:nvSpPr>
+        <p:spPr/>
+        <p:txBody>
+          <a:bodyPr/>
+          <a:p>
+            <a:endParaRPr lang="zh-CN" altLang="en-US"/>
+          </a:p>
+        </p:txBody>
+      </p:sp>
+    </p:spTree>
+  </p:cSld>
+  <p:clrMapOvr>
+    <a:masterClrMapping/>
+  </p:clrMapOvr>
+</p:notes>
+</file>
+
+<file path=ppt/notesSlides/notesSlide3.xml><?xml version="1.0" encoding="utf-8"?>
+<p:notes xmlns:a="http://schemas.openxmlformats.org/drawingml/2006/main" xmlns:r="http://schemas.openxmlformats.org/officeDocument/2006/relationships" xmlns:p="http://schemas.openxmlformats.org/presentationml/2006/main">
+  <p:cSld>
+    <p:spTree>
+      <p:nvGrpSpPr>
+        <p:cNvPr id="1" name=""/>
+        <p:cNvGrpSpPr/>
+        <p:nvPr/>
+      </p:nvGrpSpPr>
+      <p:grpSpPr/>
+      <p:sp>
+        <p:nvSpPr>
+          <p:cNvPr id="2" name="幻灯片图像占位符 1"/>
+          <p:cNvSpPr>
+            <a:spLocks noGrp="1"/>
+          </p:cNvSpPr>
+          <p:nvPr>
+            <p:ph type="sldImg" idx="2"/>
+          </p:nvPr>
+        </p:nvSpPr>
+        <p:spPr/>
+      </p:sp>
+      <p:sp>
+        <p:nvSpPr>
+          <p:cNvPr id="3" name="文本占位符 2"/>
+          <p:cNvSpPr>
+            <a:spLocks noGrp="1"/>
+          </p:cNvSpPr>
+          <p:nvPr>
+            <p:ph type="body" idx="3"/>
+          </p:nvPr>
+        </p:nvSpPr>
+        <p:spPr/>
+        <p:txBody>
+          <a:bodyPr/>
+          <a:p>
+            <a:endParaRPr lang="zh-CN" altLang="en-US"/>
+          </a:p>
+        </p:txBody>
+      </p:sp>
+    </p:spTree>
+  </p:cSld>
+  <p:clrMapOvr>
+    <a:masterClrMapping/>
+  </p:clrMapOvr>
+</p:notes>
+</file>
+
+<file path=ppt/notesSlides/notesSlide4.xml><?xml version="1.0" encoding="utf-8"?>
+<p:notes xmlns:a="http://schemas.openxmlformats.org/drawingml/2006/main" xmlns:r="http://schemas.openxmlformats.org/officeDocument/2006/relationships" xmlns:p="http://schemas.openxmlformats.org/presentationml/2006/main">
+  <p:cSld>
+    <p:spTree>
+      <p:nvGrpSpPr>
+        <p:cNvPr id="1" name=""/>
+        <p:cNvGrpSpPr/>
+        <p:nvPr/>
+      </p:nvGrpSpPr>
+      <p:grpSpPr/>
+      <p:sp>
+        <p:nvSpPr>
+          <p:cNvPr id="2" name="幻灯片图像占位符 1"/>
+          <p:cNvSpPr>
+            <a:spLocks noGrp="1"/>
+          </p:cNvSpPr>
+          <p:nvPr>
+            <p:ph type="sldImg" idx="2"/>
+          </p:nvPr>
+        </p:nvSpPr>
+        <p:spPr/>
+      </p:sp>
+      <p:sp>
+        <p:nvSpPr>
+          <p:cNvPr id="3" name="文本占位符 2"/>
+          <p:cNvSpPr>
+            <a:spLocks noGrp="1"/>
+          </p:cNvSpPr>
+          <p:nvPr>
+            <p:ph type="body" idx="3"/>
+          </p:nvPr>
+        </p:nvSpPr>
+        <p:spPr/>
+        <p:txBody>
+          <a:bodyPr/>
+          <a:p>
+            <a:endParaRPr lang="zh-CN" altLang="en-US"/>
+          </a:p>
+        </p:txBody>
+      </p:sp>
+    </p:spTree>
+  </p:cSld>
+  <p:clrMapOvr>
+    <a:masterClrMapping/>
+  </p:clrMapOvr>
+</p:notes>
 </file>
 
 <file path=ppt/slideLayouts/slideLayout1.xml><?xml version="1.0" encoding="utf-8"?>
@@ -11971,7 +12516,7 @@
         <p:spPr>
           <a:xfrm>
             <a:off x="822960" y="1417320"/>
-            <a:ext cx="6583680" cy="4023360"/>
+            <a:ext cx="6583680" cy="4056380"/>
           </a:xfrm>
           <a:prstGeom prst="rect">
             <a:avLst/>
@@ -11984,7 +12529,10 @@
           </a:bodyPr>
           <a:lstStyle/>
           <a:p>
-            <a:pPr>
+            <a:pPr indent="0" fontAlgn="auto">
+              <a:lnSpc>
+                <a:spcPct val="200000"/>
+              </a:lnSpc>
               <a:spcAft>
                 <a:spcPts val="1000"/>
               </a:spcAft>
@@ -12000,7 +12548,10 @@
             </a:r>
           </a:p>
           <a:p>
-            <a:pPr>
+            <a:pPr indent="0" fontAlgn="auto">
+              <a:lnSpc>
+                <a:spcPct val="200000"/>
+              </a:lnSpc>
               <a:spcAft>
                 <a:spcPts val="1000"/>
               </a:spcAft>
@@ -12016,7 +12567,10 @@
             </a:r>
           </a:p>
           <a:p>
-            <a:pPr>
+            <a:pPr indent="0" fontAlgn="auto">
+              <a:lnSpc>
+                <a:spcPct val="200000"/>
+              </a:lnSpc>
               <a:spcAft>
                 <a:spcPts val="1000"/>
               </a:spcAft>
@@ -12032,7 +12586,10 @@
             </a:r>
           </a:p>
           <a:p>
-            <a:pPr>
+            <a:pPr indent="0" fontAlgn="auto">
+              <a:lnSpc>
+                <a:spcPct val="200000"/>
+              </a:lnSpc>
               <a:spcAft>
                 <a:spcPts val="1000"/>
               </a:spcAft>
@@ -12048,7 +12605,10 @@
             </a:r>
           </a:p>
           <a:p>
-            <a:pPr>
+            <a:pPr indent="0" fontAlgn="auto">
+              <a:lnSpc>
+                <a:spcPct val="200000"/>
+              </a:lnSpc>
               <a:spcAft>
                 <a:spcPts val="1000"/>
               </a:spcAft>
@@ -12064,7 +12624,10 @@
             </a:r>
           </a:p>
           <a:p>
-            <a:pPr>
+            <a:pPr indent="0" fontAlgn="auto">
+              <a:lnSpc>
+                <a:spcPct val="200000"/>
+              </a:lnSpc>
               <a:spcAft>
                 <a:spcPts val="1000"/>
               </a:spcAft>
@@ -12676,7 +13239,7 @@
         <p:spPr>
           <a:xfrm>
             <a:off x="822960" y="1234440"/>
-            <a:ext cx="10332720" cy="594360"/>
+            <a:ext cx="10332720" cy="706755"/>
           </a:xfrm>
           <a:prstGeom prst="rect">
             <a:avLst/>
@@ -12698,8 +13261,10 @@
               </a:defRPr>
             </a:pPr>
             <a:r>
+              <a:rPr sz="2000"/>
               <a:t>面向教育领域 PDF 标准文档，自动完成 PDF 解析、数据清洗、大模型语义抽取、Schema 匹配、本体对齐和 OWL 导出。</a:t>
             </a:r>
+            <a:endParaRPr sz="2000"/>
           </a:p>
         </p:txBody>
       </p:sp>
@@ -12756,8 +13321,8 @@
         </p:nvSpPr>
         <p:spPr>
           <a:xfrm>
-            <a:off x="822833" y="2586990"/>
-            <a:ext cx="1929384" cy="1472184"/>
+            <a:off x="822833" y="2923667"/>
+            <a:ext cx="1929384" cy="798830"/>
           </a:xfrm>
           <a:prstGeom prst="rect">
             <a:avLst/>
@@ -12779,8 +13344,10 @@
               </a:defRPr>
             </a:pPr>
             <a:r>
+              <a:rPr sz="1800"/>
               <a:t>输入</a:t>
             </a:r>
+            <a:endParaRPr sz="1800"/>
           </a:p>
           <a:p>
             <a:pPr algn="ctr">
@@ -12792,12 +13359,17 @@
               </a:defRPr>
             </a:pPr>
             <a:r>
+              <a:rPr sz="1400"/>
               <a:t>教育类 PDF 文档</a:t>
             </a:r>
-            <a:br/>
-            <a:r>
+            <a:br>
+              <a:rPr sz="1400"/>
+            </a:br>
+            <a:r>
+              <a:rPr sz="1400"/>
               <a:t>表格与字段说明</a:t>
             </a:r>
+            <a:endParaRPr sz="1400"/>
           </a:p>
         </p:txBody>
       </p:sp>
@@ -12854,8 +13426,8 @@
         </p:nvSpPr>
         <p:spPr>
           <a:xfrm>
-            <a:off x="3611752" y="2586990"/>
-            <a:ext cx="1929384" cy="1472184"/>
+            <a:off x="3611752" y="2600452"/>
+            <a:ext cx="1929384" cy="1445260"/>
           </a:xfrm>
           <a:prstGeom prst="rect">
             <a:avLst/>
@@ -12877,8 +13449,10 @@
               </a:defRPr>
             </a:pPr>
             <a:r>
+              <a:rPr sz="1800"/>
               <a:t>处理流程</a:t>
             </a:r>
+            <a:endParaRPr sz="1800"/>
           </a:p>
           <a:p>
             <a:pPr algn="ctr">
@@ -12890,16 +13464,24 @@
               </a:defRPr>
             </a:pPr>
             <a:r>
+              <a:rPr sz="1400"/>
               <a:t>PDF解析 → 数据清洗</a:t>
             </a:r>
-            <a:br/>
-            <a:r>
+            <a:br>
+              <a:rPr sz="1400"/>
+            </a:br>
+            <a:r>
+              <a:rPr sz="1400"/>
               <a:t>LLM抽取 → Schema匹配</a:t>
             </a:r>
-            <a:br/>
-            <a:r>
+            <a:br>
+              <a:rPr sz="1400"/>
+            </a:br>
+            <a:r>
+              <a:rPr sz="1400"/>
               <a:t>本体对齐 → OWL生成</a:t>
             </a:r>
+            <a:endParaRPr sz="1400"/>
           </a:p>
         </p:txBody>
       </p:sp>
@@ -12956,8 +13538,8 @@
         </p:nvSpPr>
         <p:spPr>
           <a:xfrm>
-            <a:off x="6400673" y="2586990"/>
-            <a:ext cx="1929384" cy="1472184"/>
+            <a:off x="6400673" y="2815717"/>
+            <a:ext cx="1929384" cy="1014730"/>
           </a:xfrm>
           <a:prstGeom prst="rect">
             <a:avLst/>
@@ -12979,8 +13561,10 @@
               </a:defRPr>
             </a:pPr>
             <a:r>
+              <a:rPr sz="1800"/>
               <a:t>输出</a:t>
             </a:r>
+            <a:endParaRPr sz="1800"/>
           </a:p>
           <a:p>
             <a:pPr algn="ctr">
@@ -12992,16 +13576,24 @@
               </a:defRPr>
             </a:pPr>
             <a:r>
+              <a:rPr sz="1400"/>
               <a:t>结构化本体 JSON</a:t>
             </a:r>
-            <a:br/>
-            <a:r>
+            <a:br>
+              <a:rPr sz="1400"/>
+            </a:br>
+            <a:r>
+              <a:rPr sz="1400"/>
               <a:t>OWL 文件</a:t>
             </a:r>
-            <a:br/>
-            <a:r>
+            <a:br>
+              <a:rPr sz="1400"/>
+            </a:br>
+            <a:r>
+              <a:rPr sz="1400"/>
               <a:t>溯源记录与系统日志</a:t>
             </a:r>
+            <a:endParaRPr sz="1400"/>
           </a:p>
         </p:txBody>
       </p:sp>
@@ -13058,8 +13650,8 @@
         </p:nvSpPr>
         <p:spPr>
           <a:xfrm>
-            <a:off x="9189592" y="2586990"/>
-            <a:ext cx="1929384" cy="1472184"/>
+            <a:off x="9189592" y="2923667"/>
+            <a:ext cx="1929384" cy="798830"/>
           </a:xfrm>
           <a:prstGeom prst="rect">
             <a:avLst/>
@@ -13081,8 +13673,10 @@
               </a:defRPr>
             </a:pPr>
             <a:r>
+              <a:rPr sz="1800"/>
               <a:t>项目特点</a:t>
             </a:r>
+            <a:endParaRPr sz="1800"/>
           </a:p>
           <a:p>
             <a:pPr algn="ctr">
@@ -13094,12 +13688,17 @@
               </a:defRPr>
             </a:pPr>
             <a:r>
+              <a:rPr sz="1400"/>
               <a:t>自动化 / 可导出</a:t>
             </a:r>
-            <a:br/>
-            <a:r>
+            <a:br>
+              <a:rPr sz="1400"/>
+            </a:br>
+            <a:r>
+              <a:rPr sz="1400"/>
               <a:t>可追踪 / 可审计</a:t>
             </a:r>
+            <a:endParaRPr sz="1400"/>
           </a:p>
         </p:txBody>
       </p:sp>
@@ -13261,8 +13860,8 @@
         </p:nvSpPr>
         <p:spPr>
           <a:xfrm>
-            <a:off x="1005840" y="5687568"/>
-            <a:ext cx="10149840" cy="411480"/>
+            <a:off x="2615565" y="5687568"/>
+            <a:ext cx="6930390" cy="337185"/>
           </a:xfrm>
           <a:prstGeom prst="rect">
             <a:avLst/>
@@ -13284,8 +13883,10 @@
               </a:defRPr>
             </a:pPr>
             <a:r>
+              <a:rPr sz="1600"/>
               <a:t>项目定位：把教育标准文档中的字段知识转化为可复用、可导出的教育本体</a:t>
             </a:r>
+            <a:endParaRPr sz="1600"/>
           </a:p>
         </p:txBody>
       </p:sp>
@@ -16349,7 +16950,7 @@
 </file>
 
 <file path=ppt/slides/slide24.xml><?xml version="1.0" encoding="utf-8"?>
-<p:sld xmlns:a="http://schemas.openxmlformats.org/drawingml/2006/main" xmlns:p="http://schemas.openxmlformats.org/presentationml/2006/main" xmlns:r="http://schemas.openxmlformats.org/officeDocument/2006/relationships">
+<p:sld xmlns:a="http://schemas.openxmlformats.org/drawingml/2006/main" xmlns:r="http://schemas.openxmlformats.org/officeDocument/2006/relationships" xmlns:p="http://schemas.openxmlformats.org/presentationml/2006/main">
   <p:cSld>
     <p:spTree>
       <p:nvGrpSpPr>
@@ -16514,7 +17115,7 @@
                 <a:solidFill>
                   <a:srgbClr val="0F2344"/>
                 </a:solidFill>
-                <a:latin typeface="Microsoft YaHei"/>
+                <a:latin typeface="微软雅黑" panose="020B0503020204020204" charset="-122"/>
               </a:defRPr>
             </a:pPr>
             <a:r>
@@ -16673,7 +17274,7 @@
                 <a:solidFill>
                   <a:srgbClr val="0F2344"/>
                 </a:solidFill>
-                <a:latin typeface="Microsoft YaHei"/>
+                <a:latin typeface="微软雅黑" panose="020B0503020204020204" charset="-122"/>
               </a:defRPr>
             </a:pPr>
             <a:r>
@@ -16789,7 +17390,7 @@
                 <a:solidFill>
                   <a:srgbClr val="0F2344"/>
                 </a:solidFill>
-                <a:latin typeface="Microsoft YaHei"/>
+                <a:latin typeface="微软雅黑" panose="020B0503020204020204" charset="-122"/>
               </a:defRPr>
             </a:pPr>
             <a:r>
@@ -16905,7 +17506,7 @@
                 <a:solidFill>
                   <a:srgbClr val="0F2344"/>
                 </a:solidFill>
-                <a:latin typeface="Microsoft YaHei"/>
+                <a:latin typeface="微软雅黑" panose="020B0503020204020204" charset="-122"/>
               </a:defRPr>
             </a:pPr>
             <a:r>
@@ -17021,7 +17622,7 @@
                 <a:solidFill>
                   <a:srgbClr val="0F2344"/>
                 </a:solidFill>
-                <a:latin typeface="Microsoft YaHei"/>
+                <a:latin typeface="微软雅黑" panose="020B0503020204020204" charset="-122"/>
               </a:defRPr>
             </a:pPr>
             <a:r>
@@ -17137,7 +17738,7 @@
                 <a:solidFill>
                   <a:srgbClr val="0F2344"/>
                 </a:solidFill>
-                <a:latin typeface="Microsoft YaHei"/>
+                <a:latin typeface="微软雅黑" panose="020B0503020204020204" charset="-122"/>
               </a:defRPr>
             </a:pPr>
             <a:r>
@@ -17253,7 +17854,7 @@
                 <a:solidFill>
                   <a:srgbClr val="0F2344"/>
                 </a:solidFill>
-                <a:latin typeface="Microsoft YaHei"/>
+                <a:latin typeface="微软雅黑" panose="020B0503020204020204" charset="-122"/>
               </a:defRPr>
             </a:pPr>
             <a:r>
@@ -17334,7 +17935,7 @@
                 <a:solidFill>
                   <a:srgbClr val="0F2344"/>
                 </a:solidFill>
-                <a:latin typeface="Microsoft YaHei"/>
+                <a:latin typeface="微软雅黑" panose="020B0503020204020204" charset="-122"/>
               </a:defRPr>
             </a:pPr>
             <a:r>
@@ -17347,7 +17948,7 @@
                 <a:solidFill>
                   <a:srgbClr val="5D6F88"/>
                 </a:solidFill>
-                <a:latin typeface="Microsoft YaHei"/>
+                <a:latin typeface="微软雅黑" panose="020B0503020204020204" charset="-122"/>
               </a:defRPr>
             </a:pPr>
             <a:r>
@@ -17360,11 +17961,15 @@
         <p:nvSpPr>
           <p:cNvPr id="27" name="TextBox 26"/>
           <p:cNvSpPr txBox="1"/>
-          <p:nvPr/>
-        </p:nvSpPr>
-        <p:spPr>
-          <a:xfrm>
-            <a:off x="3063240" y="1234440"/>
+          <p:nvPr>
+            <p:custDataLst>
+              <p:tags r:id="rId1"/>
+            </p:custDataLst>
+          </p:nvPr>
+        </p:nvSpPr>
+        <p:spPr>
+          <a:xfrm>
+            <a:off x="5539740" y="1203960"/>
             <a:ext cx="3474720" cy="256032"/>
           </a:xfrm>
           <a:prstGeom prst="rect">
@@ -17383,7 +17988,7 @@
                 <a:solidFill>
                   <a:srgbClr val="0F2344"/>
                 </a:solidFill>
-                <a:latin typeface="Microsoft YaHei"/>
+                <a:latin typeface="微软雅黑" panose="020B0503020204020204" charset="-122"/>
               </a:defRPr>
             </a:pPr>
             <a:r>
@@ -17396,12 +18001,16 @@
         <p:nvSpPr>
           <p:cNvPr id="28" name="Rectangle 27"/>
           <p:cNvSpPr/>
-          <p:nvPr/>
-        </p:nvSpPr>
-        <p:spPr>
-          <a:xfrm>
-            <a:off x="3063240" y="1563624"/>
-            <a:ext cx="3474720" cy="1298448"/>
+          <p:nvPr>
+            <p:custDataLst>
+              <p:tags r:id="rId2"/>
+            </p:custDataLst>
+          </p:nvPr>
+        </p:nvSpPr>
+        <p:spPr>
+          <a:xfrm>
+            <a:off x="3063240" y="1563370"/>
+            <a:ext cx="8549640" cy="4422775"/>
           </a:xfrm>
           <a:prstGeom prst="rect">
             <a:avLst/>
@@ -17439,14 +18048,18 @@
       </p:sp>
       <p:sp>
         <p:nvSpPr>
-          <p:cNvPr id="29" name="TextBox 28"/>
+          <p:cNvPr id="30" name="TextBox 29"/>
           <p:cNvSpPr txBox="1"/>
-          <p:nvPr/>
-        </p:nvSpPr>
-        <p:spPr>
-          <a:xfrm>
-            <a:off x="3154680" y="2103120"/>
-            <a:ext cx="3291839" cy="274320"/>
+          <p:nvPr>
+            <p:custDataLst>
+              <p:tags r:id="rId3"/>
+            </p:custDataLst>
+          </p:nvPr>
+        </p:nvSpPr>
+        <p:spPr>
+          <a:xfrm>
+            <a:off x="5453380" y="6089777"/>
+            <a:ext cx="3291840" cy="384048"/>
           </a:xfrm>
           <a:prstGeom prst="rect">
             <a:avLst/>
@@ -17460,47 +18073,11 @@
           <a:lstStyle/>
           <a:p>
             <a:pPr algn="ctr">
-              <a:defRPr sz="1200" b="0">
+              <a:defRPr sz="1050" b="0">
                 <a:solidFill>
                   <a:srgbClr val="5D6F88"/>
                 </a:solidFill>
-                <a:latin typeface="Microsoft YaHei"/>
-              </a:defRPr>
-            </a:pPr>
-            <a:r>
-              <a:t>【截图区域】</a:t>
-            </a:r>
-          </a:p>
-        </p:txBody>
-      </p:sp>
-      <p:sp>
-        <p:nvSpPr>
-          <p:cNvPr id="30" name="TextBox 29"/>
-          <p:cNvSpPr txBox="1"/>
-          <p:nvPr/>
-        </p:nvSpPr>
-        <p:spPr>
-          <a:xfrm>
-            <a:off x="3154680" y="2953512"/>
-            <a:ext cx="3291840" cy="384048"/>
-          </a:xfrm>
-          <a:prstGeom prst="rect">
-            <a:avLst/>
-          </a:prstGeom>
-          <a:noFill/>
-        </p:spPr>
-        <p:txBody>
-          <a:bodyPr wrap="square">
-            <a:spAutoFit/>
-          </a:bodyPr>
-          <a:lstStyle/>
-          <a:p>
-            <a:pPr algn="ctr">
-              <a:defRPr sz="1050" b="0">
-                <a:solidFill>
-                  <a:srgbClr val="5D6F88"/>
-                </a:solidFill>
-                <a:latin typeface="Microsoft YaHei"/>
+                <a:latin typeface="微软雅黑" panose="020B0503020204020204" charset="-122"/>
               </a:defRPr>
             </a:pPr>
             <a:r>
@@ -17509,465 +18086,30 @@
           </a:p>
         </p:txBody>
       </p:sp>
-      <p:sp>
-        <p:nvSpPr>
-          <p:cNvPr id="31" name="TextBox 30"/>
-          <p:cNvSpPr txBox="1"/>
-          <p:nvPr/>
-        </p:nvSpPr>
-        <p:spPr>
-          <a:xfrm>
-            <a:off x="7223760" y="1234440"/>
-            <a:ext cx="3474720" cy="256032"/>
-          </a:xfrm>
-          <a:prstGeom prst="rect">
-            <a:avLst/>
-          </a:prstGeom>
-          <a:noFill/>
-        </p:spPr>
-        <p:txBody>
-          <a:bodyPr wrap="square">
-            <a:spAutoFit/>
-          </a:bodyPr>
-          <a:lstStyle/>
-          <a:p>
-            <a:pPr algn="ctr">
-              <a:defRPr sz="1300" b="1">
-                <a:solidFill>
-                  <a:srgbClr val="0F2344"/>
-                </a:solidFill>
-                <a:latin typeface="Microsoft YaHei"/>
-              </a:defRPr>
-            </a:pPr>
-            <a:r>
-              <a:t>PDF上传与生成任务截图</a:t>
-            </a:r>
-          </a:p>
-        </p:txBody>
-      </p:sp>
-      <p:sp>
-        <p:nvSpPr>
-          <p:cNvPr id="32" name="Rectangle 31"/>
-          <p:cNvSpPr/>
-          <p:nvPr/>
-        </p:nvSpPr>
-        <p:spPr>
-          <a:xfrm>
-            <a:off x="7223760" y="1563624"/>
-            <a:ext cx="3474720" cy="1298448"/>
-          </a:xfrm>
-          <a:prstGeom prst="rect">
-            <a:avLst/>
-          </a:prstGeom>
-          <a:solidFill>
-            <a:srgbClr val="E8EDF4"/>
-          </a:solidFill>
-          <a:ln>
-            <a:solidFill>
-              <a:srgbClr val="B1C6E0"/>
-            </a:solidFill>
-          </a:ln>
-        </p:spPr>
-        <p:style>
-          <a:lnRef idx="1">
-            <a:schemeClr val="accent1"/>
-          </a:lnRef>
-          <a:fillRef idx="3">
-            <a:schemeClr val="accent1"/>
-          </a:fillRef>
-          <a:effectRef idx="2">
-            <a:schemeClr val="accent1"/>
-          </a:effectRef>
-          <a:fontRef idx="minor">
-            <a:schemeClr val="lt1"/>
-          </a:fontRef>
-        </p:style>
-        <p:txBody>
-          <a:bodyPr rtlCol="0" anchor="ctr"/>
-          <a:lstStyle/>
-          <a:p>
-            <a:pPr algn="ctr"/>
-          </a:p>
-        </p:txBody>
-      </p:sp>
-      <p:sp>
-        <p:nvSpPr>
-          <p:cNvPr id="33" name="TextBox 32"/>
-          <p:cNvSpPr txBox="1"/>
-          <p:nvPr/>
-        </p:nvSpPr>
-        <p:spPr>
-          <a:xfrm>
-            <a:off x="7315200" y="2103120"/>
-            <a:ext cx="3291839" cy="274320"/>
-          </a:xfrm>
-          <a:prstGeom prst="rect">
-            <a:avLst/>
-          </a:prstGeom>
-          <a:noFill/>
-        </p:spPr>
-        <p:txBody>
-          <a:bodyPr wrap="square">
-            <a:spAutoFit/>
-          </a:bodyPr>
-          <a:lstStyle/>
-          <a:p>
-            <a:pPr algn="ctr">
-              <a:defRPr sz="1200" b="0">
-                <a:solidFill>
-                  <a:srgbClr val="5D6F88"/>
-                </a:solidFill>
-                <a:latin typeface="Microsoft YaHei"/>
-              </a:defRPr>
-            </a:pPr>
-            <a:r>
-              <a:t>【截图区域】</a:t>
-            </a:r>
-          </a:p>
-        </p:txBody>
-      </p:sp>
-      <p:sp>
-        <p:nvSpPr>
-          <p:cNvPr id="34" name="TextBox 33"/>
-          <p:cNvSpPr txBox="1"/>
-          <p:nvPr/>
-        </p:nvSpPr>
-        <p:spPr>
-          <a:xfrm>
-            <a:off x="7315200" y="2953512"/>
-            <a:ext cx="3291840" cy="384048"/>
-          </a:xfrm>
-          <a:prstGeom prst="rect">
-            <a:avLst/>
-          </a:prstGeom>
-          <a:noFill/>
-        </p:spPr>
-        <p:txBody>
-          <a:bodyPr wrap="square">
-            <a:spAutoFit/>
-          </a:bodyPr>
-          <a:lstStyle/>
-          <a:p>
-            <a:pPr algn="ctr">
-              <a:defRPr sz="1050" b="0">
-                <a:solidFill>
-                  <a:srgbClr val="5D6F88"/>
-                </a:solidFill>
-                <a:latin typeface="Microsoft YaHei"/>
-              </a:defRPr>
-            </a:pPr>
-            <a:r>
-              <a:t>展示：PDF 上传、任务配置、生成进度</a:t>
-            </a:r>
-          </a:p>
-        </p:txBody>
-      </p:sp>
-      <p:sp>
-        <p:nvSpPr>
-          <p:cNvPr id="35" name="TextBox 34"/>
-          <p:cNvSpPr txBox="1"/>
-          <p:nvPr/>
-        </p:nvSpPr>
-        <p:spPr>
-          <a:xfrm>
-            <a:off x="3063240" y="3566160"/>
-            <a:ext cx="3474720" cy="256032"/>
-          </a:xfrm>
-          <a:prstGeom prst="rect">
-            <a:avLst/>
-          </a:prstGeom>
-          <a:noFill/>
-        </p:spPr>
-        <p:txBody>
-          <a:bodyPr wrap="square">
-            <a:spAutoFit/>
-          </a:bodyPr>
-          <a:lstStyle/>
-          <a:p>
-            <a:pPr algn="ctr">
-              <a:defRPr sz="1300" b="1">
-                <a:solidFill>
-                  <a:srgbClr val="0F2344"/>
-                </a:solidFill>
-                <a:latin typeface="Microsoft YaHei"/>
-              </a:defRPr>
-            </a:pPr>
-            <a:r>
-              <a:t>本体生成结果截图</a:t>
-            </a:r>
-          </a:p>
-        </p:txBody>
-      </p:sp>
-      <p:sp>
-        <p:nvSpPr>
-          <p:cNvPr id="36" name="Rectangle 35"/>
-          <p:cNvSpPr/>
-          <p:nvPr/>
-        </p:nvSpPr>
-        <p:spPr>
-          <a:xfrm>
-            <a:off x="3063240" y="3895344"/>
-            <a:ext cx="3474720" cy="1298448"/>
-          </a:xfrm>
-          <a:prstGeom prst="rect">
-            <a:avLst/>
-          </a:prstGeom>
-          <a:solidFill>
-            <a:srgbClr val="E8EDF4"/>
-          </a:solidFill>
-          <a:ln>
-            <a:solidFill>
-              <a:srgbClr val="B1C6E0"/>
-            </a:solidFill>
-          </a:ln>
-        </p:spPr>
-        <p:style>
-          <a:lnRef idx="1">
-            <a:schemeClr val="accent1"/>
-          </a:lnRef>
-          <a:fillRef idx="3">
-            <a:schemeClr val="accent1"/>
-          </a:fillRef>
-          <a:effectRef idx="2">
-            <a:schemeClr val="accent1"/>
-          </a:effectRef>
-          <a:fontRef idx="minor">
-            <a:schemeClr val="lt1"/>
-          </a:fontRef>
-        </p:style>
-        <p:txBody>
-          <a:bodyPr rtlCol="0" anchor="ctr"/>
-          <a:lstStyle/>
-          <a:p>
-            <a:pPr algn="ctr"/>
-          </a:p>
-        </p:txBody>
-      </p:sp>
-      <p:sp>
-        <p:nvSpPr>
-          <p:cNvPr id="37" name="TextBox 36"/>
-          <p:cNvSpPr txBox="1"/>
-          <p:nvPr/>
-        </p:nvSpPr>
-        <p:spPr>
-          <a:xfrm>
-            <a:off x="3154680" y="4434840"/>
-            <a:ext cx="3291839" cy="274320"/>
-          </a:xfrm>
-          <a:prstGeom prst="rect">
-            <a:avLst/>
-          </a:prstGeom>
-          <a:noFill/>
-        </p:spPr>
-        <p:txBody>
-          <a:bodyPr wrap="square">
-            <a:spAutoFit/>
-          </a:bodyPr>
-          <a:lstStyle/>
-          <a:p>
-            <a:pPr algn="ctr">
-              <a:defRPr sz="1200" b="0">
-                <a:solidFill>
-                  <a:srgbClr val="5D6F88"/>
-                </a:solidFill>
-                <a:latin typeface="Microsoft YaHei"/>
-              </a:defRPr>
-            </a:pPr>
-            <a:r>
-              <a:t>【截图区域】</a:t>
-            </a:r>
-          </a:p>
-        </p:txBody>
-      </p:sp>
-      <p:sp>
-        <p:nvSpPr>
-          <p:cNvPr id="38" name="TextBox 37"/>
-          <p:cNvSpPr txBox="1"/>
-          <p:nvPr/>
-        </p:nvSpPr>
-        <p:spPr>
-          <a:xfrm>
-            <a:off x="3154680" y="5285231"/>
-            <a:ext cx="3291840" cy="384048"/>
-          </a:xfrm>
-          <a:prstGeom prst="rect">
-            <a:avLst/>
-          </a:prstGeom>
-          <a:noFill/>
-        </p:spPr>
-        <p:txBody>
-          <a:bodyPr wrap="square">
-            <a:spAutoFit/>
-          </a:bodyPr>
-          <a:lstStyle/>
-          <a:p>
-            <a:pPr algn="ctr">
-              <a:defRPr sz="1050" b="0">
-                <a:solidFill>
-                  <a:srgbClr val="5D6F88"/>
-                </a:solidFill>
-                <a:latin typeface="Microsoft YaHei"/>
-              </a:defRPr>
-            </a:pPr>
-            <a:r>
-              <a:t>展示：classes / properties / relations</a:t>
-            </a:r>
-          </a:p>
-        </p:txBody>
-      </p:sp>
-      <p:sp>
-        <p:nvSpPr>
-          <p:cNvPr id="39" name="TextBox 38"/>
-          <p:cNvSpPr txBox="1"/>
-          <p:nvPr/>
-        </p:nvSpPr>
-        <p:spPr>
-          <a:xfrm>
-            <a:off x="7223760" y="3566160"/>
-            <a:ext cx="3474720" cy="256032"/>
-          </a:xfrm>
-          <a:prstGeom prst="rect">
-            <a:avLst/>
-          </a:prstGeom>
-          <a:noFill/>
-        </p:spPr>
-        <p:txBody>
-          <a:bodyPr wrap="square">
-            <a:spAutoFit/>
-          </a:bodyPr>
-          <a:lstStyle/>
-          <a:p>
-            <a:pPr algn="ctr">
-              <a:defRPr sz="1300" b="1">
-                <a:solidFill>
-                  <a:srgbClr val="0F2344"/>
-                </a:solidFill>
-                <a:latin typeface="Microsoft YaHei"/>
-              </a:defRPr>
-            </a:pPr>
-            <a:r>
-              <a:t>OWL导出与下载截图</a:t>
-            </a:r>
-          </a:p>
-        </p:txBody>
-      </p:sp>
-      <p:sp>
-        <p:nvSpPr>
-          <p:cNvPr id="40" name="Rectangle 39"/>
-          <p:cNvSpPr/>
-          <p:nvPr/>
-        </p:nvSpPr>
-        <p:spPr>
-          <a:xfrm>
-            <a:off x="7223760" y="3895344"/>
-            <a:ext cx="3474720" cy="1298448"/>
-          </a:xfrm>
-          <a:prstGeom prst="rect">
-            <a:avLst/>
-          </a:prstGeom>
-          <a:solidFill>
-            <a:srgbClr val="E8EDF4"/>
-          </a:solidFill>
-          <a:ln>
-            <a:solidFill>
-              <a:srgbClr val="B1C6E0"/>
-            </a:solidFill>
-          </a:ln>
-        </p:spPr>
-        <p:style>
-          <a:lnRef idx="1">
-            <a:schemeClr val="accent1"/>
-          </a:lnRef>
-          <a:fillRef idx="3">
-            <a:schemeClr val="accent1"/>
-          </a:fillRef>
-          <a:effectRef idx="2">
-            <a:schemeClr val="accent1"/>
-          </a:effectRef>
-          <a:fontRef idx="minor">
-            <a:schemeClr val="lt1"/>
-          </a:fontRef>
-        </p:style>
-        <p:txBody>
-          <a:bodyPr rtlCol="0" anchor="ctr"/>
-          <a:lstStyle/>
-          <a:p>
-            <a:pPr algn="ctr"/>
-          </a:p>
-        </p:txBody>
-      </p:sp>
-      <p:sp>
-        <p:nvSpPr>
-          <p:cNvPr id="41" name="TextBox 40"/>
-          <p:cNvSpPr txBox="1"/>
-          <p:nvPr/>
-        </p:nvSpPr>
-        <p:spPr>
-          <a:xfrm>
-            <a:off x="7315200" y="4434840"/>
-            <a:ext cx="3291839" cy="274320"/>
-          </a:xfrm>
-          <a:prstGeom prst="rect">
-            <a:avLst/>
-          </a:prstGeom>
-          <a:noFill/>
-        </p:spPr>
-        <p:txBody>
-          <a:bodyPr wrap="square">
-            <a:spAutoFit/>
-          </a:bodyPr>
-          <a:lstStyle/>
-          <a:p>
-            <a:pPr algn="ctr">
-              <a:defRPr sz="1200" b="0">
-                <a:solidFill>
-                  <a:srgbClr val="5D6F88"/>
-                </a:solidFill>
-                <a:latin typeface="Microsoft YaHei"/>
-              </a:defRPr>
-            </a:pPr>
-            <a:r>
-              <a:t>【截图区域】</a:t>
-            </a:r>
-          </a:p>
-        </p:txBody>
-      </p:sp>
-      <p:sp>
-        <p:nvSpPr>
-          <p:cNvPr id="42" name="TextBox 41"/>
-          <p:cNvSpPr txBox="1"/>
-          <p:nvPr/>
-        </p:nvSpPr>
-        <p:spPr>
-          <a:xfrm>
-            <a:off x="7315200" y="5285231"/>
-            <a:ext cx="3291840" cy="384048"/>
-          </a:xfrm>
-          <a:prstGeom prst="rect">
-            <a:avLst/>
-          </a:prstGeom>
-          <a:noFill/>
-        </p:spPr>
-        <p:txBody>
-          <a:bodyPr wrap="square">
-            <a:spAutoFit/>
-          </a:bodyPr>
-          <a:lstStyle/>
-          <a:p>
-            <a:pPr algn="ctr">
-              <a:defRPr sz="1050" b="0">
-                <a:solidFill>
-                  <a:srgbClr val="5D6F88"/>
-                </a:solidFill>
-                <a:latin typeface="Microsoft YaHei"/>
-              </a:defRPr>
-            </a:pPr>
-            <a:r>
-              <a:t>展示：OWL 文件导出、下载入口</a:t>
-            </a:r>
-          </a:p>
-        </p:txBody>
-      </p:sp>
+      <p:pic>
+        <p:nvPicPr>
+          <p:cNvPr id="44" name="图片 43"/>
+          <p:cNvPicPr>
+            <a:picLocks noChangeAspect="1"/>
+          </p:cNvPicPr>
+          <p:nvPr/>
+        </p:nvPicPr>
+        <p:blipFill>
+          <a:blip r:embed="rId4"/>
+          <a:stretch>
+            <a:fillRect/>
+          </a:stretch>
+        </p:blipFill>
+        <p:spPr>
+          <a:xfrm>
+            <a:off x="3063240" y="1602105"/>
+            <a:ext cx="8557895" cy="4381500"/>
+          </a:xfrm>
+          <a:prstGeom prst="rect">
+            <a:avLst/>
+          </a:prstGeom>
+        </p:spPr>
+      </p:pic>
     </p:spTree>
   </p:cSld>
   <p:clrMapOvr>
@@ -17977,7 +18119,7 @@
 </file>
 
 <file path=ppt/slides/slide25.xml><?xml version="1.0" encoding="utf-8"?>
-<p:sld xmlns:a="http://schemas.openxmlformats.org/drawingml/2006/main" xmlns:p="http://schemas.openxmlformats.org/presentationml/2006/main" xmlns:r="http://schemas.openxmlformats.org/officeDocument/2006/relationships">
+<p:sld xmlns:a="http://schemas.openxmlformats.org/drawingml/2006/main" xmlns:r="http://schemas.openxmlformats.org/officeDocument/2006/relationships" xmlns:p="http://schemas.openxmlformats.org/presentationml/2006/main">
   <p:cSld>
     <p:spTree>
       <p:nvGrpSpPr>
@@ -18142,11 +18284,11 @@
                 <a:solidFill>
                   <a:srgbClr val="0F2344"/>
                 </a:solidFill>
-                <a:latin typeface="Microsoft YaHei"/>
-              </a:defRPr>
-            </a:pPr>
-            <a:r>
-              <a:t>本体生成成果统计</a:t>
+                <a:latin typeface="微软雅黑" panose="020B0503020204020204" charset="-122"/>
+              </a:defRPr>
+            </a:pPr>
+            <a:r>
+              <a:t>系统运行效果展示</a:t>
             </a:r>
           </a:p>
         </p:txBody>
@@ -18224,7 +18366,7 @@
               </a:defRPr>
             </a:pPr>
             <a:r>
-              <a:t>25</a:t>
+              <a:t>24</a:t>
             </a:r>
           </a:p>
         </p:txBody>
@@ -18237,8 +18379,8 @@
         </p:nvSpPr>
         <p:spPr>
           <a:xfrm>
-            <a:off x="713232" y="1234440"/>
-            <a:ext cx="2240280" cy="868680"/>
+            <a:off x="685800" y="1298448"/>
+            <a:ext cx="1874519" cy="475488"/>
           </a:xfrm>
           <a:prstGeom prst="roundRect">
             <a:avLst/>
@@ -18282,8 +18424,8 @@
         </p:nvSpPr>
         <p:spPr>
           <a:xfrm>
-            <a:off x="804672" y="1307592"/>
-            <a:ext cx="2057400" cy="758952"/>
+            <a:off x="777240" y="1371600"/>
+            <a:ext cx="1691639" cy="365760"/>
           </a:xfrm>
           <a:prstGeom prst="rect">
             <a:avLst/>
@@ -18297,55 +18439,54 @@
           <a:lstStyle/>
           <a:p>
             <a:pPr algn="ctr">
-              <a:defRPr sz="1400" b="1">
+              <a:defRPr sz="1300" b="1">
                 <a:solidFill>
                   <a:srgbClr val="0F2344"/>
                 </a:solidFill>
-                <a:latin typeface="Microsoft YaHei"/>
-              </a:defRPr>
-            </a:pPr>
-            <a:r>
-              <a:t>结构化记录数量</a:t>
-            </a:r>
-          </a:p>
-        </p:txBody>
-      </p:sp>
-      <p:sp>
-        <p:nvSpPr>
-          <p:cNvPr id="10" name="TextBox 9"/>
-          <p:cNvSpPr txBox="1"/>
-          <p:nvPr/>
-        </p:nvSpPr>
-        <p:spPr>
-          <a:xfrm>
-            <a:off x="713232" y="1664208"/>
-            <a:ext cx="2240280" cy="320040"/>
-          </a:xfrm>
-          <a:prstGeom prst="rect">
-            <a:avLst/>
-          </a:prstGeom>
-          <a:noFill/>
-        </p:spPr>
-        <p:txBody>
-          <a:bodyPr wrap="square">
-            <a:spAutoFit/>
-          </a:bodyPr>
-          <a:lstStyle/>
-          <a:p>
-            <a:pPr algn="ctr">
-              <a:defRPr sz="2400" b="1">
-                <a:solidFill>
-                  <a:srgbClr val="277DF5"/>
-                </a:solidFill>
-                <a:latin typeface="Microsoft YaHei"/>
-              </a:defRPr>
-            </a:pPr>
-            <a:r>
-              <a:t>XXX</a:t>
-            </a:r>
-          </a:p>
-        </p:txBody>
-      </p:sp>
+                <a:latin typeface="微软雅黑" panose="020B0503020204020204" charset="-122"/>
+              </a:defRPr>
+            </a:pPr>
+            <a:r>
+              <a:t>PDF上传</a:t>
+            </a:r>
+          </a:p>
+        </p:txBody>
+      </p:sp>
+      <p:cxnSp>
+        <p:nvCxnSpPr>
+          <p:cNvPr id="10" name="Connector 9"/>
+          <p:cNvCxnSpPr/>
+          <p:nvPr/>
+        </p:nvCxnSpPr>
+        <p:spPr>
+          <a:xfrm>
+            <a:off x="1627632" y="1773936"/>
+            <a:ext cx="0" cy="210312"/>
+          </a:xfrm>
+          <a:prstGeom prst="line">
+            <a:avLst/>
+          </a:prstGeom>
+          <a:ln w="19050">
+            <a:solidFill>
+              <a:srgbClr val="277DF5"/>
+            </a:solidFill>
+          </a:ln>
+        </p:spPr>
+        <p:style>
+          <a:lnRef idx="2">
+            <a:schemeClr val="accent1"/>
+          </a:lnRef>
+          <a:fillRef idx="0">
+            <a:schemeClr val="accent1"/>
+          </a:fillRef>
+          <a:effectRef idx="1">
+            <a:schemeClr val="accent1"/>
+          </a:effectRef>
+          <a:fontRef idx="minor">
+            <a:schemeClr val="tx1"/>
+          </a:fontRef>
+        </p:style>
+      </p:cxnSp>
       <p:sp>
         <p:nvSpPr>
           <p:cNvPr id="11" name="Rounded Rectangle 10"/>
@@ -18354,8 +18495,8 @@
         </p:nvSpPr>
         <p:spPr>
           <a:xfrm>
-            <a:off x="3547872" y="1234440"/>
-            <a:ext cx="2240280" cy="868680"/>
+            <a:off x="685800" y="2011680"/>
+            <a:ext cx="1874519" cy="475488"/>
           </a:xfrm>
           <a:prstGeom prst="roundRect">
             <a:avLst/>
@@ -18399,8 +18540,8 @@
         </p:nvSpPr>
         <p:spPr>
           <a:xfrm>
-            <a:off x="3639312" y="1307592"/>
-            <a:ext cx="2057400" cy="758952"/>
+            <a:off x="777240" y="2084832"/>
+            <a:ext cx="1691639" cy="365760"/>
           </a:xfrm>
           <a:prstGeom prst="rect">
             <a:avLst/>
@@ -18414,55 +18555,54 @@
           <a:lstStyle/>
           <a:p>
             <a:pPr algn="ctr">
-              <a:defRPr sz="1400" b="1">
+              <a:defRPr sz="1300" b="1">
                 <a:solidFill>
                   <a:srgbClr val="0F2344"/>
                 </a:solidFill>
-                <a:latin typeface="Microsoft YaHei"/>
-              </a:defRPr>
-            </a:pPr>
-            <a:r>
-              <a:t>本体类数量</a:t>
-            </a:r>
-          </a:p>
-        </p:txBody>
-      </p:sp>
-      <p:sp>
-        <p:nvSpPr>
-          <p:cNvPr id="13" name="TextBox 12"/>
-          <p:cNvSpPr txBox="1"/>
-          <p:nvPr/>
-        </p:nvSpPr>
-        <p:spPr>
-          <a:xfrm>
-            <a:off x="3547872" y="1664208"/>
-            <a:ext cx="2240280" cy="320040"/>
-          </a:xfrm>
-          <a:prstGeom prst="rect">
-            <a:avLst/>
-          </a:prstGeom>
-          <a:noFill/>
-        </p:spPr>
-        <p:txBody>
-          <a:bodyPr wrap="square">
-            <a:spAutoFit/>
-          </a:bodyPr>
-          <a:lstStyle/>
-          <a:p>
-            <a:pPr algn="ctr">
-              <a:defRPr sz="2400" b="1">
-                <a:solidFill>
-                  <a:srgbClr val="277DF5"/>
-                </a:solidFill>
-                <a:latin typeface="Microsoft YaHei"/>
-              </a:defRPr>
-            </a:pPr>
-            <a:r>
-              <a:t>XXX</a:t>
-            </a:r>
-          </a:p>
-        </p:txBody>
-      </p:sp>
+                <a:latin typeface="微软雅黑" panose="020B0503020204020204" charset="-122"/>
+              </a:defRPr>
+            </a:pPr>
+            <a:r>
+              <a:t>文档解析</a:t>
+            </a:r>
+          </a:p>
+        </p:txBody>
+      </p:sp>
+      <p:cxnSp>
+        <p:nvCxnSpPr>
+          <p:cNvPr id="13" name="Connector 12"/>
+          <p:cNvCxnSpPr/>
+          <p:nvPr/>
+        </p:nvCxnSpPr>
+        <p:spPr>
+          <a:xfrm>
+            <a:off x="1627632" y="2487168"/>
+            <a:ext cx="0" cy="210312"/>
+          </a:xfrm>
+          <a:prstGeom prst="line">
+            <a:avLst/>
+          </a:prstGeom>
+          <a:ln w="19050">
+            <a:solidFill>
+              <a:srgbClr val="277DF5"/>
+            </a:solidFill>
+          </a:ln>
+        </p:spPr>
+        <p:style>
+          <a:lnRef idx="2">
+            <a:schemeClr val="accent1"/>
+          </a:lnRef>
+          <a:fillRef idx="0">
+            <a:schemeClr val="accent1"/>
+          </a:fillRef>
+          <a:effectRef idx="1">
+            <a:schemeClr val="accent1"/>
+          </a:effectRef>
+          <a:fontRef idx="minor">
+            <a:schemeClr val="tx1"/>
+          </a:fontRef>
+        </p:style>
+      </p:cxnSp>
       <p:sp>
         <p:nvSpPr>
           <p:cNvPr id="14" name="Rounded Rectangle 13"/>
@@ -18471,8 +18611,8 @@
         </p:nvSpPr>
         <p:spPr>
           <a:xfrm>
-            <a:off x="6382512" y="1234440"/>
-            <a:ext cx="2240280" cy="868680"/>
+            <a:off x="685800" y="2724912"/>
+            <a:ext cx="1874519" cy="475488"/>
           </a:xfrm>
           <a:prstGeom prst="roundRect">
             <a:avLst/>
@@ -18516,8 +18656,8 @@
         </p:nvSpPr>
         <p:spPr>
           <a:xfrm>
-            <a:off x="6473952" y="1307592"/>
-            <a:ext cx="2057400" cy="758952"/>
+            <a:off x="777240" y="2798064"/>
+            <a:ext cx="1691639" cy="365760"/>
           </a:xfrm>
           <a:prstGeom prst="rect">
             <a:avLst/>
@@ -18531,55 +18671,54 @@
           <a:lstStyle/>
           <a:p>
             <a:pPr algn="ctr">
-              <a:defRPr sz="1400" b="1">
+              <a:defRPr sz="1300" b="1">
                 <a:solidFill>
                   <a:srgbClr val="0F2344"/>
                 </a:solidFill>
-                <a:latin typeface="Microsoft YaHei"/>
-              </a:defRPr>
-            </a:pPr>
-            <a:r>
-              <a:t>数据属性数量</a:t>
-            </a:r>
-          </a:p>
-        </p:txBody>
-      </p:sp>
-      <p:sp>
-        <p:nvSpPr>
-          <p:cNvPr id="16" name="TextBox 15"/>
-          <p:cNvSpPr txBox="1"/>
-          <p:nvPr/>
-        </p:nvSpPr>
-        <p:spPr>
-          <a:xfrm>
-            <a:off x="6382512" y="1664208"/>
-            <a:ext cx="2240280" cy="320040"/>
-          </a:xfrm>
-          <a:prstGeom prst="rect">
-            <a:avLst/>
-          </a:prstGeom>
-          <a:noFill/>
-        </p:spPr>
-        <p:txBody>
-          <a:bodyPr wrap="square">
-            <a:spAutoFit/>
-          </a:bodyPr>
-          <a:lstStyle/>
-          <a:p>
-            <a:pPr algn="ctr">
-              <a:defRPr sz="2400" b="1">
-                <a:solidFill>
-                  <a:srgbClr val="277DF5"/>
-                </a:solidFill>
-                <a:latin typeface="Microsoft YaHei"/>
-              </a:defRPr>
-            </a:pPr>
-            <a:r>
-              <a:t>XXX</a:t>
-            </a:r>
-          </a:p>
-        </p:txBody>
-      </p:sp>
+                <a:latin typeface="微软雅黑" panose="020B0503020204020204" charset="-122"/>
+              </a:defRPr>
+            </a:pPr>
+            <a:r>
+              <a:t>数据清洗</a:t>
+            </a:r>
+          </a:p>
+        </p:txBody>
+      </p:sp>
+      <p:cxnSp>
+        <p:nvCxnSpPr>
+          <p:cNvPr id="16" name="Connector 15"/>
+          <p:cNvCxnSpPr/>
+          <p:nvPr/>
+        </p:nvCxnSpPr>
+        <p:spPr>
+          <a:xfrm>
+            <a:off x="1627632" y="3200400"/>
+            <a:ext cx="0" cy="210312"/>
+          </a:xfrm>
+          <a:prstGeom prst="line">
+            <a:avLst/>
+          </a:prstGeom>
+          <a:ln w="19050">
+            <a:solidFill>
+              <a:srgbClr val="277DF5"/>
+            </a:solidFill>
+          </a:ln>
+        </p:spPr>
+        <p:style>
+          <a:lnRef idx="2">
+            <a:schemeClr val="accent1"/>
+          </a:lnRef>
+          <a:fillRef idx="0">
+            <a:schemeClr val="accent1"/>
+          </a:fillRef>
+          <a:effectRef idx="1">
+            <a:schemeClr val="accent1"/>
+          </a:effectRef>
+          <a:fontRef idx="minor">
+            <a:schemeClr val="tx1"/>
+          </a:fontRef>
+        </p:style>
+      </p:cxnSp>
       <p:sp>
         <p:nvSpPr>
           <p:cNvPr id="17" name="Rounded Rectangle 16"/>
@@ -18588,8 +18727,8 @@
         </p:nvSpPr>
         <p:spPr>
           <a:xfrm>
-            <a:off x="9217152" y="1234440"/>
-            <a:ext cx="2240280" cy="868680"/>
+            <a:off x="685800" y="3438144"/>
+            <a:ext cx="1874519" cy="475488"/>
           </a:xfrm>
           <a:prstGeom prst="roundRect">
             <a:avLst/>
@@ -18633,8 +18772,8 @@
         </p:nvSpPr>
         <p:spPr>
           <a:xfrm>
-            <a:off x="9308592" y="1307592"/>
-            <a:ext cx="2057400" cy="758952"/>
+            <a:off x="777240" y="3511296"/>
+            <a:ext cx="1691639" cy="365760"/>
           </a:xfrm>
           <a:prstGeom prst="rect">
             <a:avLst/>
@@ -18648,29 +18787,408 @@
           <a:lstStyle/>
           <a:p>
             <a:pPr algn="ctr">
-              <a:defRPr sz="1400" b="1">
+              <a:defRPr sz="1300" b="1">
                 <a:solidFill>
                   <a:srgbClr val="0F2344"/>
                 </a:solidFill>
-                <a:latin typeface="Microsoft YaHei"/>
-              </a:defRPr>
-            </a:pPr>
-            <a:r>
-              <a:t>对象关系数量</a:t>
-            </a:r>
-          </a:p>
-        </p:txBody>
-      </p:sp>
-      <p:sp>
-        <p:nvSpPr>
-          <p:cNvPr id="19" name="TextBox 18"/>
+                <a:latin typeface="微软雅黑" panose="020B0503020204020204" charset="-122"/>
+              </a:defRPr>
+            </a:pPr>
+            <a:r>
+              <a:t>本体生成</a:t>
+            </a:r>
+          </a:p>
+        </p:txBody>
+      </p:sp>
+      <p:cxnSp>
+        <p:nvCxnSpPr>
+          <p:cNvPr id="19" name="Connector 18"/>
+          <p:cNvCxnSpPr/>
+          <p:nvPr/>
+        </p:nvCxnSpPr>
+        <p:spPr>
+          <a:xfrm>
+            <a:off x="1627632" y="3913631"/>
+            <a:ext cx="0" cy="210313"/>
+          </a:xfrm>
+          <a:prstGeom prst="line">
+            <a:avLst/>
+          </a:prstGeom>
+          <a:ln w="19050">
+            <a:solidFill>
+              <a:srgbClr val="277DF5"/>
+            </a:solidFill>
+          </a:ln>
+        </p:spPr>
+        <p:style>
+          <a:lnRef idx="2">
+            <a:schemeClr val="accent1"/>
+          </a:lnRef>
+          <a:fillRef idx="0">
+            <a:schemeClr val="accent1"/>
+          </a:fillRef>
+          <a:effectRef idx="1">
+            <a:schemeClr val="accent1"/>
+          </a:effectRef>
+          <a:fontRef idx="minor">
+            <a:schemeClr val="tx1"/>
+          </a:fontRef>
+        </p:style>
+      </p:cxnSp>
+      <p:sp>
+        <p:nvSpPr>
+          <p:cNvPr id="20" name="Rounded Rectangle 19"/>
+          <p:cNvSpPr/>
+          <p:nvPr/>
+        </p:nvSpPr>
+        <p:spPr>
+          <a:xfrm>
+            <a:off x="685800" y="4151376"/>
+            <a:ext cx="1874519" cy="475488"/>
+          </a:xfrm>
+          <a:prstGeom prst="roundRect">
+            <a:avLst/>
+          </a:prstGeom>
+          <a:solidFill>
+            <a:srgbClr val="FFFFFF"/>
+          </a:solidFill>
+          <a:ln w="12700">
+            <a:solidFill>
+              <a:srgbClr val="B1C6E0"/>
+            </a:solidFill>
+          </a:ln>
+        </p:spPr>
+        <p:style>
+          <a:lnRef idx="1">
+            <a:schemeClr val="accent1"/>
+          </a:lnRef>
+          <a:fillRef idx="3">
+            <a:schemeClr val="accent1"/>
+          </a:fillRef>
+          <a:effectRef idx="2">
+            <a:schemeClr val="accent1"/>
+          </a:effectRef>
+          <a:fontRef idx="minor">
+            <a:schemeClr val="lt1"/>
+          </a:fontRef>
+        </p:style>
+        <p:txBody>
+          <a:bodyPr rtlCol="0" anchor="ctr"/>
+          <a:lstStyle/>
+          <a:p>
+            <a:pPr algn="ctr"/>
+          </a:p>
+        </p:txBody>
+      </p:sp>
+      <p:sp>
+        <p:nvSpPr>
+          <p:cNvPr id="21" name="TextBox 20"/>
           <p:cNvSpPr txBox="1"/>
           <p:nvPr/>
         </p:nvSpPr>
         <p:spPr>
           <a:xfrm>
-            <a:off x="9217152" y="1664208"/>
-            <a:ext cx="2240280" cy="320040"/>
+            <a:off x="777240" y="4224528"/>
+            <a:ext cx="1691639" cy="365760"/>
+          </a:xfrm>
+          <a:prstGeom prst="rect">
+            <a:avLst/>
+          </a:prstGeom>
+          <a:noFill/>
+        </p:spPr>
+        <p:txBody>
+          <a:bodyPr wrap="square" anchor="ctr">
+            <a:spAutoFit/>
+          </a:bodyPr>
+          <a:lstStyle/>
+          <a:p>
+            <a:pPr algn="ctr">
+              <a:defRPr sz="1300" b="1">
+                <a:solidFill>
+                  <a:srgbClr val="0F2344"/>
+                </a:solidFill>
+                <a:latin typeface="微软雅黑" panose="020B0503020204020204" charset="-122"/>
+              </a:defRPr>
+            </a:pPr>
+            <a:r>
+              <a:t>OWL导出</a:t>
+            </a:r>
+          </a:p>
+        </p:txBody>
+      </p:sp>
+      <p:cxnSp>
+        <p:nvCxnSpPr>
+          <p:cNvPr id="22" name="Connector 21"/>
+          <p:cNvCxnSpPr/>
+          <p:nvPr/>
+        </p:nvCxnSpPr>
+        <p:spPr>
+          <a:xfrm>
+            <a:off x="1627632" y="4626864"/>
+            <a:ext cx="0" cy="210312"/>
+          </a:xfrm>
+          <a:prstGeom prst="line">
+            <a:avLst/>
+          </a:prstGeom>
+          <a:ln w="19050">
+            <a:solidFill>
+              <a:srgbClr val="277DF5"/>
+            </a:solidFill>
+          </a:ln>
+        </p:spPr>
+        <p:style>
+          <a:lnRef idx="2">
+            <a:schemeClr val="accent1"/>
+          </a:lnRef>
+          <a:fillRef idx="0">
+            <a:schemeClr val="accent1"/>
+          </a:fillRef>
+          <a:effectRef idx="1">
+            <a:schemeClr val="accent1"/>
+          </a:effectRef>
+          <a:fontRef idx="minor">
+            <a:schemeClr val="tx1"/>
+          </a:fontRef>
+        </p:style>
+      </p:cxnSp>
+      <p:sp>
+        <p:nvSpPr>
+          <p:cNvPr id="23" name="Rounded Rectangle 22"/>
+          <p:cNvSpPr/>
+          <p:nvPr/>
+        </p:nvSpPr>
+        <p:spPr>
+          <a:xfrm>
+            <a:off x="685800" y="4864608"/>
+            <a:ext cx="1874519" cy="475488"/>
+          </a:xfrm>
+          <a:prstGeom prst="roundRect">
+            <a:avLst/>
+          </a:prstGeom>
+          <a:solidFill>
+            <a:srgbClr val="FFFFFF"/>
+          </a:solidFill>
+          <a:ln w="12700">
+            <a:solidFill>
+              <a:srgbClr val="B1C6E0"/>
+            </a:solidFill>
+          </a:ln>
+        </p:spPr>
+        <p:style>
+          <a:lnRef idx="1">
+            <a:schemeClr val="accent1"/>
+          </a:lnRef>
+          <a:fillRef idx="3">
+            <a:schemeClr val="accent1"/>
+          </a:fillRef>
+          <a:effectRef idx="2">
+            <a:schemeClr val="accent1"/>
+          </a:effectRef>
+          <a:fontRef idx="minor">
+            <a:schemeClr val="lt1"/>
+          </a:fontRef>
+        </p:style>
+        <p:txBody>
+          <a:bodyPr rtlCol="0" anchor="ctr"/>
+          <a:lstStyle/>
+          <a:p>
+            <a:pPr algn="ctr"/>
+          </a:p>
+        </p:txBody>
+      </p:sp>
+      <p:sp>
+        <p:nvSpPr>
+          <p:cNvPr id="24" name="TextBox 23"/>
+          <p:cNvSpPr txBox="1"/>
+          <p:nvPr/>
+        </p:nvSpPr>
+        <p:spPr>
+          <a:xfrm>
+            <a:off x="777240" y="4937760"/>
+            <a:ext cx="1691639" cy="365760"/>
+          </a:xfrm>
+          <a:prstGeom prst="rect">
+            <a:avLst/>
+          </a:prstGeom>
+          <a:noFill/>
+        </p:spPr>
+        <p:txBody>
+          <a:bodyPr wrap="square" anchor="ctr">
+            <a:spAutoFit/>
+          </a:bodyPr>
+          <a:lstStyle/>
+          <a:p>
+            <a:pPr algn="ctr">
+              <a:defRPr sz="1300" b="1">
+                <a:solidFill>
+                  <a:srgbClr val="0F2344"/>
+                </a:solidFill>
+                <a:latin typeface="微软雅黑" panose="020B0503020204020204" charset="-122"/>
+              </a:defRPr>
+            </a:pPr>
+            <a:r>
+              <a:t>溯源审计</a:t>
+            </a:r>
+          </a:p>
+        </p:txBody>
+      </p:sp>
+      <p:sp>
+        <p:nvSpPr>
+          <p:cNvPr id="25" name="Rounded Rectangle 24"/>
+          <p:cNvSpPr/>
+          <p:nvPr/>
+        </p:nvSpPr>
+        <p:spPr>
+          <a:xfrm>
+            <a:off x="566928" y="5577840"/>
+            <a:ext cx="2084831" cy="411480"/>
+          </a:xfrm>
+          <a:prstGeom prst="roundRect">
+            <a:avLst/>
+          </a:prstGeom>
+          <a:solidFill>
+            <a:srgbClr val="EBF7FF"/>
+          </a:solidFill>
+          <a:ln w="12700">
+            <a:solidFill>
+              <a:srgbClr val="B1C6E0"/>
+            </a:solidFill>
+          </a:ln>
+        </p:spPr>
+        <p:style>
+          <a:lnRef idx="1">
+            <a:schemeClr val="accent1"/>
+          </a:lnRef>
+          <a:fillRef idx="3">
+            <a:schemeClr val="accent1"/>
+          </a:fillRef>
+          <a:effectRef idx="2">
+            <a:schemeClr val="accent1"/>
+          </a:effectRef>
+          <a:fontRef idx="minor">
+            <a:schemeClr val="lt1"/>
+          </a:fontRef>
+        </p:style>
+        <p:txBody>
+          <a:bodyPr rtlCol="0" anchor="ctr"/>
+          <a:lstStyle/>
+          <a:p>
+            <a:pPr algn="ctr"/>
+          </a:p>
+        </p:txBody>
+      </p:sp>
+      <p:sp>
+        <p:nvSpPr>
+          <p:cNvPr id="26" name="TextBox 25"/>
+          <p:cNvSpPr txBox="1"/>
+          <p:nvPr/>
+        </p:nvSpPr>
+        <p:spPr>
+          <a:xfrm>
+            <a:off x="658368" y="5650992"/>
+            <a:ext cx="1901951" cy="301752"/>
+          </a:xfrm>
+          <a:prstGeom prst="rect">
+            <a:avLst/>
+          </a:prstGeom>
+          <a:noFill/>
+        </p:spPr>
+        <p:txBody>
+          <a:bodyPr wrap="square" anchor="ctr">
+            <a:spAutoFit/>
+          </a:bodyPr>
+          <a:lstStyle/>
+          <a:p>
+            <a:pPr algn="ctr">
+              <a:defRPr sz="1200" b="1">
+                <a:solidFill>
+                  <a:srgbClr val="0F2344"/>
+                </a:solidFill>
+                <a:latin typeface="微软雅黑" panose="020B0503020204020204" charset="-122"/>
+              </a:defRPr>
+            </a:pPr>
+            <a:r>
+              <a:t>完整闭环流程</a:t>
+            </a:r>
+          </a:p>
+          <a:p>
+            <a:pPr algn="ctr">
+              <a:defRPr sz="850">
+                <a:solidFill>
+                  <a:srgbClr val="5D6F88"/>
+                </a:solidFill>
+                <a:latin typeface="微软雅黑" panose="020B0503020204020204" charset="-122"/>
+              </a:defRPr>
+            </a:pPr>
+            <a:r>
+              <a:t>PDF输入 → 智能解析 → 本体生成 → OWL导出 → 数据溯源</a:t>
+            </a:r>
+          </a:p>
+        </p:txBody>
+      </p:sp>
+      <p:sp>
+        <p:nvSpPr>
+          <p:cNvPr id="28" name="Rectangle 27"/>
+          <p:cNvSpPr/>
+          <p:nvPr>
+            <p:custDataLst>
+              <p:tags r:id="rId1"/>
+            </p:custDataLst>
+          </p:nvPr>
+        </p:nvSpPr>
+        <p:spPr>
+          <a:xfrm>
+            <a:off x="3063240" y="1563370"/>
+            <a:ext cx="7744460" cy="4422775"/>
+          </a:xfrm>
+          <a:prstGeom prst="rect">
+            <a:avLst/>
+          </a:prstGeom>
+          <a:solidFill>
+            <a:srgbClr val="E8EDF4"/>
+          </a:solidFill>
+          <a:ln>
+            <a:solidFill>
+              <a:srgbClr val="B1C6E0"/>
+            </a:solidFill>
+          </a:ln>
+        </p:spPr>
+        <p:style>
+          <a:lnRef idx="1">
+            <a:schemeClr val="accent1"/>
+          </a:lnRef>
+          <a:fillRef idx="3">
+            <a:schemeClr val="accent1"/>
+          </a:fillRef>
+          <a:effectRef idx="2">
+            <a:schemeClr val="accent1"/>
+          </a:effectRef>
+          <a:fontRef idx="minor">
+            <a:schemeClr val="lt1"/>
+          </a:fontRef>
+        </p:style>
+        <p:txBody>
+          <a:bodyPr rtlCol="0" anchor="ctr"/>
+          <a:lstStyle/>
+          <a:p>
+            <a:pPr algn="ctr"/>
+          </a:p>
+        </p:txBody>
+      </p:sp>
+      <p:sp>
+        <p:nvSpPr>
+          <p:cNvPr id="31" name="TextBox 30"/>
+          <p:cNvSpPr txBox="1"/>
+          <p:nvPr>
+            <p:custDataLst>
+              <p:tags r:id="rId2"/>
+            </p:custDataLst>
+          </p:nvPr>
+        </p:nvSpPr>
+        <p:spPr>
+          <a:xfrm>
+            <a:off x="5270500" y="1203960"/>
+            <a:ext cx="3474720" cy="256032"/>
           </a:xfrm>
           <a:prstGeom prst="rect">
             <a:avLst/>
@@ -18684,11 +19202,3142 @@
           <a:lstStyle/>
           <a:p>
             <a:pPr algn="ctr">
+              <a:defRPr sz="1300" b="1">
+                <a:solidFill>
+                  <a:srgbClr val="0F2344"/>
+                </a:solidFill>
+                <a:latin typeface="微软雅黑" panose="020B0503020204020204" charset="-122"/>
+              </a:defRPr>
+            </a:pPr>
+            <a:r>
+              <a:t>PDF上传与生成任务截图</a:t>
+            </a:r>
+          </a:p>
+        </p:txBody>
+      </p:sp>
+      <p:sp>
+        <p:nvSpPr>
+          <p:cNvPr id="34" name="TextBox 33"/>
+          <p:cNvSpPr txBox="1"/>
+          <p:nvPr>
+            <p:custDataLst>
+              <p:tags r:id="rId3"/>
+            </p:custDataLst>
+          </p:nvPr>
+        </p:nvSpPr>
+        <p:spPr>
+          <a:xfrm>
+            <a:off x="5126990" y="6223762"/>
+            <a:ext cx="3291840" cy="384048"/>
+          </a:xfrm>
+          <a:prstGeom prst="rect">
+            <a:avLst/>
+          </a:prstGeom>
+          <a:noFill/>
+        </p:spPr>
+        <p:txBody>
+          <a:bodyPr wrap="square">
+            <a:spAutoFit/>
+          </a:bodyPr>
+          <a:lstStyle/>
+          <a:p>
+            <a:pPr algn="ctr">
+              <a:defRPr sz="1050" b="0">
+                <a:solidFill>
+                  <a:srgbClr val="5D6F88"/>
+                </a:solidFill>
+                <a:latin typeface="微软雅黑" panose="020B0503020204020204" charset="-122"/>
+              </a:defRPr>
+            </a:pPr>
+            <a:r>
+              <a:t>展示：PDF 上传、任务配置、生成进度</a:t>
+            </a:r>
+          </a:p>
+        </p:txBody>
+      </p:sp>
+      <p:pic>
+        <p:nvPicPr>
+          <p:cNvPr id="29" name="图片 28"/>
+          <p:cNvPicPr>
+            <a:picLocks noChangeAspect="1"/>
+          </p:cNvPicPr>
+          <p:nvPr/>
+        </p:nvPicPr>
+        <p:blipFill>
+          <a:blip r:embed="rId4"/>
+          <a:stretch>
+            <a:fillRect/>
+          </a:stretch>
+        </p:blipFill>
+        <p:spPr>
+          <a:xfrm>
+            <a:off x="3063240" y="1553210"/>
+            <a:ext cx="7986395" cy="4565015"/>
+          </a:xfrm>
+          <a:prstGeom prst="rect">
+            <a:avLst/>
+          </a:prstGeom>
+        </p:spPr>
+      </p:pic>
+    </p:spTree>
+  </p:cSld>
+  <p:clrMapOvr>
+    <a:masterClrMapping/>
+  </p:clrMapOvr>
+</p:sld>
+</file>
+
+<file path=ppt/slides/slide26.xml><?xml version="1.0" encoding="utf-8"?>
+<p:sld xmlns:a="http://schemas.openxmlformats.org/drawingml/2006/main" xmlns:r="http://schemas.openxmlformats.org/officeDocument/2006/relationships" xmlns:p="http://schemas.openxmlformats.org/presentationml/2006/main">
+  <p:cSld>
+    <p:spTree>
+      <p:nvGrpSpPr>
+        <p:cNvPr id="1" name=""/>
+        <p:cNvGrpSpPr/>
+        <p:nvPr/>
+      </p:nvGrpSpPr>
+      <p:grpSpPr/>
+      <p:sp>
+        <p:nvSpPr>
+          <p:cNvPr id="2" name="Rectangle 1"/>
+          <p:cNvSpPr/>
+          <p:nvPr/>
+        </p:nvSpPr>
+        <p:spPr>
+          <a:xfrm>
+            <a:off x="0" y="0"/>
+            <a:ext cx="12191365" cy="6858000"/>
+          </a:xfrm>
+          <a:prstGeom prst="rect">
+            <a:avLst/>
+          </a:prstGeom>
+          <a:solidFill>
+            <a:srgbClr val="F8FBFF"/>
+          </a:solidFill>
+          <a:ln>
+            <a:noFill/>
+          </a:ln>
+        </p:spPr>
+        <p:style>
+          <a:lnRef idx="1">
+            <a:schemeClr val="accent1"/>
+          </a:lnRef>
+          <a:fillRef idx="3">
+            <a:schemeClr val="accent1"/>
+          </a:fillRef>
+          <a:effectRef idx="2">
+            <a:schemeClr val="accent1"/>
+          </a:effectRef>
+          <a:fontRef idx="minor">
+            <a:schemeClr val="lt1"/>
+          </a:fontRef>
+        </p:style>
+        <p:txBody>
+          <a:bodyPr rtlCol="0" anchor="ctr"/>
+          <a:lstStyle/>
+          <a:p>
+            <a:pPr algn="ctr"/>
+          </a:p>
+        </p:txBody>
+      </p:sp>
+      <p:sp>
+        <p:nvSpPr>
+          <p:cNvPr id="3" name="Rectangle 2"/>
+          <p:cNvSpPr/>
+          <p:nvPr/>
+        </p:nvSpPr>
+        <p:spPr>
+          <a:xfrm>
+            <a:off x="0" y="0"/>
+            <a:ext cx="12191365" cy="201168"/>
+          </a:xfrm>
+          <a:prstGeom prst="rect">
+            <a:avLst/>
+          </a:prstGeom>
+          <a:solidFill>
+            <a:srgbClr val="1456A8"/>
+          </a:solidFill>
+          <a:ln>
+            <a:noFill/>
+          </a:ln>
+        </p:spPr>
+        <p:style>
+          <a:lnRef idx="1">
+            <a:schemeClr val="accent1"/>
+          </a:lnRef>
+          <a:fillRef idx="3">
+            <a:schemeClr val="accent1"/>
+          </a:fillRef>
+          <a:effectRef idx="2">
+            <a:schemeClr val="accent1"/>
+          </a:effectRef>
+          <a:fontRef idx="minor">
+            <a:schemeClr val="lt1"/>
+          </a:fontRef>
+        </p:style>
+        <p:txBody>
+          <a:bodyPr rtlCol="0" anchor="ctr"/>
+          <a:lstStyle/>
+          <a:p>
+            <a:pPr algn="ctr"/>
+          </a:p>
+        </p:txBody>
+      </p:sp>
+      <p:sp>
+        <p:nvSpPr>
+          <p:cNvPr id="4" name="Oval 3"/>
+          <p:cNvSpPr/>
+          <p:nvPr/>
+        </p:nvSpPr>
+        <p:spPr>
+          <a:xfrm>
+            <a:off x="10241280" y="-777240"/>
+            <a:ext cx="2103120" cy="2103120"/>
+          </a:xfrm>
+          <a:prstGeom prst="ellipse">
+            <a:avLst/>
+          </a:prstGeom>
+          <a:solidFill>
+            <a:srgbClr val="DCEFFF"/>
+          </a:solidFill>
+          <a:ln>
+            <a:noFill/>
+          </a:ln>
+        </p:spPr>
+        <p:style>
+          <a:lnRef idx="1">
+            <a:schemeClr val="accent1"/>
+          </a:lnRef>
+          <a:fillRef idx="3">
+            <a:schemeClr val="accent1"/>
+          </a:fillRef>
+          <a:effectRef idx="2">
+            <a:schemeClr val="accent1"/>
+          </a:effectRef>
+          <a:fontRef idx="minor">
+            <a:schemeClr val="lt1"/>
+          </a:fontRef>
+        </p:style>
+        <p:txBody>
+          <a:bodyPr rtlCol="0" anchor="ctr"/>
+          <a:lstStyle/>
+          <a:p>
+            <a:pPr algn="ctr"/>
+          </a:p>
+        </p:txBody>
+      </p:sp>
+      <p:sp>
+        <p:nvSpPr>
+          <p:cNvPr id="5" name="TextBox 4"/>
+          <p:cNvSpPr txBox="1"/>
+          <p:nvPr/>
+        </p:nvSpPr>
+        <p:spPr>
+          <a:xfrm>
+            <a:off x="594360" y="384048"/>
+            <a:ext cx="9875520" cy="502920"/>
+          </a:xfrm>
+          <a:prstGeom prst="rect">
+            <a:avLst/>
+          </a:prstGeom>
+          <a:noFill/>
+        </p:spPr>
+        <p:txBody>
+          <a:bodyPr wrap="none">
+            <a:spAutoFit/>
+          </a:bodyPr>
+          <a:lstStyle/>
+          <a:p>
+            <a:pPr>
+              <a:defRPr sz="2500" b="1">
+                <a:solidFill>
+                  <a:srgbClr val="0F2344"/>
+                </a:solidFill>
+                <a:latin typeface="微软雅黑" panose="020B0503020204020204" charset="-122"/>
+              </a:defRPr>
+            </a:pPr>
+            <a:r>
+              <a:t>系统运行效果展示</a:t>
+            </a:r>
+          </a:p>
+        </p:txBody>
+      </p:sp>
+      <p:sp>
+        <p:nvSpPr>
+          <p:cNvPr id="6" name="Rectangle 5"/>
+          <p:cNvSpPr/>
+          <p:nvPr/>
+        </p:nvSpPr>
+        <p:spPr>
+          <a:xfrm>
+            <a:off x="594360" y="987552"/>
+            <a:ext cx="1051560" cy="54864"/>
+          </a:xfrm>
+          <a:prstGeom prst="rect">
+            <a:avLst/>
+          </a:prstGeom>
+          <a:solidFill>
+            <a:srgbClr val="277DF5"/>
+          </a:solidFill>
+          <a:ln>
+            <a:noFill/>
+          </a:ln>
+        </p:spPr>
+        <p:style>
+          <a:lnRef idx="1">
+            <a:schemeClr val="accent1"/>
+          </a:lnRef>
+          <a:fillRef idx="3">
+            <a:schemeClr val="accent1"/>
+          </a:fillRef>
+          <a:effectRef idx="2">
+            <a:schemeClr val="accent1"/>
+          </a:effectRef>
+          <a:fontRef idx="minor">
+            <a:schemeClr val="lt1"/>
+          </a:fontRef>
+        </p:style>
+        <p:txBody>
+          <a:bodyPr rtlCol="0" anchor="ctr"/>
+          <a:lstStyle/>
+          <a:p>
+            <a:pPr algn="ctr"/>
+          </a:p>
+        </p:txBody>
+      </p:sp>
+      <p:sp>
+        <p:nvSpPr>
+          <p:cNvPr id="7" name="TextBox 6"/>
+          <p:cNvSpPr txBox="1"/>
+          <p:nvPr/>
+        </p:nvSpPr>
+        <p:spPr>
+          <a:xfrm>
+            <a:off x="11064240" y="6355080"/>
+            <a:ext cx="548640" cy="228600"/>
+          </a:xfrm>
+          <a:prstGeom prst="rect">
+            <a:avLst/>
+          </a:prstGeom>
+          <a:noFill/>
+        </p:spPr>
+        <p:txBody>
+          <a:bodyPr wrap="none">
+            <a:spAutoFit/>
+          </a:bodyPr>
+          <a:lstStyle/>
+          <a:p>
+            <a:pPr algn="r">
+              <a:defRPr sz="1000">
+                <a:solidFill>
+                  <a:srgbClr val="5D6F88"/>
+                </a:solidFill>
+              </a:defRPr>
+            </a:pPr>
+            <a:r>
+              <a:t>24</a:t>
+            </a:r>
+          </a:p>
+        </p:txBody>
+      </p:sp>
+      <p:sp>
+        <p:nvSpPr>
+          <p:cNvPr id="8" name="Rounded Rectangle 7"/>
+          <p:cNvSpPr/>
+          <p:nvPr/>
+        </p:nvSpPr>
+        <p:spPr>
+          <a:xfrm>
+            <a:off x="685800" y="1298448"/>
+            <a:ext cx="1874519" cy="475488"/>
+          </a:xfrm>
+          <a:prstGeom prst="roundRect">
+            <a:avLst/>
+          </a:prstGeom>
+          <a:solidFill>
+            <a:srgbClr val="FFFFFF"/>
+          </a:solidFill>
+          <a:ln w="12700">
+            <a:solidFill>
+              <a:srgbClr val="B1C6E0"/>
+            </a:solidFill>
+          </a:ln>
+        </p:spPr>
+        <p:style>
+          <a:lnRef idx="1">
+            <a:schemeClr val="accent1"/>
+          </a:lnRef>
+          <a:fillRef idx="3">
+            <a:schemeClr val="accent1"/>
+          </a:fillRef>
+          <a:effectRef idx="2">
+            <a:schemeClr val="accent1"/>
+          </a:effectRef>
+          <a:fontRef idx="minor">
+            <a:schemeClr val="lt1"/>
+          </a:fontRef>
+        </p:style>
+        <p:txBody>
+          <a:bodyPr rtlCol="0" anchor="ctr"/>
+          <a:lstStyle/>
+          <a:p>
+            <a:pPr algn="ctr"/>
+          </a:p>
+        </p:txBody>
+      </p:sp>
+      <p:sp>
+        <p:nvSpPr>
+          <p:cNvPr id="9" name="TextBox 8"/>
+          <p:cNvSpPr txBox="1"/>
+          <p:nvPr/>
+        </p:nvSpPr>
+        <p:spPr>
+          <a:xfrm>
+            <a:off x="777240" y="1371600"/>
+            <a:ext cx="1691639" cy="365760"/>
+          </a:xfrm>
+          <a:prstGeom prst="rect">
+            <a:avLst/>
+          </a:prstGeom>
+          <a:noFill/>
+        </p:spPr>
+        <p:txBody>
+          <a:bodyPr wrap="square" anchor="ctr">
+            <a:spAutoFit/>
+          </a:bodyPr>
+          <a:lstStyle/>
+          <a:p>
+            <a:pPr algn="ctr">
+              <a:defRPr sz="1300" b="1">
+                <a:solidFill>
+                  <a:srgbClr val="0F2344"/>
+                </a:solidFill>
+                <a:latin typeface="微软雅黑" panose="020B0503020204020204" charset="-122"/>
+              </a:defRPr>
+            </a:pPr>
+            <a:r>
+              <a:t>PDF上传</a:t>
+            </a:r>
+          </a:p>
+        </p:txBody>
+      </p:sp>
+      <p:cxnSp>
+        <p:nvCxnSpPr>
+          <p:cNvPr id="10" name="Connector 9"/>
+          <p:cNvCxnSpPr/>
+          <p:nvPr/>
+        </p:nvCxnSpPr>
+        <p:spPr>
+          <a:xfrm>
+            <a:off x="1627632" y="1773936"/>
+            <a:ext cx="0" cy="210312"/>
+          </a:xfrm>
+          <a:prstGeom prst="line">
+            <a:avLst/>
+          </a:prstGeom>
+          <a:ln w="19050">
+            <a:solidFill>
+              <a:srgbClr val="277DF5"/>
+            </a:solidFill>
+          </a:ln>
+        </p:spPr>
+        <p:style>
+          <a:lnRef idx="2">
+            <a:schemeClr val="accent1"/>
+          </a:lnRef>
+          <a:fillRef idx="0">
+            <a:schemeClr val="accent1"/>
+          </a:fillRef>
+          <a:effectRef idx="1">
+            <a:schemeClr val="accent1"/>
+          </a:effectRef>
+          <a:fontRef idx="minor">
+            <a:schemeClr val="tx1"/>
+          </a:fontRef>
+        </p:style>
+      </p:cxnSp>
+      <p:sp>
+        <p:nvSpPr>
+          <p:cNvPr id="11" name="Rounded Rectangle 10"/>
+          <p:cNvSpPr/>
+          <p:nvPr/>
+        </p:nvSpPr>
+        <p:spPr>
+          <a:xfrm>
+            <a:off x="685800" y="2011680"/>
+            <a:ext cx="1874519" cy="475488"/>
+          </a:xfrm>
+          <a:prstGeom prst="roundRect">
+            <a:avLst/>
+          </a:prstGeom>
+          <a:solidFill>
+            <a:srgbClr val="FFFFFF"/>
+          </a:solidFill>
+          <a:ln w="12700">
+            <a:solidFill>
+              <a:srgbClr val="B1C6E0"/>
+            </a:solidFill>
+          </a:ln>
+        </p:spPr>
+        <p:style>
+          <a:lnRef idx="1">
+            <a:schemeClr val="accent1"/>
+          </a:lnRef>
+          <a:fillRef idx="3">
+            <a:schemeClr val="accent1"/>
+          </a:fillRef>
+          <a:effectRef idx="2">
+            <a:schemeClr val="accent1"/>
+          </a:effectRef>
+          <a:fontRef idx="minor">
+            <a:schemeClr val="lt1"/>
+          </a:fontRef>
+        </p:style>
+        <p:txBody>
+          <a:bodyPr rtlCol="0" anchor="ctr"/>
+          <a:lstStyle/>
+          <a:p>
+            <a:pPr algn="ctr"/>
+          </a:p>
+        </p:txBody>
+      </p:sp>
+      <p:sp>
+        <p:nvSpPr>
+          <p:cNvPr id="12" name="TextBox 11"/>
+          <p:cNvSpPr txBox="1"/>
+          <p:nvPr/>
+        </p:nvSpPr>
+        <p:spPr>
+          <a:xfrm>
+            <a:off x="777240" y="2084832"/>
+            <a:ext cx="1691639" cy="365760"/>
+          </a:xfrm>
+          <a:prstGeom prst="rect">
+            <a:avLst/>
+          </a:prstGeom>
+          <a:noFill/>
+        </p:spPr>
+        <p:txBody>
+          <a:bodyPr wrap="square" anchor="ctr">
+            <a:spAutoFit/>
+          </a:bodyPr>
+          <a:lstStyle/>
+          <a:p>
+            <a:pPr algn="ctr">
+              <a:defRPr sz="1300" b="1">
+                <a:solidFill>
+                  <a:srgbClr val="0F2344"/>
+                </a:solidFill>
+                <a:latin typeface="微软雅黑" panose="020B0503020204020204" charset="-122"/>
+              </a:defRPr>
+            </a:pPr>
+            <a:r>
+              <a:t>文档解析</a:t>
+            </a:r>
+          </a:p>
+        </p:txBody>
+      </p:sp>
+      <p:cxnSp>
+        <p:nvCxnSpPr>
+          <p:cNvPr id="13" name="Connector 12"/>
+          <p:cNvCxnSpPr/>
+          <p:nvPr/>
+        </p:nvCxnSpPr>
+        <p:spPr>
+          <a:xfrm>
+            <a:off x="1627632" y="2487168"/>
+            <a:ext cx="0" cy="210312"/>
+          </a:xfrm>
+          <a:prstGeom prst="line">
+            <a:avLst/>
+          </a:prstGeom>
+          <a:ln w="19050">
+            <a:solidFill>
+              <a:srgbClr val="277DF5"/>
+            </a:solidFill>
+          </a:ln>
+        </p:spPr>
+        <p:style>
+          <a:lnRef idx="2">
+            <a:schemeClr val="accent1"/>
+          </a:lnRef>
+          <a:fillRef idx="0">
+            <a:schemeClr val="accent1"/>
+          </a:fillRef>
+          <a:effectRef idx="1">
+            <a:schemeClr val="accent1"/>
+          </a:effectRef>
+          <a:fontRef idx="minor">
+            <a:schemeClr val="tx1"/>
+          </a:fontRef>
+        </p:style>
+      </p:cxnSp>
+      <p:sp>
+        <p:nvSpPr>
+          <p:cNvPr id="14" name="Rounded Rectangle 13"/>
+          <p:cNvSpPr/>
+          <p:nvPr/>
+        </p:nvSpPr>
+        <p:spPr>
+          <a:xfrm>
+            <a:off x="685800" y="2724912"/>
+            <a:ext cx="1874519" cy="475488"/>
+          </a:xfrm>
+          <a:prstGeom prst="roundRect">
+            <a:avLst/>
+          </a:prstGeom>
+          <a:solidFill>
+            <a:srgbClr val="FFFFFF"/>
+          </a:solidFill>
+          <a:ln w="12700">
+            <a:solidFill>
+              <a:srgbClr val="B1C6E0"/>
+            </a:solidFill>
+          </a:ln>
+        </p:spPr>
+        <p:style>
+          <a:lnRef idx="1">
+            <a:schemeClr val="accent1"/>
+          </a:lnRef>
+          <a:fillRef idx="3">
+            <a:schemeClr val="accent1"/>
+          </a:fillRef>
+          <a:effectRef idx="2">
+            <a:schemeClr val="accent1"/>
+          </a:effectRef>
+          <a:fontRef idx="minor">
+            <a:schemeClr val="lt1"/>
+          </a:fontRef>
+        </p:style>
+        <p:txBody>
+          <a:bodyPr rtlCol="0" anchor="ctr"/>
+          <a:lstStyle/>
+          <a:p>
+            <a:pPr algn="ctr"/>
+          </a:p>
+        </p:txBody>
+      </p:sp>
+      <p:sp>
+        <p:nvSpPr>
+          <p:cNvPr id="15" name="TextBox 14"/>
+          <p:cNvSpPr txBox="1"/>
+          <p:nvPr/>
+        </p:nvSpPr>
+        <p:spPr>
+          <a:xfrm>
+            <a:off x="777240" y="2798064"/>
+            <a:ext cx="1691639" cy="365760"/>
+          </a:xfrm>
+          <a:prstGeom prst="rect">
+            <a:avLst/>
+          </a:prstGeom>
+          <a:noFill/>
+        </p:spPr>
+        <p:txBody>
+          <a:bodyPr wrap="square" anchor="ctr">
+            <a:spAutoFit/>
+          </a:bodyPr>
+          <a:lstStyle/>
+          <a:p>
+            <a:pPr algn="ctr">
+              <a:defRPr sz="1300" b="1">
+                <a:solidFill>
+                  <a:srgbClr val="0F2344"/>
+                </a:solidFill>
+                <a:latin typeface="微软雅黑" panose="020B0503020204020204" charset="-122"/>
+              </a:defRPr>
+            </a:pPr>
+            <a:r>
+              <a:t>数据清洗</a:t>
+            </a:r>
+          </a:p>
+        </p:txBody>
+      </p:sp>
+      <p:cxnSp>
+        <p:nvCxnSpPr>
+          <p:cNvPr id="16" name="Connector 15"/>
+          <p:cNvCxnSpPr/>
+          <p:nvPr/>
+        </p:nvCxnSpPr>
+        <p:spPr>
+          <a:xfrm>
+            <a:off x="1627632" y="3200400"/>
+            <a:ext cx="0" cy="210312"/>
+          </a:xfrm>
+          <a:prstGeom prst="line">
+            <a:avLst/>
+          </a:prstGeom>
+          <a:ln w="19050">
+            <a:solidFill>
+              <a:srgbClr val="277DF5"/>
+            </a:solidFill>
+          </a:ln>
+        </p:spPr>
+        <p:style>
+          <a:lnRef idx="2">
+            <a:schemeClr val="accent1"/>
+          </a:lnRef>
+          <a:fillRef idx="0">
+            <a:schemeClr val="accent1"/>
+          </a:fillRef>
+          <a:effectRef idx="1">
+            <a:schemeClr val="accent1"/>
+          </a:effectRef>
+          <a:fontRef idx="minor">
+            <a:schemeClr val="tx1"/>
+          </a:fontRef>
+        </p:style>
+      </p:cxnSp>
+      <p:sp>
+        <p:nvSpPr>
+          <p:cNvPr id="17" name="Rounded Rectangle 16"/>
+          <p:cNvSpPr/>
+          <p:nvPr/>
+        </p:nvSpPr>
+        <p:spPr>
+          <a:xfrm>
+            <a:off x="685800" y="3438144"/>
+            <a:ext cx="1874519" cy="475488"/>
+          </a:xfrm>
+          <a:prstGeom prst="roundRect">
+            <a:avLst/>
+          </a:prstGeom>
+          <a:solidFill>
+            <a:srgbClr val="FFFFFF"/>
+          </a:solidFill>
+          <a:ln w="12700">
+            <a:solidFill>
+              <a:srgbClr val="B1C6E0"/>
+            </a:solidFill>
+          </a:ln>
+        </p:spPr>
+        <p:style>
+          <a:lnRef idx="1">
+            <a:schemeClr val="accent1"/>
+          </a:lnRef>
+          <a:fillRef idx="3">
+            <a:schemeClr val="accent1"/>
+          </a:fillRef>
+          <a:effectRef idx="2">
+            <a:schemeClr val="accent1"/>
+          </a:effectRef>
+          <a:fontRef idx="minor">
+            <a:schemeClr val="lt1"/>
+          </a:fontRef>
+        </p:style>
+        <p:txBody>
+          <a:bodyPr rtlCol="0" anchor="ctr"/>
+          <a:lstStyle/>
+          <a:p>
+            <a:pPr algn="ctr"/>
+          </a:p>
+        </p:txBody>
+      </p:sp>
+      <p:sp>
+        <p:nvSpPr>
+          <p:cNvPr id="18" name="TextBox 17"/>
+          <p:cNvSpPr txBox="1"/>
+          <p:nvPr/>
+        </p:nvSpPr>
+        <p:spPr>
+          <a:xfrm>
+            <a:off x="777240" y="3511296"/>
+            <a:ext cx="1691639" cy="365760"/>
+          </a:xfrm>
+          <a:prstGeom prst="rect">
+            <a:avLst/>
+          </a:prstGeom>
+          <a:noFill/>
+        </p:spPr>
+        <p:txBody>
+          <a:bodyPr wrap="square" anchor="ctr">
+            <a:spAutoFit/>
+          </a:bodyPr>
+          <a:lstStyle/>
+          <a:p>
+            <a:pPr algn="ctr">
+              <a:defRPr sz="1300" b="1">
+                <a:solidFill>
+                  <a:srgbClr val="0F2344"/>
+                </a:solidFill>
+                <a:latin typeface="微软雅黑" panose="020B0503020204020204" charset="-122"/>
+              </a:defRPr>
+            </a:pPr>
+            <a:r>
+              <a:t>本体生成</a:t>
+            </a:r>
+          </a:p>
+        </p:txBody>
+      </p:sp>
+      <p:cxnSp>
+        <p:nvCxnSpPr>
+          <p:cNvPr id="19" name="Connector 18"/>
+          <p:cNvCxnSpPr/>
+          <p:nvPr/>
+        </p:nvCxnSpPr>
+        <p:spPr>
+          <a:xfrm>
+            <a:off x="1627632" y="3913631"/>
+            <a:ext cx="0" cy="210313"/>
+          </a:xfrm>
+          <a:prstGeom prst="line">
+            <a:avLst/>
+          </a:prstGeom>
+          <a:ln w="19050">
+            <a:solidFill>
+              <a:srgbClr val="277DF5"/>
+            </a:solidFill>
+          </a:ln>
+        </p:spPr>
+        <p:style>
+          <a:lnRef idx="2">
+            <a:schemeClr val="accent1"/>
+          </a:lnRef>
+          <a:fillRef idx="0">
+            <a:schemeClr val="accent1"/>
+          </a:fillRef>
+          <a:effectRef idx="1">
+            <a:schemeClr val="accent1"/>
+          </a:effectRef>
+          <a:fontRef idx="minor">
+            <a:schemeClr val="tx1"/>
+          </a:fontRef>
+        </p:style>
+      </p:cxnSp>
+      <p:sp>
+        <p:nvSpPr>
+          <p:cNvPr id="20" name="Rounded Rectangle 19"/>
+          <p:cNvSpPr/>
+          <p:nvPr/>
+        </p:nvSpPr>
+        <p:spPr>
+          <a:xfrm>
+            <a:off x="685800" y="4151376"/>
+            <a:ext cx="1874519" cy="475488"/>
+          </a:xfrm>
+          <a:prstGeom prst="roundRect">
+            <a:avLst/>
+          </a:prstGeom>
+          <a:solidFill>
+            <a:srgbClr val="FFFFFF"/>
+          </a:solidFill>
+          <a:ln w="12700">
+            <a:solidFill>
+              <a:srgbClr val="B1C6E0"/>
+            </a:solidFill>
+          </a:ln>
+        </p:spPr>
+        <p:style>
+          <a:lnRef idx="1">
+            <a:schemeClr val="accent1"/>
+          </a:lnRef>
+          <a:fillRef idx="3">
+            <a:schemeClr val="accent1"/>
+          </a:fillRef>
+          <a:effectRef idx="2">
+            <a:schemeClr val="accent1"/>
+          </a:effectRef>
+          <a:fontRef idx="minor">
+            <a:schemeClr val="lt1"/>
+          </a:fontRef>
+        </p:style>
+        <p:txBody>
+          <a:bodyPr rtlCol="0" anchor="ctr"/>
+          <a:lstStyle/>
+          <a:p>
+            <a:pPr algn="ctr"/>
+          </a:p>
+        </p:txBody>
+      </p:sp>
+      <p:sp>
+        <p:nvSpPr>
+          <p:cNvPr id="21" name="TextBox 20"/>
+          <p:cNvSpPr txBox="1"/>
+          <p:nvPr/>
+        </p:nvSpPr>
+        <p:spPr>
+          <a:xfrm>
+            <a:off x="777240" y="4224528"/>
+            <a:ext cx="1691639" cy="365760"/>
+          </a:xfrm>
+          <a:prstGeom prst="rect">
+            <a:avLst/>
+          </a:prstGeom>
+          <a:noFill/>
+        </p:spPr>
+        <p:txBody>
+          <a:bodyPr wrap="square" anchor="ctr">
+            <a:spAutoFit/>
+          </a:bodyPr>
+          <a:lstStyle/>
+          <a:p>
+            <a:pPr algn="ctr">
+              <a:defRPr sz="1300" b="1">
+                <a:solidFill>
+                  <a:srgbClr val="0F2344"/>
+                </a:solidFill>
+                <a:latin typeface="微软雅黑" panose="020B0503020204020204" charset="-122"/>
+              </a:defRPr>
+            </a:pPr>
+            <a:r>
+              <a:t>OWL导出</a:t>
+            </a:r>
+          </a:p>
+        </p:txBody>
+      </p:sp>
+      <p:cxnSp>
+        <p:nvCxnSpPr>
+          <p:cNvPr id="22" name="Connector 21"/>
+          <p:cNvCxnSpPr/>
+          <p:nvPr/>
+        </p:nvCxnSpPr>
+        <p:spPr>
+          <a:xfrm>
+            <a:off x="1627632" y="4626864"/>
+            <a:ext cx="0" cy="210312"/>
+          </a:xfrm>
+          <a:prstGeom prst="line">
+            <a:avLst/>
+          </a:prstGeom>
+          <a:ln w="19050">
+            <a:solidFill>
+              <a:srgbClr val="277DF5"/>
+            </a:solidFill>
+          </a:ln>
+        </p:spPr>
+        <p:style>
+          <a:lnRef idx="2">
+            <a:schemeClr val="accent1"/>
+          </a:lnRef>
+          <a:fillRef idx="0">
+            <a:schemeClr val="accent1"/>
+          </a:fillRef>
+          <a:effectRef idx="1">
+            <a:schemeClr val="accent1"/>
+          </a:effectRef>
+          <a:fontRef idx="minor">
+            <a:schemeClr val="tx1"/>
+          </a:fontRef>
+        </p:style>
+      </p:cxnSp>
+      <p:sp>
+        <p:nvSpPr>
+          <p:cNvPr id="23" name="Rounded Rectangle 22"/>
+          <p:cNvSpPr/>
+          <p:nvPr/>
+        </p:nvSpPr>
+        <p:spPr>
+          <a:xfrm>
+            <a:off x="685800" y="4864608"/>
+            <a:ext cx="1874519" cy="475488"/>
+          </a:xfrm>
+          <a:prstGeom prst="roundRect">
+            <a:avLst/>
+          </a:prstGeom>
+          <a:solidFill>
+            <a:srgbClr val="FFFFFF"/>
+          </a:solidFill>
+          <a:ln w="12700">
+            <a:solidFill>
+              <a:srgbClr val="B1C6E0"/>
+            </a:solidFill>
+          </a:ln>
+        </p:spPr>
+        <p:style>
+          <a:lnRef idx="1">
+            <a:schemeClr val="accent1"/>
+          </a:lnRef>
+          <a:fillRef idx="3">
+            <a:schemeClr val="accent1"/>
+          </a:fillRef>
+          <a:effectRef idx="2">
+            <a:schemeClr val="accent1"/>
+          </a:effectRef>
+          <a:fontRef idx="minor">
+            <a:schemeClr val="lt1"/>
+          </a:fontRef>
+        </p:style>
+        <p:txBody>
+          <a:bodyPr rtlCol="0" anchor="ctr"/>
+          <a:lstStyle/>
+          <a:p>
+            <a:pPr algn="ctr"/>
+          </a:p>
+        </p:txBody>
+      </p:sp>
+      <p:sp>
+        <p:nvSpPr>
+          <p:cNvPr id="24" name="TextBox 23"/>
+          <p:cNvSpPr txBox="1"/>
+          <p:nvPr/>
+        </p:nvSpPr>
+        <p:spPr>
+          <a:xfrm>
+            <a:off x="777240" y="4937760"/>
+            <a:ext cx="1691639" cy="365760"/>
+          </a:xfrm>
+          <a:prstGeom prst="rect">
+            <a:avLst/>
+          </a:prstGeom>
+          <a:noFill/>
+        </p:spPr>
+        <p:txBody>
+          <a:bodyPr wrap="square" anchor="ctr">
+            <a:spAutoFit/>
+          </a:bodyPr>
+          <a:lstStyle/>
+          <a:p>
+            <a:pPr algn="ctr">
+              <a:defRPr sz="1300" b="1">
+                <a:solidFill>
+                  <a:srgbClr val="0F2344"/>
+                </a:solidFill>
+                <a:latin typeface="微软雅黑" panose="020B0503020204020204" charset="-122"/>
+              </a:defRPr>
+            </a:pPr>
+            <a:r>
+              <a:t>溯源审计</a:t>
+            </a:r>
+          </a:p>
+        </p:txBody>
+      </p:sp>
+      <p:sp>
+        <p:nvSpPr>
+          <p:cNvPr id="25" name="Rounded Rectangle 24"/>
+          <p:cNvSpPr/>
+          <p:nvPr/>
+        </p:nvSpPr>
+        <p:spPr>
+          <a:xfrm>
+            <a:off x="566928" y="5577840"/>
+            <a:ext cx="2084831" cy="411480"/>
+          </a:xfrm>
+          <a:prstGeom prst="roundRect">
+            <a:avLst/>
+          </a:prstGeom>
+          <a:solidFill>
+            <a:srgbClr val="EBF7FF"/>
+          </a:solidFill>
+          <a:ln w="12700">
+            <a:solidFill>
+              <a:srgbClr val="B1C6E0"/>
+            </a:solidFill>
+          </a:ln>
+        </p:spPr>
+        <p:style>
+          <a:lnRef idx="1">
+            <a:schemeClr val="accent1"/>
+          </a:lnRef>
+          <a:fillRef idx="3">
+            <a:schemeClr val="accent1"/>
+          </a:fillRef>
+          <a:effectRef idx="2">
+            <a:schemeClr val="accent1"/>
+          </a:effectRef>
+          <a:fontRef idx="minor">
+            <a:schemeClr val="lt1"/>
+          </a:fontRef>
+        </p:style>
+        <p:txBody>
+          <a:bodyPr rtlCol="0" anchor="ctr"/>
+          <a:lstStyle/>
+          <a:p>
+            <a:pPr algn="ctr"/>
+          </a:p>
+        </p:txBody>
+      </p:sp>
+      <p:sp>
+        <p:nvSpPr>
+          <p:cNvPr id="26" name="TextBox 25"/>
+          <p:cNvSpPr txBox="1"/>
+          <p:nvPr/>
+        </p:nvSpPr>
+        <p:spPr>
+          <a:xfrm>
+            <a:off x="658368" y="5650992"/>
+            <a:ext cx="1901951" cy="301752"/>
+          </a:xfrm>
+          <a:prstGeom prst="rect">
+            <a:avLst/>
+          </a:prstGeom>
+          <a:noFill/>
+        </p:spPr>
+        <p:txBody>
+          <a:bodyPr wrap="square" anchor="ctr">
+            <a:spAutoFit/>
+          </a:bodyPr>
+          <a:lstStyle/>
+          <a:p>
+            <a:pPr algn="ctr">
+              <a:defRPr sz="1200" b="1">
+                <a:solidFill>
+                  <a:srgbClr val="0F2344"/>
+                </a:solidFill>
+                <a:latin typeface="微软雅黑" panose="020B0503020204020204" charset="-122"/>
+              </a:defRPr>
+            </a:pPr>
+            <a:r>
+              <a:t>完整闭环流程</a:t>
+            </a:r>
+          </a:p>
+          <a:p>
+            <a:pPr algn="ctr">
+              <a:defRPr sz="850">
+                <a:solidFill>
+                  <a:srgbClr val="5D6F88"/>
+                </a:solidFill>
+                <a:latin typeface="微软雅黑" panose="020B0503020204020204" charset="-122"/>
+              </a:defRPr>
+            </a:pPr>
+            <a:r>
+              <a:t>PDF输入 → 智能解析 → 本体生成 → OWL导出 → 数据溯源</a:t>
+            </a:r>
+          </a:p>
+        </p:txBody>
+      </p:sp>
+      <p:sp>
+        <p:nvSpPr>
+          <p:cNvPr id="28" name="Rectangle 27"/>
+          <p:cNvSpPr/>
+          <p:nvPr>
+            <p:custDataLst>
+              <p:tags r:id="rId1"/>
+            </p:custDataLst>
+          </p:nvPr>
+        </p:nvSpPr>
+        <p:spPr>
+          <a:xfrm>
+            <a:off x="3063240" y="1563370"/>
+            <a:ext cx="8549640" cy="4422775"/>
+          </a:xfrm>
+          <a:prstGeom prst="rect">
+            <a:avLst/>
+          </a:prstGeom>
+          <a:solidFill>
+            <a:srgbClr val="E8EDF4"/>
+          </a:solidFill>
+          <a:ln>
+            <a:solidFill>
+              <a:srgbClr val="B1C6E0"/>
+            </a:solidFill>
+          </a:ln>
+        </p:spPr>
+        <p:style>
+          <a:lnRef idx="1">
+            <a:schemeClr val="accent1"/>
+          </a:lnRef>
+          <a:fillRef idx="3">
+            <a:schemeClr val="accent1"/>
+          </a:fillRef>
+          <a:effectRef idx="2">
+            <a:schemeClr val="accent1"/>
+          </a:effectRef>
+          <a:fontRef idx="minor">
+            <a:schemeClr val="lt1"/>
+          </a:fontRef>
+        </p:style>
+        <p:txBody>
+          <a:bodyPr rtlCol="0" anchor="ctr"/>
+          <a:lstStyle/>
+          <a:p>
+            <a:pPr algn="ctr"/>
+          </a:p>
+        </p:txBody>
+      </p:sp>
+      <p:sp>
+        <p:nvSpPr>
+          <p:cNvPr id="35" name="TextBox 34"/>
+          <p:cNvSpPr txBox="1"/>
+          <p:nvPr>
+            <p:custDataLst>
+              <p:tags r:id="rId2"/>
+            </p:custDataLst>
+          </p:nvPr>
+        </p:nvSpPr>
+        <p:spPr>
+          <a:xfrm>
+            <a:off x="5411470" y="1116965"/>
+            <a:ext cx="3474720" cy="256032"/>
+          </a:xfrm>
+          <a:prstGeom prst="rect">
+            <a:avLst/>
+          </a:prstGeom>
+          <a:noFill/>
+        </p:spPr>
+        <p:txBody>
+          <a:bodyPr wrap="square">
+            <a:spAutoFit/>
+          </a:bodyPr>
+          <a:lstStyle/>
+          <a:p>
+            <a:pPr algn="ctr">
+              <a:defRPr sz="1300" b="1">
+                <a:solidFill>
+                  <a:srgbClr val="0F2344"/>
+                </a:solidFill>
+                <a:latin typeface="微软雅黑" panose="020B0503020204020204" charset="-122"/>
+              </a:defRPr>
+            </a:pPr>
+            <a:r>
+              <a:t>本体生成结果截图</a:t>
+            </a:r>
+          </a:p>
+        </p:txBody>
+      </p:sp>
+      <p:sp>
+        <p:nvSpPr>
+          <p:cNvPr id="38" name="TextBox 37"/>
+          <p:cNvSpPr txBox="1"/>
+          <p:nvPr>
+            <p:custDataLst>
+              <p:tags r:id="rId3"/>
+            </p:custDataLst>
+          </p:nvPr>
+        </p:nvSpPr>
+        <p:spPr>
+          <a:xfrm>
+            <a:off x="5375910" y="6115811"/>
+            <a:ext cx="3291840" cy="384048"/>
+          </a:xfrm>
+          <a:prstGeom prst="rect">
+            <a:avLst/>
+          </a:prstGeom>
+          <a:noFill/>
+        </p:spPr>
+        <p:txBody>
+          <a:bodyPr wrap="square">
+            <a:spAutoFit/>
+          </a:bodyPr>
+          <a:lstStyle/>
+          <a:p>
+            <a:pPr algn="ctr">
+              <a:defRPr sz="1050" b="0">
+                <a:solidFill>
+                  <a:srgbClr val="5D6F88"/>
+                </a:solidFill>
+                <a:latin typeface="微软雅黑" panose="020B0503020204020204" charset="-122"/>
+              </a:defRPr>
+            </a:pPr>
+            <a:r>
+              <a:t>展示：classes / properties / relations</a:t>
+            </a:r>
+          </a:p>
+        </p:txBody>
+      </p:sp>
+    </p:spTree>
+  </p:cSld>
+  <p:clrMapOvr>
+    <a:masterClrMapping/>
+  </p:clrMapOvr>
+</p:sld>
+</file>
+
+<file path=ppt/slides/slide27.xml><?xml version="1.0" encoding="utf-8"?>
+<p:sld xmlns:a="http://schemas.openxmlformats.org/drawingml/2006/main" xmlns:r="http://schemas.openxmlformats.org/officeDocument/2006/relationships" xmlns:p="http://schemas.openxmlformats.org/presentationml/2006/main">
+  <p:cSld>
+    <p:spTree>
+      <p:nvGrpSpPr>
+        <p:cNvPr id="1" name=""/>
+        <p:cNvGrpSpPr/>
+        <p:nvPr/>
+      </p:nvGrpSpPr>
+      <p:grpSpPr/>
+      <p:sp>
+        <p:nvSpPr>
+          <p:cNvPr id="2" name="Rectangle 1"/>
+          <p:cNvSpPr/>
+          <p:nvPr/>
+        </p:nvSpPr>
+        <p:spPr>
+          <a:xfrm>
+            <a:off x="0" y="0"/>
+            <a:ext cx="12191365" cy="6858000"/>
+          </a:xfrm>
+          <a:prstGeom prst="rect">
+            <a:avLst/>
+          </a:prstGeom>
+          <a:solidFill>
+            <a:srgbClr val="F8FBFF"/>
+          </a:solidFill>
+          <a:ln>
+            <a:noFill/>
+          </a:ln>
+        </p:spPr>
+        <p:style>
+          <a:lnRef idx="1">
+            <a:schemeClr val="accent1"/>
+          </a:lnRef>
+          <a:fillRef idx="3">
+            <a:schemeClr val="accent1"/>
+          </a:fillRef>
+          <a:effectRef idx="2">
+            <a:schemeClr val="accent1"/>
+          </a:effectRef>
+          <a:fontRef idx="minor">
+            <a:schemeClr val="lt1"/>
+          </a:fontRef>
+        </p:style>
+        <p:txBody>
+          <a:bodyPr rtlCol="0" anchor="ctr"/>
+          <a:lstStyle/>
+          <a:p>
+            <a:pPr algn="ctr"/>
+          </a:p>
+        </p:txBody>
+      </p:sp>
+      <p:sp>
+        <p:nvSpPr>
+          <p:cNvPr id="3" name="Rectangle 2"/>
+          <p:cNvSpPr/>
+          <p:nvPr/>
+        </p:nvSpPr>
+        <p:spPr>
+          <a:xfrm>
+            <a:off x="0" y="0"/>
+            <a:ext cx="12191365" cy="201168"/>
+          </a:xfrm>
+          <a:prstGeom prst="rect">
+            <a:avLst/>
+          </a:prstGeom>
+          <a:solidFill>
+            <a:srgbClr val="1456A8"/>
+          </a:solidFill>
+          <a:ln>
+            <a:noFill/>
+          </a:ln>
+        </p:spPr>
+        <p:style>
+          <a:lnRef idx="1">
+            <a:schemeClr val="accent1"/>
+          </a:lnRef>
+          <a:fillRef idx="3">
+            <a:schemeClr val="accent1"/>
+          </a:fillRef>
+          <a:effectRef idx="2">
+            <a:schemeClr val="accent1"/>
+          </a:effectRef>
+          <a:fontRef idx="minor">
+            <a:schemeClr val="lt1"/>
+          </a:fontRef>
+        </p:style>
+        <p:txBody>
+          <a:bodyPr rtlCol="0" anchor="ctr"/>
+          <a:lstStyle/>
+          <a:p>
+            <a:pPr algn="ctr"/>
+          </a:p>
+        </p:txBody>
+      </p:sp>
+      <p:sp>
+        <p:nvSpPr>
+          <p:cNvPr id="4" name="Oval 3"/>
+          <p:cNvSpPr/>
+          <p:nvPr/>
+        </p:nvSpPr>
+        <p:spPr>
+          <a:xfrm>
+            <a:off x="10241280" y="-777240"/>
+            <a:ext cx="2103120" cy="2103120"/>
+          </a:xfrm>
+          <a:prstGeom prst="ellipse">
+            <a:avLst/>
+          </a:prstGeom>
+          <a:solidFill>
+            <a:srgbClr val="DCEFFF"/>
+          </a:solidFill>
+          <a:ln>
+            <a:noFill/>
+          </a:ln>
+        </p:spPr>
+        <p:style>
+          <a:lnRef idx="1">
+            <a:schemeClr val="accent1"/>
+          </a:lnRef>
+          <a:fillRef idx="3">
+            <a:schemeClr val="accent1"/>
+          </a:fillRef>
+          <a:effectRef idx="2">
+            <a:schemeClr val="accent1"/>
+          </a:effectRef>
+          <a:fontRef idx="minor">
+            <a:schemeClr val="lt1"/>
+          </a:fontRef>
+        </p:style>
+        <p:txBody>
+          <a:bodyPr rtlCol="0" anchor="ctr"/>
+          <a:lstStyle/>
+          <a:p>
+            <a:pPr algn="ctr"/>
+          </a:p>
+        </p:txBody>
+      </p:sp>
+      <p:sp>
+        <p:nvSpPr>
+          <p:cNvPr id="5" name="TextBox 4"/>
+          <p:cNvSpPr txBox="1"/>
+          <p:nvPr/>
+        </p:nvSpPr>
+        <p:spPr>
+          <a:xfrm>
+            <a:off x="594360" y="384048"/>
+            <a:ext cx="9875520" cy="502920"/>
+          </a:xfrm>
+          <a:prstGeom prst="rect">
+            <a:avLst/>
+          </a:prstGeom>
+          <a:noFill/>
+        </p:spPr>
+        <p:txBody>
+          <a:bodyPr wrap="none">
+            <a:spAutoFit/>
+          </a:bodyPr>
+          <a:lstStyle/>
+          <a:p>
+            <a:pPr>
+              <a:defRPr sz="2500" b="1">
+                <a:solidFill>
+                  <a:srgbClr val="0F2344"/>
+                </a:solidFill>
+                <a:latin typeface="微软雅黑" panose="020B0503020204020204" charset="-122"/>
+              </a:defRPr>
+            </a:pPr>
+            <a:r>
+              <a:t>系统运行效果展示</a:t>
+            </a:r>
+          </a:p>
+        </p:txBody>
+      </p:sp>
+      <p:sp>
+        <p:nvSpPr>
+          <p:cNvPr id="6" name="Rectangle 5"/>
+          <p:cNvSpPr/>
+          <p:nvPr/>
+        </p:nvSpPr>
+        <p:spPr>
+          <a:xfrm>
+            <a:off x="594360" y="987552"/>
+            <a:ext cx="1051560" cy="54864"/>
+          </a:xfrm>
+          <a:prstGeom prst="rect">
+            <a:avLst/>
+          </a:prstGeom>
+          <a:solidFill>
+            <a:srgbClr val="277DF5"/>
+          </a:solidFill>
+          <a:ln>
+            <a:noFill/>
+          </a:ln>
+        </p:spPr>
+        <p:style>
+          <a:lnRef idx="1">
+            <a:schemeClr val="accent1"/>
+          </a:lnRef>
+          <a:fillRef idx="3">
+            <a:schemeClr val="accent1"/>
+          </a:fillRef>
+          <a:effectRef idx="2">
+            <a:schemeClr val="accent1"/>
+          </a:effectRef>
+          <a:fontRef idx="minor">
+            <a:schemeClr val="lt1"/>
+          </a:fontRef>
+        </p:style>
+        <p:txBody>
+          <a:bodyPr rtlCol="0" anchor="ctr"/>
+          <a:lstStyle/>
+          <a:p>
+            <a:pPr algn="ctr"/>
+          </a:p>
+        </p:txBody>
+      </p:sp>
+      <p:sp>
+        <p:nvSpPr>
+          <p:cNvPr id="7" name="TextBox 6"/>
+          <p:cNvSpPr txBox="1"/>
+          <p:nvPr/>
+        </p:nvSpPr>
+        <p:spPr>
+          <a:xfrm>
+            <a:off x="11064240" y="6355080"/>
+            <a:ext cx="548640" cy="228600"/>
+          </a:xfrm>
+          <a:prstGeom prst="rect">
+            <a:avLst/>
+          </a:prstGeom>
+          <a:noFill/>
+        </p:spPr>
+        <p:txBody>
+          <a:bodyPr wrap="none">
+            <a:spAutoFit/>
+          </a:bodyPr>
+          <a:lstStyle/>
+          <a:p>
+            <a:pPr algn="r">
+              <a:defRPr sz="1000">
+                <a:solidFill>
+                  <a:srgbClr val="5D6F88"/>
+                </a:solidFill>
+              </a:defRPr>
+            </a:pPr>
+            <a:r>
+              <a:t>24</a:t>
+            </a:r>
+          </a:p>
+        </p:txBody>
+      </p:sp>
+      <p:sp>
+        <p:nvSpPr>
+          <p:cNvPr id="8" name="Rounded Rectangle 7"/>
+          <p:cNvSpPr/>
+          <p:nvPr/>
+        </p:nvSpPr>
+        <p:spPr>
+          <a:xfrm>
+            <a:off x="685800" y="1298448"/>
+            <a:ext cx="1874519" cy="475488"/>
+          </a:xfrm>
+          <a:prstGeom prst="roundRect">
+            <a:avLst/>
+          </a:prstGeom>
+          <a:solidFill>
+            <a:srgbClr val="FFFFFF"/>
+          </a:solidFill>
+          <a:ln w="12700">
+            <a:solidFill>
+              <a:srgbClr val="B1C6E0"/>
+            </a:solidFill>
+          </a:ln>
+        </p:spPr>
+        <p:style>
+          <a:lnRef idx="1">
+            <a:schemeClr val="accent1"/>
+          </a:lnRef>
+          <a:fillRef idx="3">
+            <a:schemeClr val="accent1"/>
+          </a:fillRef>
+          <a:effectRef idx="2">
+            <a:schemeClr val="accent1"/>
+          </a:effectRef>
+          <a:fontRef idx="minor">
+            <a:schemeClr val="lt1"/>
+          </a:fontRef>
+        </p:style>
+        <p:txBody>
+          <a:bodyPr rtlCol="0" anchor="ctr"/>
+          <a:lstStyle/>
+          <a:p>
+            <a:pPr algn="ctr"/>
+          </a:p>
+        </p:txBody>
+      </p:sp>
+      <p:sp>
+        <p:nvSpPr>
+          <p:cNvPr id="9" name="TextBox 8"/>
+          <p:cNvSpPr txBox="1"/>
+          <p:nvPr/>
+        </p:nvSpPr>
+        <p:spPr>
+          <a:xfrm>
+            <a:off x="777240" y="1371600"/>
+            <a:ext cx="1691639" cy="365760"/>
+          </a:xfrm>
+          <a:prstGeom prst="rect">
+            <a:avLst/>
+          </a:prstGeom>
+          <a:noFill/>
+        </p:spPr>
+        <p:txBody>
+          <a:bodyPr wrap="square" anchor="ctr">
+            <a:spAutoFit/>
+          </a:bodyPr>
+          <a:lstStyle/>
+          <a:p>
+            <a:pPr algn="ctr">
+              <a:defRPr sz="1300" b="1">
+                <a:solidFill>
+                  <a:srgbClr val="0F2344"/>
+                </a:solidFill>
+                <a:latin typeface="微软雅黑" panose="020B0503020204020204" charset="-122"/>
+              </a:defRPr>
+            </a:pPr>
+            <a:r>
+              <a:t>PDF上传</a:t>
+            </a:r>
+          </a:p>
+        </p:txBody>
+      </p:sp>
+      <p:cxnSp>
+        <p:nvCxnSpPr>
+          <p:cNvPr id="10" name="Connector 9"/>
+          <p:cNvCxnSpPr/>
+          <p:nvPr/>
+        </p:nvCxnSpPr>
+        <p:spPr>
+          <a:xfrm>
+            <a:off x="1627632" y="1773936"/>
+            <a:ext cx="0" cy="210312"/>
+          </a:xfrm>
+          <a:prstGeom prst="line">
+            <a:avLst/>
+          </a:prstGeom>
+          <a:ln w="19050">
+            <a:solidFill>
+              <a:srgbClr val="277DF5"/>
+            </a:solidFill>
+          </a:ln>
+        </p:spPr>
+        <p:style>
+          <a:lnRef idx="2">
+            <a:schemeClr val="accent1"/>
+          </a:lnRef>
+          <a:fillRef idx="0">
+            <a:schemeClr val="accent1"/>
+          </a:fillRef>
+          <a:effectRef idx="1">
+            <a:schemeClr val="accent1"/>
+          </a:effectRef>
+          <a:fontRef idx="minor">
+            <a:schemeClr val="tx1"/>
+          </a:fontRef>
+        </p:style>
+      </p:cxnSp>
+      <p:sp>
+        <p:nvSpPr>
+          <p:cNvPr id="11" name="Rounded Rectangle 10"/>
+          <p:cNvSpPr/>
+          <p:nvPr/>
+        </p:nvSpPr>
+        <p:spPr>
+          <a:xfrm>
+            <a:off x="685800" y="2011680"/>
+            <a:ext cx="1874519" cy="475488"/>
+          </a:xfrm>
+          <a:prstGeom prst="roundRect">
+            <a:avLst/>
+          </a:prstGeom>
+          <a:solidFill>
+            <a:srgbClr val="FFFFFF"/>
+          </a:solidFill>
+          <a:ln w="12700">
+            <a:solidFill>
+              <a:srgbClr val="B1C6E0"/>
+            </a:solidFill>
+          </a:ln>
+        </p:spPr>
+        <p:style>
+          <a:lnRef idx="1">
+            <a:schemeClr val="accent1"/>
+          </a:lnRef>
+          <a:fillRef idx="3">
+            <a:schemeClr val="accent1"/>
+          </a:fillRef>
+          <a:effectRef idx="2">
+            <a:schemeClr val="accent1"/>
+          </a:effectRef>
+          <a:fontRef idx="minor">
+            <a:schemeClr val="lt1"/>
+          </a:fontRef>
+        </p:style>
+        <p:txBody>
+          <a:bodyPr rtlCol="0" anchor="ctr"/>
+          <a:lstStyle/>
+          <a:p>
+            <a:pPr algn="ctr"/>
+          </a:p>
+        </p:txBody>
+      </p:sp>
+      <p:sp>
+        <p:nvSpPr>
+          <p:cNvPr id="12" name="TextBox 11"/>
+          <p:cNvSpPr txBox="1"/>
+          <p:nvPr/>
+        </p:nvSpPr>
+        <p:spPr>
+          <a:xfrm>
+            <a:off x="777240" y="2084832"/>
+            <a:ext cx="1691639" cy="365760"/>
+          </a:xfrm>
+          <a:prstGeom prst="rect">
+            <a:avLst/>
+          </a:prstGeom>
+          <a:noFill/>
+        </p:spPr>
+        <p:txBody>
+          <a:bodyPr wrap="square" anchor="ctr">
+            <a:spAutoFit/>
+          </a:bodyPr>
+          <a:lstStyle/>
+          <a:p>
+            <a:pPr algn="ctr">
+              <a:defRPr sz="1300" b="1">
+                <a:solidFill>
+                  <a:srgbClr val="0F2344"/>
+                </a:solidFill>
+                <a:latin typeface="微软雅黑" panose="020B0503020204020204" charset="-122"/>
+              </a:defRPr>
+            </a:pPr>
+            <a:r>
+              <a:t>文档解析</a:t>
+            </a:r>
+          </a:p>
+        </p:txBody>
+      </p:sp>
+      <p:cxnSp>
+        <p:nvCxnSpPr>
+          <p:cNvPr id="13" name="Connector 12"/>
+          <p:cNvCxnSpPr/>
+          <p:nvPr/>
+        </p:nvCxnSpPr>
+        <p:spPr>
+          <a:xfrm>
+            <a:off x="1627632" y="2487168"/>
+            <a:ext cx="0" cy="210312"/>
+          </a:xfrm>
+          <a:prstGeom prst="line">
+            <a:avLst/>
+          </a:prstGeom>
+          <a:ln w="19050">
+            <a:solidFill>
+              <a:srgbClr val="277DF5"/>
+            </a:solidFill>
+          </a:ln>
+        </p:spPr>
+        <p:style>
+          <a:lnRef idx="2">
+            <a:schemeClr val="accent1"/>
+          </a:lnRef>
+          <a:fillRef idx="0">
+            <a:schemeClr val="accent1"/>
+          </a:fillRef>
+          <a:effectRef idx="1">
+            <a:schemeClr val="accent1"/>
+          </a:effectRef>
+          <a:fontRef idx="minor">
+            <a:schemeClr val="tx1"/>
+          </a:fontRef>
+        </p:style>
+      </p:cxnSp>
+      <p:sp>
+        <p:nvSpPr>
+          <p:cNvPr id="14" name="Rounded Rectangle 13"/>
+          <p:cNvSpPr/>
+          <p:nvPr/>
+        </p:nvSpPr>
+        <p:spPr>
+          <a:xfrm>
+            <a:off x="685800" y="2724912"/>
+            <a:ext cx="1874519" cy="475488"/>
+          </a:xfrm>
+          <a:prstGeom prst="roundRect">
+            <a:avLst/>
+          </a:prstGeom>
+          <a:solidFill>
+            <a:srgbClr val="FFFFFF"/>
+          </a:solidFill>
+          <a:ln w="12700">
+            <a:solidFill>
+              <a:srgbClr val="B1C6E0"/>
+            </a:solidFill>
+          </a:ln>
+        </p:spPr>
+        <p:style>
+          <a:lnRef idx="1">
+            <a:schemeClr val="accent1"/>
+          </a:lnRef>
+          <a:fillRef idx="3">
+            <a:schemeClr val="accent1"/>
+          </a:fillRef>
+          <a:effectRef idx="2">
+            <a:schemeClr val="accent1"/>
+          </a:effectRef>
+          <a:fontRef idx="minor">
+            <a:schemeClr val="lt1"/>
+          </a:fontRef>
+        </p:style>
+        <p:txBody>
+          <a:bodyPr rtlCol="0" anchor="ctr"/>
+          <a:lstStyle/>
+          <a:p>
+            <a:pPr algn="ctr"/>
+          </a:p>
+        </p:txBody>
+      </p:sp>
+      <p:sp>
+        <p:nvSpPr>
+          <p:cNvPr id="15" name="TextBox 14"/>
+          <p:cNvSpPr txBox="1"/>
+          <p:nvPr/>
+        </p:nvSpPr>
+        <p:spPr>
+          <a:xfrm>
+            <a:off x="777240" y="2798064"/>
+            <a:ext cx="1691639" cy="365760"/>
+          </a:xfrm>
+          <a:prstGeom prst="rect">
+            <a:avLst/>
+          </a:prstGeom>
+          <a:noFill/>
+        </p:spPr>
+        <p:txBody>
+          <a:bodyPr wrap="square" anchor="ctr">
+            <a:spAutoFit/>
+          </a:bodyPr>
+          <a:lstStyle/>
+          <a:p>
+            <a:pPr algn="ctr">
+              <a:defRPr sz="1300" b="1">
+                <a:solidFill>
+                  <a:srgbClr val="0F2344"/>
+                </a:solidFill>
+                <a:latin typeface="微软雅黑" panose="020B0503020204020204" charset="-122"/>
+              </a:defRPr>
+            </a:pPr>
+            <a:r>
+              <a:t>数据清洗</a:t>
+            </a:r>
+          </a:p>
+        </p:txBody>
+      </p:sp>
+      <p:cxnSp>
+        <p:nvCxnSpPr>
+          <p:cNvPr id="16" name="Connector 15"/>
+          <p:cNvCxnSpPr/>
+          <p:nvPr/>
+        </p:nvCxnSpPr>
+        <p:spPr>
+          <a:xfrm>
+            <a:off x="1627632" y="3200400"/>
+            <a:ext cx="0" cy="210312"/>
+          </a:xfrm>
+          <a:prstGeom prst="line">
+            <a:avLst/>
+          </a:prstGeom>
+          <a:ln w="19050">
+            <a:solidFill>
+              <a:srgbClr val="277DF5"/>
+            </a:solidFill>
+          </a:ln>
+        </p:spPr>
+        <p:style>
+          <a:lnRef idx="2">
+            <a:schemeClr val="accent1"/>
+          </a:lnRef>
+          <a:fillRef idx="0">
+            <a:schemeClr val="accent1"/>
+          </a:fillRef>
+          <a:effectRef idx="1">
+            <a:schemeClr val="accent1"/>
+          </a:effectRef>
+          <a:fontRef idx="minor">
+            <a:schemeClr val="tx1"/>
+          </a:fontRef>
+        </p:style>
+      </p:cxnSp>
+      <p:sp>
+        <p:nvSpPr>
+          <p:cNvPr id="17" name="Rounded Rectangle 16"/>
+          <p:cNvSpPr/>
+          <p:nvPr/>
+        </p:nvSpPr>
+        <p:spPr>
+          <a:xfrm>
+            <a:off x="685800" y="3438144"/>
+            <a:ext cx="1874519" cy="475488"/>
+          </a:xfrm>
+          <a:prstGeom prst="roundRect">
+            <a:avLst/>
+          </a:prstGeom>
+          <a:solidFill>
+            <a:srgbClr val="FFFFFF"/>
+          </a:solidFill>
+          <a:ln w="12700">
+            <a:solidFill>
+              <a:srgbClr val="B1C6E0"/>
+            </a:solidFill>
+          </a:ln>
+        </p:spPr>
+        <p:style>
+          <a:lnRef idx="1">
+            <a:schemeClr val="accent1"/>
+          </a:lnRef>
+          <a:fillRef idx="3">
+            <a:schemeClr val="accent1"/>
+          </a:fillRef>
+          <a:effectRef idx="2">
+            <a:schemeClr val="accent1"/>
+          </a:effectRef>
+          <a:fontRef idx="minor">
+            <a:schemeClr val="lt1"/>
+          </a:fontRef>
+        </p:style>
+        <p:txBody>
+          <a:bodyPr rtlCol="0" anchor="ctr"/>
+          <a:lstStyle/>
+          <a:p>
+            <a:pPr algn="ctr"/>
+          </a:p>
+        </p:txBody>
+      </p:sp>
+      <p:sp>
+        <p:nvSpPr>
+          <p:cNvPr id="18" name="TextBox 17"/>
+          <p:cNvSpPr txBox="1"/>
+          <p:nvPr/>
+        </p:nvSpPr>
+        <p:spPr>
+          <a:xfrm>
+            <a:off x="777240" y="3511296"/>
+            <a:ext cx="1691639" cy="365760"/>
+          </a:xfrm>
+          <a:prstGeom prst="rect">
+            <a:avLst/>
+          </a:prstGeom>
+          <a:noFill/>
+        </p:spPr>
+        <p:txBody>
+          <a:bodyPr wrap="square" anchor="ctr">
+            <a:spAutoFit/>
+          </a:bodyPr>
+          <a:lstStyle/>
+          <a:p>
+            <a:pPr algn="ctr">
+              <a:defRPr sz="1300" b="1">
+                <a:solidFill>
+                  <a:srgbClr val="0F2344"/>
+                </a:solidFill>
+                <a:latin typeface="微软雅黑" panose="020B0503020204020204" charset="-122"/>
+              </a:defRPr>
+            </a:pPr>
+            <a:r>
+              <a:t>本体生成</a:t>
+            </a:r>
+          </a:p>
+        </p:txBody>
+      </p:sp>
+      <p:cxnSp>
+        <p:nvCxnSpPr>
+          <p:cNvPr id="19" name="Connector 18"/>
+          <p:cNvCxnSpPr/>
+          <p:nvPr/>
+        </p:nvCxnSpPr>
+        <p:spPr>
+          <a:xfrm>
+            <a:off x="1627632" y="3913631"/>
+            <a:ext cx="0" cy="210313"/>
+          </a:xfrm>
+          <a:prstGeom prst="line">
+            <a:avLst/>
+          </a:prstGeom>
+          <a:ln w="19050">
+            <a:solidFill>
+              <a:srgbClr val="277DF5"/>
+            </a:solidFill>
+          </a:ln>
+        </p:spPr>
+        <p:style>
+          <a:lnRef idx="2">
+            <a:schemeClr val="accent1"/>
+          </a:lnRef>
+          <a:fillRef idx="0">
+            <a:schemeClr val="accent1"/>
+          </a:fillRef>
+          <a:effectRef idx="1">
+            <a:schemeClr val="accent1"/>
+          </a:effectRef>
+          <a:fontRef idx="minor">
+            <a:schemeClr val="tx1"/>
+          </a:fontRef>
+        </p:style>
+      </p:cxnSp>
+      <p:sp>
+        <p:nvSpPr>
+          <p:cNvPr id="20" name="Rounded Rectangle 19"/>
+          <p:cNvSpPr/>
+          <p:nvPr/>
+        </p:nvSpPr>
+        <p:spPr>
+          <a:xfrm>
+            <a:off x="685800" y="4151376"/>
+            <a:ext cx="1874519" cy="475488"/>
+          </a:xfrm>
+          <a:prstGeom prst="roundRect">
+            <a:avLst/>
+          </a:prstGeom>
+          <a:solidFill>
+            <a:srgbClr val="FFFFFF"/>
+          </a:solidFill>
+          <a:ln w="12700">
+            <a:solidFill>
+              <a:srgbClr val="B1C6E0"/>
+            </a:solidFill>
+          </a:ln>
+        </p:spPr>
+        <p:style>
+          <a:lnRef idx="1">
+            <a:schemeClr val="accent1"/>
+          </a:lnRef>
+          <a:fillRef idx="3">
+            <a:schemeClr val="accent1"/>
+          </a:fillRef>
+          <a:effectRef idx="2">
+            <a:schemeClr val="accent1"/>
+          </a:effectRef>
+          <a:fontRef idx="minor">
+            <a:schemeClr val="lt1"/>
+          </a:fontRef>
+        </p:style>
+        <p:txBody>
+          <a:bodyPr rtlCol="0" anchor="ctr"/>
+          <a:lstStyle/>
+          <a:p>
+            <a:pPr algn="ctr"/>
+          </a:p>
+        </p:txBody>
+      </p:sp>
+      <p:sp>
+        <p:nvSpPr>
+          <p:cNvPr id="21" name="TextBox 20"/>
+          <p:cNvSpPr txBox="1"/>
+          <p:nvPr/>
+        </p:nvSpPr>
+        <p:spPr>
+          <a:xfrm>
+            <a:off x="777240" y="4224528"/>
+            <a:ext cx="1691639" cy="365760"/>
+          </a:xfrm>
+          <a:prstGeom prst="rect">
+            <a:avLst/>
+          </a:prstGeom>
+          <a:noFill/>
+        </p:spPr>
+        <p:txBody>
+          <a:bodyPr wrap="square" anchor="ctr">
+            <a:spAutoFit/>
+          </a:bodyPr>
+          <a:lstStyle/>
+          <a:p>
+            <a:pPr algn="ctr">
+              <a:defRPr sz="1300" b="1">
+                <a:solidFill>
+                  <a:srgbClr val="0F2344"/>
+                </a:solidFill>
+                <a:latin typeface="微软雅黑" panose="020B0503020204020204" charset="-122"/>
+              </a:defRPr>
+            </a:pPr>
+            <a:r>
+              <a:t>OWL导出</a:t>
+            </a:r>
+          </a:p>
+        </p:txBody>
+      </p:sp>
+      <p:cxnSp>
+        <p:nvCxnSpPr>
+          <p:cNvPr id="22" name="Connector 21"/>
+          <p:cNvCxnSpPr/>
+          <p:nvPr/>
+        </p:nvCxnSpPr>
+        <p:spPr>
+          <a:xfrm>
+            <a:off x="1627632" y="4626864"/>
+            <a:ext cx="0" cy="210312"/>
+          </a:xfrm>
+          <a:prstGeom prst="line">
+            <a:avLst/>
+          </a:prstGeom>
+          <a:ln w="19050">
+            <a:solidFill>
+              <a:srgbClr val="277DF5"/>
+            </a:solidFill>
+          </a:ln>
+        </p:spPr>
+        <p:style>
+          <a:lnRef idx="2">
+            <a:schemeClr val="accent1"/>
+          </a:lnRef>
+          <a:fillRef idx="0">
+            <a:schemeClr val="accent1"/>
+          </a:fillRef>
+          <a:effectRef idx="1">
+            <a:schemeClr val="accent1"/>
+          </a:effectRef>
+          <a:fontRef idx="minor">
+            <a:schemeClr val="tx1"/>
+          </a:fontRef>
+        </p:style>
+      </p:cxnSp>
+      <p:sp>
+        <p:nvSpPr>
+          <p:cNvPr id="23" name="Rounded Rectangle 22"/>
+          <p:cNvSpPr/>
+          <p:nvPr/>
+        </p:nvSpPr>
+        <p:spPr>
+          <a:xfrm>
+            <a:off x="685800" y="4864608"/>
+            <a:ext cx="1874519" cy="475488"/>
+          </a:xfrm>
+          <a:prstGeom prst="roundRect">
+            <a:avLst/>
+          </a:prstGeom>
+          <a:solidFill>
+            <a:srgbClr val="FFFFFF"/>
+          </a:solidFill>
+          <a:ln w="12700">
+            <a:solidFill>
+              <a:srgbClr val="B1C6E0"/>
+            </a:solidFill>
+          </a:ln>
+        </p:spPr>
+        <p:style>
+          <a:lnRef idx="1">
+            <a:schemeClr val="accent1"/>
+          </a:lnRef>
+          <a:fillRef idx="3">
+            <a:schemeClr val="accent1"/>
+          </a:fillRef>
+          <a:effectRef idx="2">
+            <a:schemeClr val="accent1"/>
+          </a:effectRef>
+          <a:fontRef idx="minor">
+            <a:schemeClr val="lt1"/>
+          </a:fontRef>
+        </p:style>
+        <p:txBody>
+          <a:bodyPr rtlCol="0" anchor="ctr"/>
+          <a:lstStyle/>
+          <a:p>
+            <a:pPr algn="ctr"/>
+          </a:p>
+        </p:txBody>
+      </p:sp>
+      <p:sp>
+        <p:nvSpPr>
+          <p:cNvPr id="24" name="TextBox 23"/>
+          <p:cNvSpPr txBox="1"/>
+          <p:nvPr/>
+        </p:nvSpPr>
+        <p:spPr>
+          <a:xfrm>
+            <a:off x="777240" y="4937760"/>
+            <a:ext cx="1691639" cy="365760"/>
+          </a:xfrm>
+          <a:prstGeom prst="rect">
+            <a:avLst/>
+          </a:prstGeom>
+          <a:noFill/>
+        </p:spPr>
+        <p:txBody>
+          <a:bodyPr wrap="square" anchor="ctr">
+            <a:spAutoFit/>
+          </a:bodyPr>
+          <a:lstStyle/>
+          <a:p>
+            <a:pPr algn="ctr">
+              <a:defRPr sz="1300" b="1">
+                <a:solidFill>
+                  <a:srgbClr val="0F2344"/>
+                </a:solidFill>
+                <a:latin typeface="微软雅黑" panose="020B0503020204020204" charset="-122"/>
+              </a:defRPr>
+            </a:pPr>
+            <a:r>
+              <a:t>溯源审计</a:t>
+            </a:r>
+          </a:p>
+        </p:txBody>
+      </p:sp>
+      <p:sp>
+        <p:nvSpPr>
+          <p:cNvPr id="25" name="Rounded Rectangle 24"/>
+          <p:cNvSpPr/>
+          <p:nvPr/>
+        </p:nvSpPr>
+        <p:spPr>
+          <a:xfrm>
+            <a:off x="566928" y="5577840"/>
+            <a:ext cx="2084831" cy="411480"/>
+          </a:xfrm>
+          <a:prstGeom prst="roundRect">
+            <a:avLst/>
+          </a:prstGeom>
+          <a:solidFill>
+            <a:srgbClr val="EBF7FF"/>
+          </a:solidFill>
+          <a:ln w="12700">
+            <a:solidFill>
+              <a:srgbClr val="B1C6E0"/>
+            </a:solidFill>
+          </a:ln>
+        </p:spPr>
+        <p:style>
+          <a:lnRef idx="1">
+            <a:schemeClr val="accent1"/>
+          </a:lnRef>
+          <a:fillRef idx="3">
+            <a:schemeClr val="accent1"/>
+          </a:fillRef>
+          <a:effectRef idx="2">
+            <a:schemeClr val="accent1"/>
+          </a:effectRef>
+          <a:fontRef idx="minor">
+            <a:schemeClr val="lt1"/>
+          </a:fontRef>
+        </p:style>
+        <p:txBody>
+          <a:bodyPr rtlCol="0" anchor="ctr"/>
+          <a:lstStyle/>
+          <a:p>
+            <a:pPr algn="ctr"/>
+          </a:p>
+        </p:txBody>
+      </p:sp>
+      <p:sp>
+        <p:nvSpPr>
+          <p:cNvPr id="26" name="TextBox 25"/>
+          <p:cNvSpPr txBox="1"/>
+          <p:nvPr/>
+        </p:nvSpPr>
+        <p:spPr>
+          <a:xfrm>
+            <a:off x="658368" y="5650992"/>
+            <a:ext cx="1901951" cy="301752"/>
+          </a:xfrm>
+          <a:prstGeom prst="rect">
+            <a:avLst/>
+          </a:prstGeom>
+          <a:noFill/>
+        </p:spPr>
+        <p:txBody>
+          <a:bodyPr wrap="square" anchor="ctr">
+            <a:spAutoFit/>
+          </a:bodyPr>
+          <a:lstStyle/>
+          <a:p>
+            <a:pPr algn="ctr">
+              <a:defRPr sz="1200" b="1">
+                <a:solidFill>
+                  <a:srgbClr val="0F2344"/>
+                </a:solidFill>
+                <a:latin typeface="微软雅黑" panose="020B0503020204020204" charset="-122"/>
+              </a:defRPr>
+            </a:pPr>
+            <a:r>
+              <a:t>完整闭环流程</a:t>
+            </a:r>
+          </a:p>
+          <a:p>
+            <a:pPr algn="ctr">
+              <a:defRPr sz="850">
+                <a:solidFill>
+                  <a:srgbClr val="5D6F88"/>
+                </a:solidFill>
+                <a:latin typeface="微软雅黑" panose="020B0503020204020204" charset="-122"/>
+              </a:defRPr>
+            </a:pPr>
+            <a:r>
+              <a:t>PDF输入 → 智能解析 → 本体生成 → OWL导出 → 数据溯源</a:t>
+            </a:r>
+          </a:p>
+        </p:txBody>
+      </p:sp>
+      <p:sp>
+        <p:nvSpPr>
+          <p:cNvPr id="28" name="Rectangle 27"/>
+          <p:cNvSpPr/>
+          <p:nvPr>
+            <p:custDataLst>
+              <p:tags r:id="rId1"/>
+            </p:custDataLst>
+          </p:nvPr>
+        </p:nvSpPr>
+        <p:spPr>
+          <a:xfrm>
+            <a:off x="3063240" y="1563370"/>
+            <a:ext cx="8549640" cy="4422775"/>
+          </a:xfrm>
+          <a:prstGeom prst="rect">
+            <a:avLst/>
+          </a:prstGeom>
+          <a:solidFill>
+            <a:srgbClr val="E8EDF4"/>
+          </a:solidFill>
+          <a:ln>
+            <a:solidFill>
+              <a:srgbClr val="B1C6E0"/>
+            </a:solidFill>
+          </a:ln>
+        </p:spPr>
+        <p:style>
+          <a:lnRef idx="1">
+            <a:schemeClr val="accent1"/>
+          </a:lnRef>
+          <a:fillRef idx="3">
+            <a:schemeClr val="accent1"/>
+          </a:fillRef>
+          <a:effectRef idx="2">
+            <a:schemeClr val="accent1"/>
+          </a:effectRef>
+          <a:fontRef idx="minor">
+            <a:schemeClr val="lt1"/>
+          </a:fontRef>
+        </p:style>
+        <p:txBody>
+          <a:bodyPr rtlCol="0" anchor="ctr"/>
+          <a:lstStyle/>
+          <a:p>
+            <a:pPr algn="ctr"/>
+          </a:p>
+        </p:txBody>
+      </p:sp>
+      <p:sp>
+        <p:nvSpPr>
+          <p:cNvPr id="39" name="TextBox 38"/>
+          <p:cNvSpPr txBox="1"/>
+          <p:nvPr>
+            <p:custDataLst>
+              <p:tags r:id="rId2"/>
+            </p:custDataLst>
+          </p:nvPr>
+        </p:nvSpPr>
+        <p:spPr>
+          <a:xfrm>
+            <a:off x="5307330" y="1151255"/>
+            <a:ext cx="3474720" cy="256032"/>
+          </a:xfrm>
+          <a:prstGeom prst="rect">
+            <a:avLst/>
+          </a:prstGeom>
+          <a:noFill/>
+        </p:spPr>
+        <p:txBody>
+          <a:bodyPr wrap="square">
+            <a:spAutoFit/>
+          </a:bodyPr>
+          <a:lstStyle/>
+          <a:p>
+            <a:pPr algn="ctr">
+              <a:defRPr sz="1300" b="1">
+                <a:solidFill>
+                  <a:srgbClr val="0F2344"/>
+                </a:solidFill>
+                <a:latin typeface="微软雅黑" panose="020B0503020204020204" charset="-122"/>
+              </a:defRPr>
+            </a:pPr>
+            <a:r>
+              <a:t>OWL导出与下载截图</a:t>
+            </a:r>
+          </a:p>
+        </p:txBody>
+      </p:sp>
+      <p:sp>
+        <p:nvSpPr>
+          <p:cNvPr id="42" name="TextBox 41"/>
+          <p:cNvSpPr txBox="1"/>
+          <p:nvPr>
+            <p:custDataLst>
+              <p:tags r:id="rId3"/>
+            </p:custDataLst>
+          </p:nvPr>
+        </p:nvSpPr>
+        <p:spPr>
+          <a:xfrm>
+            <a:off x="5398770" y="6142481"/>
+            <a:ext cx="3291840" cy="384048"/>
+          </a:xfrm>
+          <a:prstGeom prst="rect">
+            <a:avLst/>
+          </a:prstGeom>
+          <a:noFill/>
+        </p:spPr>
+        <p:txBody>
+          <a:bodyPr wrap="square">
+            <a:spAutoFit/>
+          </a:bodyPr>
+          <a:lstStyle/>
+          <a:p>
+            <a:pPr algn="ctr">
+              <a:defRPr sz="1050" b="0">
+                <a:solidFill>
+                  <a:srgbClr val="5D6F88"/>
+                </a:solidFill>
+                <a:latin typeface="微软雅黑" panose="020B0503020204020204" charset="-122"/>
+              </a:defRPr>
+            </a:pPr>
+            <a:r>
+              <a:t>展示：OWL 文件导出、下载入口</a:t>
+            </a:r>
+          </a:p>
+        </p:txBody>
+      </p:sp>
+    </p:spTree>
+  </p:cSld>
+  <p:clrMapOvr>
+    <a:masterClrMapping/>
+  </p:clrMapOvr>
+</p:sld>
+</file>
+
+<file path=ppt/slides/slide28.xml><?xml version="1.0" encoding="utf-8"?>
+<p:sld xmlns:a="http://schemas.openxmlformats.org/drawingml/2006/main" xmlns:r="http://schemas.openxmlformats.org/officeDocument/2006/relationships" xmlns:p="http://schemas.openxmlformats.org/presentationml/2006/main">
+  <p:cSld>
+    <p:spTree>
+      <p:nvGrpSpPr>
+        <p:cNvPr id="1" name=""/>
+        <p:cNvGrpSpPr/>
+        <p:nvPr/>
+      </p:nvGrpSpPr>
+      <p:grpSpPr/>
+      <p:sp>
+        <p:nvSpPr>
+          <p:cNvPr id="2" name="Rectangle 1"/>
+          <p:cNvSpPr/>
+          <p:nvPr/>
+        </p:nvSpPr>
+        <p:spPr>
+          <a:xfrm>
+            <a:off x="0" y="0"/>
+            <a:ext cx="12191365" cy="6858000"/>
+          </a:xfrm>
+          <a:prstGeom prst="rect">
+            <a:avLst/>
+          </a:prstGeom>
+          <a:solidFill>
+            <a:srgbClr val="F8FBFF"/>
+          </a:solidFill>
+          <a:ln>
+            <a:noFill/>
+          </a:ln>
+        </p:spPr>
+        <p:style>
+          <a:lnRef idx="1">
+            <a:schemeClr val="accent1"/>
+          </a:lnRef>
+          <a:fillRef idx="3">
+            <a:schemeClr val="accent1"/>
+          </a:fillRef>
+          <a:effectRef idx="2">
+            <a:schemeClr val="accent1"/>
+          </a:effectRef>
+          <a:fontRef idx="minor">
+            <a:schemeClr val="lt1"/>
+          </a:fontRef>
+        </p:style>
+        <p:txBody>
+          <a:bodyPr rtlCol="0" anchor="ctr"/>
+          <a:lstStyle/>
+          <a:p>
+            <a:pPr algn="ctr"/>
+          </a:p>
+        </p:txBody>
+      </p:sp>
+      <p:sp>
+        <p:nvSpPr>
+          <p:cNvPr id="3" name="Rectangle 2"/>
+          <p:cNvSpPr/>
+          <p:nvPr/>
+        </p:nvSpPr>
+        <p:spPr>
+          <a:xfrm>
+            <a:off x="0" y="0"/>
+            <a:ext cx="12191365" cy="201168"/>
+          </a:xfrm>
+          <a:prstGeom prst="rect">
+            <a:avLst/>
+          </a:prstGeom>
+          <a:solidFill>
+            <a:srgbClr val="1456A8"/>
+          </a:solidFill>
+          <a:ln>
+            <a:noFill/>
+          </a:ln>
+        </p:spPr>
+        <p:style>
+          <a:lnRef idx="1">
+            <a:schemeClr val="accent1"/>
+          </a:lnRef>
+          <a:fillRef idx="3">
+            <a:schemeClr val="accent1"/>
+          </a:fillRef>
+          <a:effectRef idx="2">
+            <a:schemeClr val="accent1"/>
+          </a:effectRef>
+          <a:fontRef idx="minor">
+            <a:schemeClr val="lt1"/>
+          </a:fontRef>
+        </p:style>
+        <p:txBody>
+          <a:bodyPr rtlCol="0" anchor="ctr"/>
+          <a:lstStyle/>
+          <a:p>
+            <a:pPr algn="ctr"/>
+          </a:p>
+        </p:txBody>
+      </p:sp>
+      <p:sp>
+        <p:nvSpPr>
+          <p:cNvPr id="4" name="Oval 3"/>
+          <p:cNvSpPr/>
+          <p:nvPr/>
+        </p:nvSpPr>
+        <p:spPr>
+          <a:xfrm>
+            <a:off x="10241280" y="-777240"/>
+            <a:ext cx="2103120" cy="2103120"/>
+          </a:xfrm>
+          <a:prstGeom prst="ellipse">
+            <a:avLst/>
+          </a:prstGeom>
+          <a:solidFill>
+            <a:srgbClr val="DCEFFF"/>
+          </a:solidFill>
+          <a:ln>
+            <a:noFill/>
+          </a:ln>
+        </p:spPr>
+        <p:style>
+          <a:lnRef idx="1">
+            <a:schemeClr val="accent1"/>
+          </a:lnRef>
+          <a:fillRef idx="3">
+            <a:schemeClr val="accent1"/>
+          </a:fillRef>
+          <a:effectRef idx="2">
+            <a:schemeClr val="accent1"/>
+          </a:effectRef>
+          <a:fontRef idx="minor">
+            <a:schemeClr val="lt1"/>
+          </a:fontRef>
+        </p:style>
+        <p:txBody>
+          <a:bodyPr rtlCol="0" anchor="ctr"/>
+          <a:lstStyle/>
+          <a:p>
+            <a:pPr algn="ctr"/>
+          </a:p>
+        </p:txBody>
+      </p:sp>
+      <p:sp>
+        <p:nvSpPr>
+          <p:cNvPr id="5" name="TextBox 4"/>
+          <p:cNvSpPr txBox="1"/>
+          <p:nvPr/>
+        </p:nvSpPr>
+        <p:spPr>
+          <a:xfrm>
+            <a:off x="594360" y="384048"/>
+            <a:ext cx="9875520" cy="502920"/>
+          </a:xfrm>
+          <a:prstGeom prst="rect">
+            <a:avLst/>
+          </a:prstGeom>
+          <a:noFill/>
+        </p:spPr>
+        <p:txBody>
+          <a:bodyPr wrap="none">
+            <a:spAutoFit/>
+          </a:bodyPr>
+          <a:lstStyle/>
+          <a:p>
+            <a:pPr>
+              <a:defRPr sz="2500" b="1">
+                <a:solidFill>
+                  <a:srgbClr val="0F2344"/>
+                </a:solidFill>
+                <a:latin typeface="微软雅黑" panose="020B0503020204020204" charset="-122"/>
+              </a:defRPr>
+            </a:pPr>
+            <a:r>
+              <a:t>本体生成成果统计</a:t>
+            </a:r>
+          </a:p>
+        </p:txBody>
+      </p:sp>
+      <p:sp>
+        <p:nvSpPr>
+          <p:cNvPr id="6" name="Rectangle 5"/>
+          <p:cNvSpPr/>
+          <p:nvPr/>
+        </p:nvSpPr>
+        <p:spPr>
+          <a:xfrm>
+            <a:off x="594360" y="987552"/>
+            <a:ext cx="1051560" cy="54864"/>
+          </a:xfrm>
+          <a:prstGeom prst="rect">
+            <a:avLst/>
+          </a:prstGeom>
+          <a:solidFill>
+            <a:srgbClr val="277DF5"/>
+          </a:solidFill>
+          <a:ln>
+            <a:noFill/>
+          </a:ln>
+        </p:spPr>
+        <p:style>
+          <a:lnRef idx="1">
+            <a:schemeClr val="accent1"/>
+          </a:lnRef>
+          <a:fillRef idx="3">
+            <a:schemeClr val="accent1"/>
+          </a:fillRef>
+          <a:effectRef idx="2">
+            <a:schemeClr val="accent1"/>
+          </a:effectRef>
+          <a:fontRef idx="minor">
+            <a:schemeClr val="lt1"/>
+          </a:fontRef>
+        </p:style>
+        <p:txBody>
+          <a:bodyPr rtlCol="0" anchor="ctr"/>
+          <a:lstStyle/>
+          <a:p>
+            <a:pPr algn="ctr"/>
+          </a:p>
+        </p:txBody>
+      </p:sp>
+      <p:sp>
+        <p:nvSpPr>
+          <p:cNvPr id="7" name="TextBox 6"/>
+          <p:cNvSpPr txBox="1"/>
+          <p:nvPr/>
+        </p:nvSpPr>
+        <p:spPr>
+          <a:xfrm>
+            <a:off x="11064240" y="6355080"/>
+            <a:ext cx="548640" cy="228600"/>
+          </a:xfrm>
+          <a:prstGeom prst="rect">
+            <a:avLst/>
+          </a:prstGeom>
+          <a:noFill/>
+        </p:spPr>
+        <p:txBody>
+          <a:bodyPr wrap="none">
+            <a:spAutoFit/>
+          </a:bodyPr>
+          <a:lstStyle/>
+          <a:p>
+            <a:pPr algn="r">
+              <a:defRPr sz="1000">
+                <a:solidFill>
+                  <a:srgbClr val="5D6F88"/>
+                </a:solidFill>
+              </a:defRPr>
+            </a:pPr>
+            <a:r>
+              <a:t>25</a:t>
+            </a:r>
+          </a:p>
+        </p:txBody>
+      </p:sp>
+      <p:sp>
+        <p:nvSpPr>
+          <p:cNvPr id="8" name="Rounded Rectangle 7"/>
+          <p:cNvSpPr/>
+          <p:nvPr>
+            <p:custDataLst>
+              <p:tags r:id="rId1"/>
+            </p:custDataLst>
+          </p:nvPr>
+        </p:nvSpPr>
+        <p:spPr>
+          <a:xfrm>
+            <a:off x="713232" y="1234440"/>
+            <a:ext cx="2240280" cy="868680"/>
+          </a:xfrm>
+          <a:prstGeom prst="roundRect">
+            <a:avLst/>
+          </a:prstGeom>
+          <a:solidFill>
+            <a:srgbClr val="FFFFFF"/>
+          </a:solidFill>
+          <a:ln w="12700">
+            <a:solidFill>
+              <a:srgbClr val="B1C6E0"/>
+            </a:solidFill>
+          </a:ln>
+        </p:spPr>
+        <p:style>
+          <a:lnRef idx="1">
+            <a:schemeClr val="accent1"/>
+          </a:lnRef>
+          <a:fillRef idx="3">
+            <a:schemeClr val="accent1"/>
+          </a:fillRef>
+          <a:effectRef idx="2">
+            <a:schemeClr val="accent1"/>
+          </a:effectRef>
+          <a:fontRef idx="minor">
+            <a:schemeClr val="lt1"/>
+          </a:fontRef>
+        </p:style>
+        <p:txBody>
+          <a:bodyPr rtlCol="0" anchor="ctr"/>
+          <a:lstStyle/>
+          <a:p>
+            <a:pPr algn="ctr"/>
+          </a:p>
+        </p:txBody>
+      </p:sp>
+      <p:sp>
+        <p:nvSpPr>
+          <p:cNvPr id="9" name="TextBox 8"/>
+          <p:cNvSpPr txBox="1"/>
+          <p:nvPr>
+            <p:custDataLst>
+              <p:tags r:id="rId2"/>
+            </p:custDataLst>
+          </p:nvPr>
+        </p:nvSpPr>
+        <p:spPr>
+          <a:xfrm>
+            <a:off x="804672" y="1307592"/>
+            <a:ext cx="2057400" cy="758952"/>
+          </a:xfrm>
+          <a:prstGeom prst="rect">
+            <a:avLst/>
+          </a:prstGeom>
+          <a:noFill/>
+        </p:spPr>
+        <p:txBody>
+          <a:bodyPr wrap="square" anchor="ctr">
+            <a:spAutoFit/>
+          </a:bodyPr>
+          <a:lstStyle/>
+          <a:p>
+            <a:pPr algn="ctr">
+              <a:defRPr sz="1400" b="1">
+                <a:solidFill>
+                  <a:srgbClr val="0F2344"/>
+                </a:solidFill>
+                <a:latin typeface="微软雅黑" panose="020B0503020204020204" charset="-122"/>
+              </a:defRPr>
+            </a:pPr>
+            <a:r>
+              <a:t>结构化记录数量</a:t>
+            </a:r>
+          </a:p>
+        </p:txBody>
+      </p:sp>
+      <p:sp>
+        <p:nvSpPr>
+          <p:cNvPr id="10" name="TextBox 9"/>
+          <p:cNvSpPr txBox="1"/>
+          <p:nvPr>
+            <p:custDataLst>
+              <p:tags r:id="rId3"/>
+            </p:custDataLst>
+          </p:nvPr>
+        </p:nvSpPr>
+        <p:spPr>
+          <a:xfrm>
+            <a:off x="621792" y="1741678"/>
+            <a:ext cx="2240280" cy="320040"/>
+          </a:xfrm>
+          <a:prstGeom prst="rect">
+            <a:avLst/>
+          </a:prstGeom>
+          <a:noFill/>
+        </p:spPr>
+        <p:txBody>
+          <a:bodyPr wrap="square">
+            <a:spAutoFit/>
+          </a:bodyPr>
+          <a:lstStyle/>
+          <a:p>
+            <a:pPr algn="ctr">
               <a:defRPr sz="2400" b="1">
                 <a:solidFill>
                   <a:srgbClr val="277DF5"/>
                 </a:solidFill>
-                <a:latin typeface="Microsoft YaHei"/>
+                <a:latin typeface="微软雅黑" panose="020B0503020204020204" charset="-122"/>
+              </a:defRPr>
+            </a:pPr>
+            <a:r>
+              <a:t>XXX</a:t>
+            </a:r>
+          </a:p>
+        </p:txBody>
+      </p:sp>
+      <p:sp>
+        <p:nvSpPr>
+          <p:cNvPr id="11" name="Rounded Rectangle 10"/>
+          <p:cNvSpPr/>
+          <p:nvPr>
+            <p:custDataLst>
+              <p:tags r:id="rId4"/>
+            </p:custDataLst>
+          </p:nvPr>
+        </p:nvSpPr>
+        <p:spPr>
+          <a:xfrm>
+            <a:off x="3547872" y="1234440"/>
+            <a:ext cx="2240280" cy="868680"/>
+          </a:xfrm>
+          <a:prstGeom prst="roundRect">
+            <a:avLst/>
+          </a:prstGeom>
+          <a:solidFill>
+            <a:srgbClr val="FFFFFF"/>
+          </a:solidFill>
+          <a:ln w="12700">
+            <a:solidFill>
+              <a:srgbClr val="B1C6E0"/>
+            </a:solidFill>
+          </a:ln>
+        </p:spPr>
+        <p:style>
+          <a:lnRef idx="1">
+            <a:schemeClr val="accent1"/>
+          </a:lnRef>
+          <a:fillRef idx="3">
+            <a:schemeClr val="accent1"/>
+          </a:fillRef>
+          <a:effectRef idx="2">
+            <a:schemeClr val="accent1"/>
+          </a:effectRef>
+          <a:fontRef idx="minor">
+            <a:schemeClr val="lt1"/>
+          </a:fontRef>
+        </p:style>
+        <p:txBody>
+          <a:bodyPr rtlCol="0" anchor="ctr"/>
+          <a:lstStyle/>
+          <a:p>
+            <a:pPr algn="ctr"/>
+          </a:p>
+        </p:txBody>
+      </p:sp>
+      <p:sp>
+        <p:nvSpPr>
+          <p:cNvPr id="12" name="TextBox 11"/>
+          <p:cNvSpPr txBox="1"/>
+          <p:nvPr>
+            <p:custDataLst>
+              <p:tags r:id="rId5"/>
+            </p:custDataLst>
+          </p:nvPr>
+        </p:nvSpPr>
+        <p:spPr>
+          <a:xfrm>
+            <a:off x="3639312" y="1307592"/>
+            <a:ext cx="2057400" cy="758952"/>
+          </a:xfrm>
+          <a:prstGeom prst="rect">
+            <a:avLst/>
+          </a:prstGeom>
+          <a:noFill/>
+        </p:spPr>
+        <p:txBody>
+          <a:bodyPr wrap="square" anchor="ctr">
+            <a:spAutoFit/>
+          </a:bodyPr>
+          <a:lstStyle/>
+          <a:p>
+            <a:pPr algn="ctr">
+              <a:defRPr sz="1400" b="1">
+                <a:solidFill>
+                  <a:srgbClr val="0F2344"/>
+                </a:solidFill>
+                <a:latin typeface="微软雅黑" panose="020B0503020204020204" charset="-122"/>
+              </a:defRPr>
+            </a:pPr>
+            <a:r>
+              <a:t>本体类数量</a:t>
+            </a:r>
+          </a:p>
+        </p:txBody>
+      </p:sp>
+      <p:sp>
+        <p:nvSpPr>
+          <p:cNvPr id="13" name="TextBox 12"/>
+          <p:cNvSpPr txBox="1"/>
+          <p:nvPr>
+            <p:custDataLst>
+              <p:tags r:id="rId6"/>
+            </p:custDataLst>
+          </p:nvPr>
+        </p:nvSpPr>
+        <p:spPr>
+          <a:xfrm>
+            <a:off x="3547872" y="1664208"/>
+            <a:ext cx="2240280" cy="320040"/>
+          </a:xfrm>
+          <a:prstGeom prst="rect">
+            <a:avLst/>
+          </a:prstGeom>
+          <a:noFill/>
+        </p:spPr>
+        <p:txBody>
+          <a:bodyPr wrap="square">
+            <a:spAutoFit/>
+          </a:bodyPr>
+          <a:lstStyle/>
+          <a:p>
+            <a:pPr algn="ctr">
+              <a:defRPr sz="2400" b="1">
+                <a:solidFill>
+                  <a:srgbClr val="277DF5"/>
+                </a:solidFill>
+                <a:latin typeface="微软雅黑" panose="020B0503020204020204" charset="-122"/>
+              </a:defRPr>
+            </a:pPr>
+            <a:r>
+              <a:t>XXX</a:t>
+            </a:r>
+          </a:p>
+        </p:txBody>
+      </p:sp>
+      <p:sp>
+        <p:nvSpPr>
+          <p:cNvPr id="14" name="Rounded Rectangle 13"/>
+          <p:cNvSpPr/>
+          <p:nvPr>
+            <p:custDataLst>
+              <p:tags r:id="rId7"/>
+            </p:custDataLst>
+          </p:nvPr>
+        </p:nvSpPr>
+        <p:spPr>
+          <a:xfrm>
+            <a:off x="6382512" y="1234440"/>
+            <a:ext cx="2240280" cy="868680"/>
+          </a:xfrm>
+          <a:prstGeom prst="roundRect">
+            <a:avLst/>
+          </a:prstGeom>
+          <a:solidFill>
+            <a:srgbClr val="FFFFFF"/>
+          </a:solidFill>
+          <a:ln w="12700">
+            <a:solidFill>
+              <a:srgbClr val="B1C6E0"/>
+            </a:solidFill>
+          </a:ln>
+        </p:spPr>
+        <p:style>
+          <a:lnRef idx="1">
+            <a:schemeClr val="accent1"/>
+          </a:lnRef>
+          <a:fillRef idx="3">
+            <a:schemeClr val="accent1"/>
+          </a:fillRef>
+          <a:effectRef idx="2">
+            <a:schemeClr val="accent1"/>
+          </a:effectRef>
+          <a:fontRef idx="minor">
+            <a:schemeClr val="lt1"/>
+          </a:fontRef>
+        </p:style>
+        <p:txBody>
+          <a:bodyPr rtlCol="0" anchor="ctr"/>
+          <a:lstStyle/>
+          <a:p>
+            <a:pPr algn="ctr"/>
+          </a:p>
+        </p:txBody>
+      </p:sp>
+      <p:sp>
+        <p:nvSpPr>
+          <p:cNvPr id="15" name="TextBox 14"/>
+          <p:cNvSpPr txBox="1"/>
+          <p:nvPr>
+            <p:custDataLst>
+              <p:tags r:id="rId8"/>
+            </p:custDataLst>
+          </p:nvPr>
+        </p:nvSpPr>
+        <p:spPr>
+          <a:xfrm>
+            <a:off x="6473952" y="1307592"/>
+            <a:ext cx="2057400" cy="758952"/>
+          </a:xfrm>
+          <a:prstGeom prst="rect">
+            <a:avLst/>
+          </a:prstGeom>
+          <a:noFill/>
+        </p:spPr>
+        <p:txBody>
+          <a:bodyPr wrap="square" anchor="ctr">
+            <a:spAutoFit/>
+          </a:bodyPr>
+          <a:lstStyle/>
+          <a:p>
+            <a:pPr algn="ctr">
+              <a:defRPr sz="1400" b="1">
+                <a:solidFill>
+                  <a:srgbClr val="0F2344"/>
+                </a:solidFill>
+                <a:latin typeface="微软雅黑" panose="020B0503020204020204" charset="-122"/>
+              </a:defRPr>
+            </a:pPr>
+            <a:r>
+              <a:t>数据属性数量</a:t>
+            </a:r>
+          </a:p>
+        </p:txBody>
+      </p:sp>
+      <p:sp>
+        <p:nvSpPr>
+          <p:cNvPr id="16" name="TextBox 15"/>
+          <p:cNvSpPr txBox="1"/>
+          <p:nvPr>
+            <p:custDataLst>
+              <p:tags r:id="rId9"/>
+            </p:custDataLst>
+          </p:nvPr>
+        </p:nvSpPr>
+        <p:spPr>
+          <a:xfrm>
+            <a:off x="6382512" y="1664208"/>
+            <a:ext cx="2240280" cy="320040"/>
+          </a:xfrm>
+          <a:prstGeom prst="rect">
+            <a:avLst/>
+          </a:prstGeom>
+          <a:noFill/>
+        </p:spPr>
+        <p:txBody>
+          <a:bodyPr wrap="square">
+            <a:spAutoFit/>
+          </a:bodyPr>
+          <a:lstStyle/>
+          <a:p>
+            <a:pPr algn="ctr">
+              <a:defRPr sz="2400" b="1">
+                <a:solidFill>
+                  <a:srgbClr val="277DF5"/>
+                </a:solidFill>
+                <a:latin typeface="微软雅黑" panose="020B0503020204020204" charset="-122"/>
+              </a:defRPr>
+            </a:pPr>
+            <a:r>
+              <a:t>XXX</a:t>
+            </a:r>
+          </a:p>
+        </p:txBody>
+      </p:sp>
+      <p:sp>
+        <p:nvSpPr>
+          <p:cNvPr id="17" name="Rounded Rectangle 16"/>
+          <p:cNvSpPr/>
+          <p:nvPr>
+            <p:custDataLst>
+              <p:tags r:id="rId10"/>
+            </p:custDataLst>
+          </p:nvPr>
+        </p:nvSpPr>
+        <p:spPr>
+          <a:xfrm>
+            <a:off x="9217152" y="1234440"/>
+            <a:ext cx="2240280" cy="868680"/>
+          </a:xfrm>
+          <a:prstGeom prst="roundRect">
+            <a:avLst/>
+          </a:prstGeom>
+          <a:solidFill>
+            <a:srgbClr val="FFFFFF"/>
+          </a:solidFill>
+          <a:ln w="12700">
+            <a:solidFill>
+              <a:srgbClr val="B1C6E0"/>
+            </a:solidFill>
+          </a:ln>
+        </p:spPr>
+        <p:style>
+          <a:lnRef idx="1">
+            <a:schemeClr val="accent1"/>
+          </a:lnRef>
+          <a:fillRef idx="3">
+            <a:schemeClr val="accent1"/>
+          </a:fillRef>
+          <a:effectRef idx="2">
+            <a:schemeClr val="accent1"/>
+          </a:effectRef>
+          <a:fontRef idx="minor">
+            <a:schemeClr val="lt1"/>
+          </a:fontRef>
+        </p:style>
+        <p:txBody>
+          <a:bodyPr rtlCol="0" anchor="ctr"/>
+          <a:lstStyle/>
+          <a:p>
+            <a:pPr algn="ctr"/>
+          </a:p>
+        </p:txBody>
+      </p:sp>
+      <p:sp>
+        <p:nvSpPr>
+          <p:cNvPr id="18" name="TextBox 17"/>
+          <p:cNvSpPr txBox="1"/>
+          <p:nvPr>
+            <p:custDataLst>
+              <p:tags r:id="rId11"/>
+            </p:custDataLst>
+          </p:nvPr>
+        </p:nvSpPr>
+        <p:spPr>
+          <a:xfrm>
+            <a:off x="9308592" y="1307592"/>
+            <a:ext cx="2057400" cy="758952"/>
+          </a:xfrm>
+          <a:prstGeom prst="rect">
+            <a:avLst/>
+          </a:prstGeom>
+          <a:noFill/>
+        </p:spPr>
+        <p:txBody>
+          <a:bodyPr wrap="square" anchor="ctr">
+            <a:spAutoFit/>
+          </a:bodyPr>
+          <a:lstStyle/>
+          <a:p>
+            <a:pPr algn="ctr">
+              <a:defRPr sz="1400" b="1">
+                <a:solidFill>
+                  <a:srgbClr val="0F2344"/>
+                </a:solidFill>
+                <a:latin typeface="微软雅黑" panose="020B0503020204020204" charset="-122"/>
+              </a:defRPr>
+            </a:pPr>
+            <a:r>
+              <a:t>对象关系数量</a:t>
+            </a:r>
+          </a:p>
+        </p:txBody>
+      </p:sp>
+      <p:sp>
+        <p:nvSpPr>
+          <p:cNvPr id="19" name="TextBox 18"/>
+          <p:cNvSpPr txBox="1"/>
+          <p:nvPr>
+            <p:custDataLst>
+              <p:tags r:id="rId12"/>
+            </p:custDataLst>
+          </p:nvPr>
+        </p:nvSpPr>
+        <p:spPr>
+          <a:xfrm>
+            <a:off x="9217152" y="1664208"/>
+            <a:ext cx="2240280" cy="320040"/>
+          </a:xfrm>
+          <a:prstGeom prst="rect">
+            <a:avLst/>
+          </a:prstGeom>
+          <a:noFill/>
+        </p:spPr>
+        <p:txBody>
+          <a:bodyPr wrap="square">
+            <a:spAutoFit/>
+          </a:bodyPr>
+          <a:lstStyle/>
+          <a:p>
+            <a:pPr algn="ctr">
+              <a:defRPr sz="2400" b="1">
+                <a:solidFill>
+                  <a:srgbClr val="277DF5"/>
+                </a:solidFill>
+                <a:latin typeface="微软雅黑" panose="020B0503020204020204" charset="-122"/>
               </a:defRPr>
             </a:pPr>
             <a:r>
@@ -18730,7 +22379,7 @@
                           <a:solidFill>
                             <a:srgbClr val="FFFFFF"/>
                           </a:solidFill>
-                          <a:latin typeface="Microsoft YaHei"/>
+                          <a:latin typeface="微软雅黑" panose="020B0503020204020204" charset="-122"/>
                         </a:defRPr>
                       </a:pPr>
                       <a:r>
@@ -18754,7 +22403,7 @@
                           <a:solidFill>
                             <a:srgbClr val="FFFFFF"/>
                           </a:solidFill>
-                          <a:latin typeface="Microsoft YaHei"/>
+                          <a:latin typeface="微软雅黑" panose="020B0503020204020204" charset="-122"/>
                         </a:defRPr>
                       </a:pPr>
                       <a:r>
@@ -18780,7 +22429,7 @@
                           <a:solidFill>
                             <a:srgbClr val="1F2A44"/>
                           </a:solidFill>
-                          <a:latin typeface="Microsoft YaHei"/>
+                          <a:latin typeface="微软雅黑" panose="020B0503020204020204" charset="-122"/>
                         </a:defRPr>
                       </a:pPr>
                       <a:r>
@@ -18804,7 +22453,7 @@
                           <a:solidFill>
                             <a:srgbClr val="1F2A44"/>
                           </a:solidFill>
-                          <a:latin typeface="Microsoft YaHei"/>
+                          <a:latin typeface="微软雅黑" panose="020B0503020204020204" charset="-122"/>
                         </a:defRPr>
                       </a:pPr>
                       <a:r>
@@ -18830,7 +22479,7 @@
                           <a:solidFill>
                             <a:srgbClr val="1F2A44"/>
                           </a:solidFill>
-                          <a:latin typeface="Microsoft YaHei"/>
+                          <a:latin typeface="微软雅黑" panose="020B0503020204020204" charset="-122"/>
                         </a:defRPr>
                       </a:pPr>
                       <a:r>
@@ -18854,7 +22503,7 @@
                           <a:solidFill>
                             <a:srgbClr val="1F2A44"/>
                           </a:solidFill>
-                          <a:latin typeface="Microsoft YaHei"/>
+                          <a:latin typeface="微软雅黑" panose="020B0503020204020204" charset="-122"/>
                         </a:defRPr>
                       </a:pPr>
                       <a:r>
@@ -18880,7 +22529,7 @@
                           <a:solidFill>
                             <a:srgbClr val="1F2A44"/>
                           </a:solidFill>
-                          <a:latin typeface="Microsoft YaHei"/>
+                          <a:latin typeface="微软雅黑" panose="020B0503020204020204" charset="-122"/>
                         </a:defRPr>
                       </a:pPr>
                       <a:r>
@@ -18904,7 +22553,7 @@
                           <a:solidFill>
                             <a:srgbClr val="1F2A44"/>
                           </a:solidFill>
-                          <a:latin typeface="Microsoft YaHei"/>
+                          <a:latin typeface="微软雅黑" panose="020B0503020204020204" charset="-122"/>
                         </a:defRPr>
                       </a:pPr>
                       <a:r>
@@ -18930,7 +22579,7 @@
                           <a:solidFill>
                             <a:srgbClr val="1F2A44"/>
                           </a:solidFill>
-                          <a:latin typeface="Microsoft YaHei"/>
+                          <a:latin typeface="微软雅黑" panose="020B0503020204020204" charset="-122"/>
                         </a:defRPr>
                       </a:pPr>
                       <a:r>
@@ -18954,7 +22603,7 @@
                           <a:solidFill>
                             <a:srgbClr val="1F2A44"/>
                           </a:solidFill>
-                          <a:latin typeface="Microsoft YaHei"/>
+                          <a:latin typeface="微软雅黑" panose="020B0503020204020204" charset="-122"/>
                         </a:defRPr>
                       </a:pPr>
                       <a:r>
@@ -18980,7 +22629,7 @@
                           <a:solidFill>
                             <a:srgbClr val="1F2A44"/>
                           </a:solidFill>
-                          <a:latin typeface="Microsoft YaHei"/>
+                          <a:latin typeface="微软雅黑" panose="020B0503020204020204" charset="-122"/>
                         </a:defRPr>
                       </a:pPr>
                       <a:r>
@@ -19004,7 +22653,7 @@
                           <a:solidFill>
                             <a:srgbClr val="1F2A44"/>
                           </a:solidFill>
-                          <a:latin typeface="Microsoft YaHei"/>
+                          <a:latin typeface="微软雅黑" panose="020B0503020204020204" charset="-122"/>
                         </a:defRPr>
                       </a:pPr>
                       <a:r>
@@ -19030,7 +22679,7 @@
                           <a:solidFill>
                             <a:srgbClr val="1F2A44"/>
                           </a:solidFill>
-                          <a:latin typeface="Microsoft YaHei"/>
+                          <a:latin typeface="微软雅黑" panose="020B0503020204020204" charset="-122"/>
                         </a:defRPr>
                       </a:pPr>
                       <a:r>
@@ -19054,7 +22703,7 @@
                           <a:solidFill>
                             <a:srgbClr val="1F2A44"/>
                           </a:solidFill>
-                          <a:latin typeface="Microsoft YaHei"/>
+                          <a:latin typeface="微软雅黑" panose="020B0503020204020204" charset="-122"/>
                         </a:defRPr>
                       </a:pPr>
                       <a:r>
@@ -19080,7 +22729,7 @@
                           <a:solidFill>
                             <a:srgbClr val="1F2A44"/>
                           </a:solidFill>
-                          <a:latin typeface="Microsoft YaHei"/>
+                          <a:latin typeface="微软雅黑" panose="020B0503020204020204" charset="-122"/>
                         </a:defRPr>
                       </a:pPr>
                       <a:r>
@@ -19104,7 +22753,7 @@
                           <a:solidFill>
                             <a:srgbClr val="1F2A44"/>
                           </a:solidFill>
-                          <a:latin typeface="Microsoft YaHei"/>
+                          <a:latin typeface="微软雅黑" panose="020B0503020204020204" charset="-122"/>
                         </a:defRPr>
                       </a:pPr>
                       <a:r>
@@ -19195,7 +22844,7 @@
                 <a:solidFill>
                   <a:srgbClr val="0F2344"/>
                 </a:solidFill>
-                <a:latin typeface="Microsoft YaHei"/>
+                <a:latin typeface="微软雅黑" panose="020B0503020204020204" charset="-122"/>
               </a:defRPr>
             </a:pPr>
             <a:r>
@@ -19208,7 +22857,7 @@
                 <a:solidFill>
                   <a:srgbClr val="5D6F88"/>
                 </a:solidFill>
-                <a:latin typeface="Microsoft YaHei"/>
+                <a:latin typeface="微软雅黑" panose="020B0503020204020204" charset="-122"/>
               </a:defRPr>
             </a:pPr>
             <a:r>
@@ -19289,7 +22938,7 @@
                 <a:solidFill>
                   <a:srgbClr val="0F2344"/>
                 </a:solidFill>
-                <a:latin typeface="Microsoft YaHei"/>
+                <a:latin typeface="微软雅黑" panose="020B0503020204020204" charset="-122"/>
               </a:defRPr>
             </a:pPr>
           </a:p>
@@ -19322,7 +22971,7 @@
                 <a:solidFill>
                   <a:srgbClr val="1C4B7D"/>
                 </a:solidFill>
-                <a:latin typeface="Consolas"/>
+                <a:latin typeface="Consolas" panose="020B0609020204030204"/>
               </a:defRPr>
             </a:pPr>
             <a:r>
@@ -19374,7 +23023,7 @@
                 <a:solidFill>
                   <a:srgbClr val="5D6F88"/>
                 </a:solidFill>
-                <a:latin typeface="Microsoft YaHei"/>
+                <a:latin typeface="微软雅黑" panose="020B0503020204020204" charset="-122"/>
               </a:defRPr>
             </a:pPr>
             <a:r>
@@ -19391,8 +23040,8 @@
 </p:sld>
 </file>
 
-<file path=ppt/slides/slide26.xml><?xml version="1.0" encoding="utf-8"?>
-<p:sld xmlns:a="http://schemas.openxmlformats.org/drawingml/2006/main" xmlns:p="http://schemas.openxmlformats.org/presentationml/2006/main" xmlns:r="http://schemas.openxmlformats.org/officeDocument/2006/relationships">
+<file path=ppt/slides/slide29.xml><?xml version="1.0" encoding="utf-8"?>
+<p:sld xmlns:a="http://schemas.openxmlformats.org/drawingml/2006/main" xmlns:r="http://schemas.openxmlformats.org/officeDocument/2006/relationships" xmlns:p="http://schemas.openxmlformats.org/presentationml/2006/main">
   <p:cSld>
     <p:spTree>
       <p:nvGrpSpPr>
@@ -19557,7 +23206,7 @@
                 <a:solidFill>
                   <a:srgbClr val="0F2344"/>
                 </a:solidFill>
-                <a:latin typeface="Microsoft YaHei"/>
+                <a:latin typeface="微软雅黑" panose="020B0503020204020204" charset="-122"/>
               </a:defRPr>
             </a:pPr>
             <a:r>
@@ -19716,7 +23365,7 @@
                 <a:solidFill>
                   <a:srgbClr val="0F2344"/>
                 </a:solidFill>
-                <a:latin typeface="Microsoft YaHei"/>
+                <a:latin typeface="微软雅黑" panose="020B0503020204020204" charset="-122"/>
               </a:defRPr>
             </a:pPr>
             <a:r>
@@ -19729,7 +23378,7 @@
                 <a:solidFill>
                   <a:srgbClr val="5D6F88"/>
                 </a:solidFill>
-                <a:latin typeface="Microsoft YaHei"/>
+                <a:latin typeface="微软雅黑" panose="020B0503020204020204" charset="-122"/>
               </a:defRPr>
             </a:pPr>
             <a:r>
@@ -19810,7 +23459,7 @@
                 <a:solidFill>
                   <a:srgbClr val="5D6F88"/>
                 </a:solidFill>
-                <a:latin typeface="Microsoft YaHei"/>
+                <a:latin typeface="微软雅黑" panose="020B0503020204020204" charset="-122"/>
               </a:defRPr>
             </a:pPr>
             <a:r>
@@ -19846,7 +23495,7 @@
                 <a:solidFill>
                   <a:srgbClr val="1F2A44"/>
                 </a:solidFill>
-                <a:latin typeface="Microsoft YaHei"/>
+                <a:latin typeface="微软雅黑" panose="020B0503020204020204" charset="-122"/>
               </a:defRPr>
             </a:pPr>
             <a:r>
@@ -19935,7 +23584,7 @@
                 <a:solidFill>
                   <a:srgbClr val="0F2344"/>
                 </a:solidFill>
-                <a:latin typeface="Microsoft YaHei"/>
+                <a:latin typeface="微软雅黑" panose="020B0503020204020204" charset="-122"/>
               </a:defRPr>
             </a:pPr>
           </a:p>
@@ -19968,7 +23617,7 @@
                 <a:solidFill>
                   <a:srgbClr val="1C4B7D"/>
                 </a:solidFill>
-                <a:latin typeface="Consolas"/>
+                <a:latin typeface="Consolas" panose="020B0609020204030204"/>
               </a:defRPr>
             </a:pPr>
             <a:r>
@@ -20059,7 +23708,7 @@
                 <a:solidFill>
                   <a:srgbClr val="0F2344"/>
                 </a:solidFill>
-                <a:latin typeface="Microsoft YaHei"/>
+                <a:latin typeface="微软雅黑" panose="020B0503020204020204" charset="-122"/>
               </a:defRPr>
             </a:pPr>
             <a:r>
@@ -20072,7 +23721,7 @@
                 <a:solidFill>
                   <a:srgbClr val="5D6F88"/>
                 </a:solidFill>
-                <a:latin typeface="Microsoft YaHei"/>
+                <a:latin typeface="微软雅黑" panose="020B0503020204020204" charset="-122"/>
               </a:defRPr>
             </a:pPr>
             <a:r>
@@ -20153,7 +23802,7 @@
                 <a:solidFill>
                   <a:srgbClr val="0F2344"/>
                 </a:solidFill>
-                <a:latin typeface="Microsoft YaHei"/>
+                <a:latin typeface="微软雅黑" panose="020B0503020204020204" charset="-122"/>
               </a:defRPr>
             </a:pPr>
             <a:r>
@@ -20269,7 +23918,7 @@
                 <a:solidFill>
                   <a:srgbClr val="0F2344"/>
                 </a:solidFill>
-                <a:latin typeface="Microsoft YaHei"/>
+                <a:latin typeface="微软雅黑" panose="020B0503020204020204" charset="-122"/>
               </a:defRPr>
             </a:pPr>
             <a:r>
@@ -20385,7 +24034,7 @@
                 <a:solidFill>
                   <a:srgbClr val="0F2344"/>
                 </a:solidFill>
-                <a:latin typeface="Microsoft YaHei"/>
+                <a:latin typeface="微软雅黑" panose="020B0503020204020204" charset="-122"/>
               </a:defRPr>
             </a:pPr>
             <a:r>
@@ -20501,7 +24150,7 @@
                 <a:solidFill>
                   <a:srgbClr val="0F2344"/>
                 </a:solidFill>
-                <a:latin typeface="Microsoft YaHei"/>
+                <a:latin typeface="微软雅黑" panose="020B0503020204020204" charset="-122"/>
               </a:defRPr>
             </a:pPr>
             <a:r>
@@ -20545,7 +24194,7 @@
                           <a:solidFill>
                             <a:srgbClr val="FFFFFF"/>
                           </a:solidFill>
-                          <a:latin typeface="Microsoft YaHei"/>
+                          <a:latin typeface="微软雅黑" panose="020B0503020204020204" charset="-122"/>
                         </a:defRPr>
                       </a:pPr>
                       <a:r>
@@ -20569,7 +24218,7 @@
                           <a:solidFill>
                             <a:srgbClr val="FFFFFF"/>
                           </a:solidFill>
-                          <a:latin typeface="Microsoft YaHei"/>
+                          <a:latin typeface="微软雅黑" panose="020B0503020204020204" charset="-122"/>
                         </a:defRPr>
                       </a:pPr>
                       <a:r>
@@ -20593,7 +24242,7 @@
                           <a:solidFill>
                             <a:srgbClr val="FFFFFF"/>
                           </a:solidFill>
-                          <a:latin typeface="Microsoft YaHei"/>
+                          <a:latin typeface="微软雅黑" panose="020B0503020204020204" charset="-122"/>
                         </a:defRPr>
                       </a:pPr>
                       <a:r>
@@ -20617,7 +24266,7 @@
                           <a:solidFill>
                             <a:srgbClr val="FFFFFF"/>
                           </a:solidFill>
-                          <a:latin typeface="Microsoft YaHei"/>
+                          <a:latin typeface="微软雅黑" panose="020B0503020204020204" charset="-122"/>
                         </a:defRPr>
                       </a:pPr>
                       <a:r>
@@ -20643,7 +24292,7 @@
                           <a:solidFill>
                             <a:srgbClr val="1F2A44"/>
                           </a:solidFill>
-                          <a:latin typeface="Microsoft YaHei"/>
+                          <a:latin typeface="微软雅黑" panose="020B0503020204020204" charset="-122"/>
                         </a:defRPr>
                       </a:pPr>
                       <a:r>
@@ -20667,7 +24316,7 @@
                           <a:solidFill>
                             <a:srgbClr val="1F2A44"/>
                           </a:solidFill>
-                          <a:latin typeface="Microsoft YaHei"/>
+                          <a:latin typeface="微软雅黑" panose="020B0503020204020204" charset="-122"/>
                         </a:defRPr>
                       </a:pPr>
                       <a:r>
@@ -20691,7 +24340,7 @@
                           <a:solidFill>
                             <a:srgbClr val="1F2A44"/>
                           </a:solidFill>
-                          <a:latin typeface="Microsoft YaHei"/>
+                          <a:latin typeface="微软雅黑" panose="020B0503020204020204" charset="-122"/>
                         </a:defRPr>
                       </a:pPr>
                       <a:r>
@@ -20715,7 +24364,7 @@
                           <a:solidFill>
                             <a:srgbClr val="1F2A44"/>
                           </a:solidFill>
-                          <a:latin typeface="Microsoft YaHei"/>
+                          <a:latin typeface="微软雅黑" panose="020B0503020204020204" charset="-122"/>
                         </a:defRPr>
                       </a:pPr>
                       <a:r>
@@ -20741,7 +24390,7 @@
                           <a:solidFill>
                             <a:srgbClr val="1F2A44"/>
                           </a:solidFill>
-                          <a:latin typeface="Microsoft YaHei"/>
+                          <a:latin typeface="微软雅黑" panose="020B0503020204020204" charset="-122"/>
                         </a:defRPr>
                       </a:pPr>
                       <a:r>
@@ -20765,7 +24414,7 @@
                           <a:solidFill>
                             <a:srgbClr val="1F2A44"/>
                           </a:solidFill>
-                          <a:latin typeface="Microsoft YaHei"/>
+                          <a:latin typeface="微软雅黑" panose="020B0503020204020204" charset="-122"/>
                         </a:defRPr>
                       </a:pPr>
                       <a:r>
@@ -20789,7 +24438,7 @@
                           <a:solidFill>
                             <a:srgbClr val="1F2A44"/>
                           </a:solidFill>
-                          <a:latin typeface="Microsoft YaHei"/>
+                          <a:latin typeface="微软雅黑" panose="020B0503020204020204" charset="-122"/>
                         </a:defRPr>
                       </a:pPr>
                       <a:r>
@@ -20813,7 +24462,7 @@
                           <a:solidFill>
                             <a:srgbClr val="1F2A44"/>
                           </a:solidFill>
-                          <a:latin typeface="Microsoft YaHei"/>
+                          <a:latin typeface="微软雅黑" panose="020B0503020204020204" charset="-122"/>
                         </a:defRPr>
                       </a:pPr>
                       <a:r>
@@ -20839,7 +24488,7 @@
                           <a:solidFill>
                             <a:srgbClr val="1F2A44"/>
                           </a:solidFill>
-                          <a:latin typeface="Microsoft YaHei"/>
+                          <a:latin typeface="微软雅黑" panose="020B0503020204020204" charset="-122"/>
                         </a:defRPr>
                       </a:pPr>
                       <a:r>
@@ -20863,7 +24512,7 @@
                           <a:solidFill>
                             <a:srgbClr val="1F2A44"/>
                           </a:solidFill>
-                          <a:latin typeface="Microsoft YaHei"/>
+                          <a:latin typeface="微软雅黑" panose="020B0503020204020204" charset="-122"/>
                         </a:defRPr>
                       </a:pPr>
                       <a:r>
@@ -20887,7 +24536,7 @@
                           <a:solidFill>
                             <a:srgbClr val="1F2A44"/>
                           </a:solidFill>
-                          <a:latin typeface="Microsoft YaHei"/>
+                          <a:latin typeface="微软雅黑" panose="020B0503020204020204" charset="-122"/>
                         </a:defRPr>
                       </a:pPr>
                       <a:r>
@@ -20911,7 +24560,7 @@
                           <a:solidFill>
                             <a:srgbClr val="1F2A44"/>
                           </a:solidFill>
-                          <a:latin typeface="Microsoft YaHei"/>
+                          <a:latin typeface="微软雅黑" panose="020B0503020204020204" charset="-122"/>
                         </a:defRPr>
                       </a:pPr>
                       <a:r>
@@ -20957,7 +24606,7 @@
                 <a:solidFill>
                   <a:srgbClr val="5D6F88"/>
                 </a:solidFill>
-                <a:latin typeface="Microsoft YaHei"/>
+                <a:latin typeface="微软雅黑" panose="020B0503020204020204" charset="-122"/>
               </a:defRPr>
             </a:pPr>
             <a:r>
@@ -21381,7 +25030,11 @@
         <p:nvSpPr>
           <p:cNvPr id="10" name="Rounded Rectangle 9"/>
           <p:cNvSpPr/>
-          <p:nvPr/>
+          <p:nvPr>
+            <p:custDataLst>
+              <p:tags r:id="rId1"/>
+            </p:custDataLst>
+          </p:nvPr>
         </p:nvSpPr>
         <p:spPr>
           <a:xfrm>
@@ -21426,12 +25079,16 @@
         <p:nvSpPr>
           <p:cNvPr id="11" name="TextBox 10"/>
           <p:cNvSpPr txBox="1"/>
-          <p:nvPr/>
-        </p:nvSpPr>
-        <p:spPr>
-          <a:xfrm>
-            <a:off x="7836407" y="1600200"/>
-            <a:ext cx="2752344" cy="585216"/>
+          <p:nvPr>
+            <p:custDataLst>
+              <p:tags r:id="rId2"/>
+            </p:custDataLst>
+          </p:nvPr>
+        </p:nvSpPr>
+        <p:spPr>
+          <a:xfrm>
+            <a:off x="7836407" y="1631823"/>
+            <a:ext cx="2752344" cy="521970"/>
           </a:xfrm>
           <a:prstGeom prst="rect">
             <a:avLst/>
@@ -21453,8 +25110,10 @@
               </a:defRPr>
             </a:pPr>
             <a:r>
+              <a:rPr sz="1600"/>
               <a:t>PDF</a:t>
             </a:r>
+            <a:endParaRPr sz="1600"/>
           </a:p>
           <a:p>
             <a:pPr algn="ctr">
@@ -21466,8 +25125,10 @@
               </a:defRPr>
             </a:pPr>
             <a:r>
+              <a:rPr sz="1200"/>
               <a:t>教育标准文档</a:t>
             </a:r>
+            <a:endParaRPr sz="1200"/>
           </a:p>
         </p:txBody>
       </p:sp>
@@ -21475,7 +25136,11 @@
         <p:nvSpPr>
           <p:cNvPr id="12" name="Rounded Rectangle 11"/>
           <p:cNvSpPr/>
-          <p:nvPr/>
+          <p:nvPr>
+            <p:custDataLst>
+              <p:tags r:id="rId3"/>
+            </p:custDataLst>
+          </p:nvPr>
         </p:nvSpPr>
         <p:spPr>
           <a:xfrm>
@@ -21520,12 +25185,16 @@
         <p:nvSpPr>
           <p:cNvPr id="13" name="TextBox 12"/>
           <p:cNvSpPr txBox="1"/>
-          <p:nvPr/>
-        </p:nvSpPr>
-        <p:spPr>
-          <a:xfrm>
-            <a:off x="7836407" y="2624328"/>
-            <a:ext cx="2752344" cy="585216"/>
+          <p:nvPr>
+            <p:custDataLst>
+              <p:tags r:id="rId4"/>
+            </p:custDataLst>
+          </p:nvPr>
+        </p:nvSpPr>
+        <p:spPr>
+          <a:xfrm>
+            <a:off x="7836407" y="2655951"/>
+            <a:ext cx="2752344" cy="521970"/>
           </a:xfrm>
           <a:prstGeom prst="rect">
             <a:avLst/>
@@ -21547,8 +25216,10 @@
               </a:defRPr>
             </a:pPr>
             <a:r>
+              <a:rPr sz="1600"/>
               <a:t>JSON</a:t>
             </a:r>
+            <a:endParaRPr sz="1600"/>
           </a:p>
           <a:p>
             <a:pPr algn="ctr">
@@ -21560,8 +25231,10 @@
               </a:defRPr>
             </a:pPr>
             <a:r>
+              <a:rPr sz="1200"/>
               <a:t>结构化本体</a:t>
             </a:r>
+            <a:endParaRPr sz="1200"/>
           </a:p>
         </p:txBody>
       </p:sp>
@@ -21569,7 +25242,11 @@
         <p:nvSpPr>
           <p:cNvPr id="14" name="Rounded Rectangle 13"/>
           <p:cNvSpPr/>
-          <p:nvPr/>
+          <p:nvPr>
+            <p:custDataLst>
+              <p:tags r:id="rId5"/>
+            </p:custDataLst>
+          </p:nvPr>
         </p:nvSpPr>
         <p:spPr>
           <a:xfrm>
@@ -21614,12 +25291,16 @@
         <p:nvSpPr>
           <p:cNvPr id="15" name="TextBox 14"/>
           <p:cNvSpPr txBox="1"/>
-          <p:nvPr/>
-        </p:nvSpPr>
-        <p:spPr>
-          <a:xfrm>
-            <a:off x="7836407" y="3648456"/>
-            <a:ext cx="2752344" cy="585216"/>
+          <p:nvPr>
+            <p:custDataLst>
+              <p:tags r:id="rId6"/>
+            </p:custDataLst>
+          </p:nvPr>
+        </p:nvSpPr>
+        <p:spPr>
+          <a:xfrm>
+            <a:off x="7836407" y="3680079"/>
+            <a:ext cx="2752344" cy="521970"/>
           </a:xfrm>
           <a:prstGeom prst="rect">
             <a:avLst/>
@@ -21641,8 +25322,10 @@
               </a:defRPr>
             </a:pPr>
             <a:r>
+              <a:rPr sz="1600"/>
               <a:t>OWL</a:t>
             </a:r>
+            <a:endParaRPr sz="1600"/>
           </a:p>
           <a:p>
             <a:pPr algn="ctr">
@@ -21654,8 +25337,10 @@
               </a:defRPr>
             </a:pPr>
             <a:r>
+              <a:rPr sz="1200"/>
               <a:t>标准导出</a:t>
             </a:r>
+            <a:endParaRPr sz="1200"/>
           </a:p>
         </p:txBody>
       </p:sp>
@@ -22095,7 +25780,11 @@
         <p:nvSpPr>
           <p:cNvPr id="10" name="Rounded Rectangle 9"/>
           <p:cNvSpPr/>
-          <p:nvPr/>
+          <p:nvPr>
+            <p:custDataLst>
+              <p:tags r:id="rId1"/>
+            </p:custDataLst>
+          </p:nvPr>
         </p:nvSpPr>
         <p:spPr>
           <a:xfrm>
@@ -22140,12 +25829,16 @@
         <p:nvSpPr>
           <p:cNvPr id="11" name="TextBox 10"/>
           <p:cNvSpPr txBox="1"/>
-          <p:nvPr/>
-        </p:nvSpPr>
-        <p:spPr>
-          <a:xfrm>
-            <a:off x="7836407" y="1600200"/>
-            <a:ext cx="2752344" cy="585216"/>
+          <p:nvPr>
+            <p:custDataLst>
+              <p:tags r:id="rId2"/>
+            </p:custDataLst>
+          </p:nvPr>
+        </p:nvSpPr>
+        <p:spPr>
+          <a:xfrm>
+            <a:off x="7836407" y="1631823"/>
+            <a:ext cx="2752344" cy="521970"/>
           </a:xfrm>
           <a:prstGeom prst="rect">
             <a:avLst/>
@@ -22167,8 +25860,10 @@
               </a:defRPr>
             </a:pPr>
             <a:r>
+              <a:rPr sz="1600"/>
               <a:t>PDF</a:t>
             </a:r>
+            <a:endParaRPr sz="1600"/>
           </a:p>
           <a:p>
             <a:pPr algn="ctr">
@@ -22180,8 +25875,10 @@
               </a:defRPr>
             </a:pPr>
             <a:r>
+              <a:rPr sz="1200"/>
               <a:t>教育标准文档</a:t>
             </a:r>
+            <a:endParaRPr sz="1200"/>
           </a:p>
         </p:txBody>
       </p:sp>
@@ -22189,7 +25886,11 @@
         <p:nvSpPr>
           <p:cNvPr id="12" name="Rounded Rectangle 11"/>
           <p:cNvSpPr/>
-          <p:nvPr/>
+          <p:nvPr>
+            <p:custDataLst>
+              <p:tags r:id="rId3"/>
+            </p:custDataLst>
+          </p:nvPr>
         </p:nvSpPr>
         <p:spPr>
           <a:xfrm>
@@ -22234,12 +25935,16 @@
         <p:nvSpPr>
           <p:cNvPr id="13" name="TextBox 12"/>
           <p:cNvSpPr txBox="1"/>
-          <p:nvPr/>
-        </p:nvSpPr>
-        <p:spPr>
-          <a:xfrm>
-            <a:off x="7836407" y="2624328"/>
-            <a:ext cx="2752344" cy="585216"/>
+          <p:nvPr>
+            <p:custDataLst>
+              <p:tags r:id="rId4"/>
+            </p:custDataLst>
+          </p:nvPr>
+        </p:nvSpPr>
+        <p:spPr>
+          <a:xfrm>
+            <a:off x="7836407" y="2655951"/>
+            <a:ext cx="2752344" cy="521970"/>
           </a:xfrm>
           <a:prstGeom prst="rect">
             <a:avLst/>
@@ -22261,8 +25966,10 @@
               </a:defRPr>
             </a:pPr>
             <a:r>
+              <a:rPr sz="1600"/>
               <a:t>JSON</a:t>
             </a:r>
+            <a:endParaRPr sz="1600"/>
           </a:p>
           <a:p>
             <a:pPr algn="ctr">
@@ -22274,8 +25981,10 @@
               </a:defRPr>
             </a:pPr>
             <a:r>
+              <a:rPr sz="1200"/>
               <a:t>结构化本体</a:t>
             </a:r>
+            <a:endParaRPr sz="1200"/>
           </a:p>
         </p:txBody>
       </p:sp>
@@ -22283,7 +25992,11 @@
         <p:nvSpPr>
           <p:cNvPr id="14" name="Rounded Rectangle 13"/>
           <p:cNvSpPr/>
-          <p:nvPr/>
+          <p:nvPr>
+            <p:custDataLst>
+              <p:tags r:id="rId5"/>
+            </p:custDataLst>
+          </p:nvPr>
         </p:nvSpPr>
         <p:spPr>
           <a:xfrm>
@@ -22328,12 +26041,16 @@
         <p:nvSpPr>
           <p:cNvPr id="15" name="TextBox 14"/>
           <p:cNvSpPr txBox="1"/>
-          <p:nvPr/>
-        </p:nvSpPr>
-        <p:spPr>
-          <a:xfrm>
-            <a:off x="7836407" y="3648456"/>
-            <a:ext cx="2752344" cy="585216"/>
+          <p:nvPr>
+            <p:custDataLst>
+              <p:tags r:id="rId6"/>
+            </p:custDataLst>
+          </p:nvPr>
+        </p:nvSpPr>
+        <p:spPr>
+          <a:xfrm>
+            <a:off x="7836407" y="3680079"/>
+            <a:ext cx="2752344" cy="521970"/>
           </a:xfrm>
           <a:prstGeom prst="rect">
             <a:avLst/>
@@ -22355,8 +26072,10 @@
               </a:defRPr>
             </a:pPr>
             <a:r>
+              <a:rPr sz="1600"/>
               <a:t>OWL</a:t>
             </a:r>
+            <a:endParaRPr sz="1600"/>
           </a:p>
           <a:p>
             <a:pPr algn="ctr">
@@ -22368,8 +26087,10 @@
               </a:defRPr>
             </a:pPr>
             <a:r>
+              <a:rPr sz="1200"/>
               <a:t>标准导出</a:t>
             </a:r>
+            <a:endParaRPr sz="1200"/>
           </a:p>
         </p:txBody>
       </p:sp>
@@ -24114,8 +27835,8 @@
         </p:nvSpPr>
         <p:spPr>
           <a:xfrm>
-            <a:off x="1005840" y="5687568"/>
-            <a:ext cx="10149840" cy="411480"/>
+            <a:off x="2277745" y="5687568"/>
+            <a:ext cx="7606030" cy="337185"/>
           </a:xfrm>
           <a:prstGeom prst="rect">
             <a:avLst/>
@@ -24137,8 +27858,10 @@
               </a:defRPr>
             </a:pPr>
             <a:r>
+              <a:rPr sz="1600"/>
               <a:t>架构重点：前端负责交互，后端编排 PDF、清洗、匹配、对齐、溯源与 OWL 导出</a:t>
             </a:r>
+            <a:endParaRPr sz="1600"/>
           </a:p>
         </p:txBody>
       </p:sp>
@@ -24522,8 +28245,10 @@
               </a:defRPr>
             </a:pPr>
             <a:r>
+              <a:rPr sz="1800"/>
               <a:t>用户登录注册</a:t>
             </a:r>
+            <a:endParaRPr sz="1800"/>
           </a:p>
           <a:p>
             <a:pPr algn="ctr">
@@ -24535,8 +28260,10 @@
               </a:defRPr>
             </a:pPr>
             <a:r>
+              <a:rPr sz="1400"/>
               <a:t>JWT 鉴权</a:t>
             </a:r>
+            <a:endParaRPr sz="1400"/>
           </a:p>
         </p:txBody>
       </p:sp>
@@ -24616,8 +28343,10 @@
               </a:defRPr>
             </a:pPr>
             <a:r>
+              <a:rPr sz="1800"/>
               <a:t>PDF 上传</a:t>
             </a:r>
+            <a:endParaRPr sz="1800"/>
           </a:p>
           <a:p>
             <a:pPr algn="ctr">
@@ -24629,8 +28358,10 @@
               </a:defRPr>
             </a:pPr>
             <a:r>
+              <a:rPr sz="1400"/>
               <a:t>单/批量 PDF</a:t>
             </a:r>
+            <a:endParaRPr sz="1400"/>
           </a:p>
         </p:txBody>
       </p:sp>
@@ -24710,8 +28441,10 @@
               </a:defRPr>
             </a:pPr>
             <a:r>
+              <a:rPr sz="1800"/>
               <a:t>本体生成</a:t>
             </a:r>
+            <a:endParaRPr sz="1800"/>
           </a:p>
           <a:p>
             <a:pPr algn="ctr">
@@ -24723,8 +28456,10 @@
               </a:defRPr>
             </a:pPr>
             <a:r>
+              <a:rPr sz="1400"/>
               <a:t>同步/异步/批量</a:t>
             </a:r>
+            <a:endParaRPr sz="1400"/>
           </a:p>
         </p:txBody>
       </p:sp>
@@ -24804,8 +28539,10 @@
               </a:defRPr>
             </a:pPr>
             <a:r>
+              <a:rPr sz="1800"/>
               <a:t>结果展示</a:t>
             </a:r>
+            <a:endParaRPr sz="1800"/>
           </a:p>
           <a:p>
             <a:pPr algn="ctr">
@@ -24817,8 +28554,10 @@
               </a:defRPr>
             </a:pPr>
             <a:r>
+              <a:rPr sz="1400"/>
               <a:t>类属性关系</a:t>
             </a:r>
+            <a:endParaRPr sz="1400"/>
           </a:p>
         </p:txBody>
       </p:sp>
@@ -24898,8 +28637,10 @@
               </a:defRPr>
             </a:pPr>
             <a:r>
+              <a:rPr sz="1800"/>
               <a:t>OWL 导出</a:t>
             </a:r>
+            <a:endParaRPr sz="1800"/>
           </a:p>
           <a:p>
             <a:pPr algn="ctr">
@@ -24911,8 +28652,10 @@
               </a:defRPr>
             </a:pPr>
             <a:r>
+              <a:rPr sz="1400"/>
               <a:t>文件下载</a:t>
             </a:r>
+            <a:endParaRPr sz="1400"/>
           </a:p>
         </p:txBody>
       </p:sp>
@@ -24992,8 +28735,10 @@
               </a:defRPr>
             </a:pPr>
             <a:r>
+              <a:rPr sz="1800"/>
               <a:t>数据溯源</a:t>
             </a:r>
+            <a:endParaRPr sz="1800"/>
           </a:p>
           <a:p>
             <a:pPr algn="ctr">
@@ -25005,8 +28750,10 @@
               </a:defRPr>
             </a:pPr>
             <a:r>
+              <a:rPr sz="1400"/>
               <a:t>来源检索</a:t>
             </a:r>
+            <a:endParaRPr sz="1400"/>
           </a:p>
         </p:txBody>
       </p:sp>
@@ -25086,8 +28833,10 @@
               </a:defRPr>
             </a:pPr>
             <a:r>
+              <a:rPr sz="1800"/>
               <a:t>日志审计</a:t>
             </a:r>
+            <a:endParaRPr sz="1800"/>
           </a:p>
           <a:p>
             <a:pPr algn="ctr">
@@ -25099,8 +28848,10 @@
               </a:defRPr>
             </a:pPr>
             <a:r>
+              <a:rPr sz="1400"/>
               <a:t>操作记录</a:t>
             </a:r>
+            <a:endParaRPr sz="1400"/>
           </a:p>
         </p:txBody>
       </p:sp>
@@ -25180,8 +28931,10 @@
               </a:defRPr>
             </a:pPr>
             <a:r>
+              <a:rPr sz="1800"/>
               <a:t>管理员用户管理</a:t>
             </a:r>
+            <a:endParaRPr sz="1800"/>
           </a:p>
           <a:p>
             <a:pPr algn="ctr">
@@ -25193,8 +28946,10 @@
               </a:defRPr>
             </a:pPr>
             <a:r>
+              <a:rPr sz="1400"/>
               <a:t>用户信息</a:t>
             </a:r>
+            <a:endParaRPr sz="1400"/>
           </a:p>
         </p:txBody>
       </p:sp>
@@ -26564,8 +30319,8 @@
         </p:nvSpPr>
         <p:spPr>
           <a:xfrm>
-            <a:off x="777240" y="5458968"/>
-            <a:ext cx="10652760" cy="594360"/>
+            <a:off x="612775" y="5400040"/>
+            <a:ext cx="11014710" cy="583565"/>
           </a:xfrm>
           <a:prstGeom prst="rect">
             <a:avLst/>
@@ -26573,7 +30328,7 @@
           <a:noFill/>
         </p:spPr>
         <p:txBody>
-          <a:bodyPr wrap="none">
+          <a:bodyPr wrap="square">
             <a:spAutoFit/>
           </a:bodyPr>
           <a:lstStyle/>
@@ -26587,8 +30342,18 @@
               </a:defRPr>
             </a:pPr>
             <a:r>
-              <a:t>系统采用规则草稿 + 大模型语义增强的混合构建方式：规则保证基础结构稳定，大模型负责语义理解、类属性关系补充和结果增强。</a:t>
-            </a:r>
+              <a:rPr sz="1600" b="0"/>
+              <a:t>系统采用</a:t>
+            </a:r>
+            <a:r>
+              <a:rPr sz="1600"/>
+              <a:t>规则草稿 + 大模型语义增强</a:t>
+            </a:r>
+            <a:r>
+              <a:rPr sz="1600" b="0"/>
+              <a:t>的混合构建方式：规则保证基础结构稳定，大模型负责语义理解、类属性关系补充和结果增强。</a:t>
+            </a:r>
+            <a:endParaRPr sz="1600" b="0"/>
           </a:p>
         </p:txBody>
       </p:sp>
@@ -28527,6 +32292,222 @@
     <a:masterClrMapping/>
   </p:clrMapOvr>
 </p:sld>
+</file>
+
+<file path=ppt/tags/tag1.xml><?xml version="1.0" encoding="utf-8"?>
+<p:tagLst xmlns:p="http://schemas.openxmlformats.org/presentationml/2006/main">
+  <p:tag name="KSO_WM_DIAGRAM_VIRTUALLY_FRAME" val="{&quot;height&quot;:217.44,&quot;left&quot;:608.3999212598426,&quot;top&quot;:118.8,&quot;width&quot;:233.99999999999991}"/>
+</p:tagLst>
+</file>
+
+<file path=ppt/tags/tag10.xml><?xml version="1.0" encoding="utf-8"?>
+<p:tagLst xmlns:p="http://schemas.openxmlformats.org/presentationml/2006/main">
+  <p:tag name="KSO_WM_DIAGRAM_VIRTUALLY_FRAME" val="{&quot;height&quot;:217.44,&quot;left&quot;:608.3999212598426,&quot;top&quot;:118.8,&quot;width&quot;:233.99999999999991}"/>
+</p:tagLst>
+</file>
+
+<file path=ppt/tags/tag11.xml><?xml version="1.0" encoding="utf-8"?>
+<p:tagLst xmlns:p="http://schemas.openxmlformats.org/presentationml/2006/main">
+  <p:tag name="KSO_WM_DIAGRAM_VIRTUALLY_FRAME" val="{&quot;height&quot;:217.44,&quot;left&quot;:608.3999212598426,&quot;top&quot;:118.8,&quot;width&quot;:233.99999999999991}"/>
+</p:tagLst>
+</file>
+
+<file path=ppt/tags/tag12.xml><?xml version="1.0" encoding="utf-8"?>
+<p:tagLst xmlns:p="http://schemas.openxmlformats.org/presentationml/2006/main">
+  <p:tag name="KSO_WM_DIAGRAM_VIRTUALLY_FRAME" val="{&quot;height&quot;:217.44,&quot;left&quot;:608.3999212598426,&quot;top&quot;:118.8,&quot;width&quot;:233.99999999999991}"/>
+</p:tagLst>
+</file>
+
+<file path=ppt/tags/tag13.xml><?xml version="1.0" encoding="utf-8"?>
+<p:tagLst xmlns:p="http://schemas.openxmlformats.org/presentationml/2006/main">
+  <p:tag name="KSO_WM_DIAGRAM_VIRTUALLY_FRAME" val="{&quot;height&quot;:349.1999212598424,&quot;left&quot;:241.2,&quot;top&quot;:97.2,&quot;width&quot;:601.2}"/>
+</p:tagLst>
+</file>
+
+<file path=ppt/tags/tag14.xml><?xml version="1.0" encoding="utf-8"?>
+<p:tagLst xmlns:p="http://schemas.openxmlformats.org/presentationml/2006/main">
+  <p:tag name="KSO_WM_DIAGRAM_VIRTUALLY_FRAME" val="{&quot;height&quot;:349.1999212598424,&quot;left&quot;:241.2,&quot;top&quot;:97.2,&quot;width&quot;:601.2}"/>
+</p:tagLst>
+</file>
+
+<file path=ppt/tags/tag15.xml><?xml version="1.0" encoding="utf-8"?>
+<p:tagLst xmlns:p="http://schemas.openxmlformats.org/presentationml/2006/main">
+  <p:tag name="KSO_WM_DIAGRAM_VIRTUALLY_FRAME" val="{&quot;height&quot;:349.1999212598424,&quot;left&quot;:241.2,&quot;top&quot;:97.2,&quot;width&quot;:601.2}"/>
+</p:tagLst>
+</file>
+
+<file path=ppt/tags/tag16.xml><?xml version="1.0" encoding="utf-8"?>
+<p:tagLst xmlns:p="http://schemas.openxmlformats.org/presentationml/2006/main">
+  <p:tag name="KSO_WM_DIAGRAM_VIRTUALLY_FRAME" val="{&quot;height&quot;:349.1999212598424,&quot;left&quot;:241.2,&quot;top&quot;:97.2,&quot;width&quot;:601.2}"/>
+</p:tagLst>
+</file>
+
+<file path=ppt/tags/tag17.xml><?xml version="1.0" encoding="utf-8"?>
+<p:tagLst xmlns:p="http://schemas.openxmlformats.org/presentationml/2006/main">
+  <p:tag name="KSO_WM_DIAGRAM_VIRTUALLY_FRAME" val="{&quot;height&quot;:349.1999212598424,&quot;left&quot;:241.2,&quot;top&quot;:97.2,&quot;width&quot;:634.35}"/>
+</p:tagLst>
+</file>
+
+<file path=ppt/tags/tag18.xml><?xml version="1.0" encoding="utf-8"?>
+<p:tagLst xmlns:p="http://schemas.openxmlformats.org/presentationml/2006/main">
+  <p:tag name="KSO_WM_DIAGRAM_VIRTUALLY_FRAME" val="{&quot;height&quot;:349.1999212598424,&quot;left&quot;:241.2,&quot;top&quot;:97.2,&quot;width&quot;:634.35}"/>
+</p:tagLst>
+</file>
+
+<file path=ppt/tags/tag19.xml><?xml version="1.0" encoding="utf-8"?>
+<p:tagLst xmlns:p="http://schemas.openxmlformats.org/presentationml/2006/main">
+  <p:tag name="KSO_WM_DIAGRAM_VIRTUALLY_FRAME" val="{&quot;height&quot;:349.1999212598424,&quot;left&quot;:241.2,&quot;top&quot;:97.2,&quot;width&quot;:601.2}"/>
+</p:tagLst>
+</file>
+
+<file path=ppt/tags/tag2.xml><?xml version="1.0" encoding="utf-8"?>
+<p:tagLst xmlns:p="http://schemas.openxmlformats.org/presentationml/2006/main">
+  <p:tag name="KSO_WM_DIAGRAM_VIRTUALLY_FRAME" val="{&quot;height&quot;:217.44,&quot;left&quot;:608.3999212598426,&quot;top&quot;:118.8,&quot;width&quot;:233.99999999999991}"/>
+</p:tagLst>
+</file>
+
+<file path=ppt/tags/tag20.xml><?xml version="1.0" encoding="utf-8"?>
+<p:tagLst xmlns:p="http://schemas.openxmlformats.org/presentationml/2006/main">
+  <p:tag name="KSO_WM_DIAGRAM_VIRTUALLY_FRAME" val="{&quot;height&quot;:349.1999212598424,&quot;left&quot;:241.2,&quot;top&quot;:97.2,&quot;width&quot;:634.35}"/>
+</p:tagLst>
+</file>
+
+<file path=ppt/tags/tag21.xml><?xml version="1.0" encoding="utf-8"?>
+<p:tagLst xmlns:p="http://schemas.openxmlformats.org/presentationml/2006/main">
+  <p:tag name="KSO_WM_DIAGRAM_VIRTUALLY_FRAME" val="{&quot;height&quot;:349.1999212598424,&quot;left&quot;:241.2,&quot;top&quot;:97.2,&quot;width&quot;:634.35}"/>
+</p:tagLst>
+</file>
+
+<file path=ppt/tags/tag22.xml><?xml version="1.0" encoding="utf-8"?>
+<p:tagLst xmlns:p="http://schemas.openxmlformats.org/presentationml/2006/main">
+  <p:tag name="KSO_WM_DIAGRAM_VIRTUALLY_FRAME" val="{&quot;height&quot;:349.1999212598424,&quot;left&quot;:241.2,&quot;top&quot;:97.2,&quot;width&quot;:601.2}"/>
+</p:tagLst>
+</file>
+
+<file path=ppt/tags/tag23.xml><?xml version="1.0" encoding="utf-8"?>
+<p:tagLst xmlns:p="http://schemas.openxmlformats.org/presentationml/2006/main">
+  <p:tag name="KSO_WM_DIAGRAM_VIRTUALLY_FRAME" val="{&quot;height&quot;:349.1999212598424,&quot;left&quot;:241.2,&quot;top&quot;:97.2,&quot;width&quot;:634.35}"/>
+</p:tagLst>
+</file>
+
+<file path=ppt/tags/tag24.xml><?xml version="1.0" encoding="utf-8"?>
+<p:tagLst xmlns:p="http://schemas.openxmlformats.org/presentationml/2006/main">
+  <p:tag name="KSO_WM_DIAGRAM_VIRTUALLY_FRAME" val="{&quot;height&quot;:349.1999212598424,&quot;left&quot;:241.2,&quot;top&quot;:97.2,&quot;width&quot;:634.35}"/>
+</p:tagLst>
+</file>
+
+<file path=ppt/tags/tag25.xml><?xml version="1.0" encoding="utf-8"?>
+<p:tagLst xmlns:p="http://schemas.openxmlformats.org/presentationml/2006/main">
+  <p:tag name="KSO_WM_DIAGRAM_VIRTUALLY_FRAME" val="{&quot;height&quot;:68.4,&quot;left&quot;:48.959999999999994,&quot;top&quot;:97.2,&quot;width&quot;:853.1999999999998}"/>
+</p:tagLst>
+</file>
+
+<file path=ppt/tags/tag26.xml><?xml version="1.0" encoding="utf-8"?>
+<p:tagLst xmlns:p="http://schemas.openxmlformats.org/presentationml/2006/main">
+  <p:tag name="KSO_WM_DIAGRAM_VIRTUALLY_FRAME" val="{&quot;height&quot;:68.4,&quot;left&quot;:48.959999999999994,&quot;top&quot;:97.2,&quot;width&quot;:853.1999999999998}"/>
+</p:tagLst>
+</file>
+
+<file path=ppt/tags/tag27.xml><?xml version="1.0" encoding="utf-8"?>
+<p:tagLst xmlns:p="http://schemas.openxmlformats.org/presentationml/2006/main">
+  <p:tag name="KSO_WM_DIAGRAM_VIRTUALLY_FRAME" val="{&quot;height&quot;:68.4,&quot;left&quot;:48.959999999999994,&quot;top&quot;:97.2,&quot;width&quot;:853.1999999999998}"/>
+</p:tagLst>
+</file>
+
+<file path=ppt/tags/tag28.xml><?xml version="1.0" encoding="utf-8"?>
+<p:tagLst xmlns:p="http://schemas.openxmlformats.org/presentationml/2006/main">
+  <p:tag name="KSO_WM_DIAGRAM_VIRTUALLY_FRAME" val="{&quot;height&quot;:68.4,&quot;left&quot;:48.959999999999994,&quot;top&quot;:97.2,&quot;width&quot;:853.1999999999998}"/>
+</p:tagLst>
+</file>
+
+<file path=ppt/tags/tag29.xml><?xml version="1.0" encoding="utf-8"?>
+<p:tagLst xmlns:p="http://schemas.openxmlformats.org/presentationml/2006/main">
+  <p:tag name="KSO_WM_DIAGRAM_VIRTUALLY_FRAME" val="{&quot;height&quot;:68.4,&quot;left&quot;:48.959999999999994,&quot;top&quot;:97.2,&quot;width&quot;:853.1999999999998}"/>
+</p:tagLst>
+</file>
+
+<file path=ppt/tags/tag3.xml><?xml version="1.0" encoding="utf-8"?>
+<p:tagLst xmlns:p="http://schemas.openxmlformats.org/presentationml/2006/main">
+  <p:tag name="KSO_WM_DIAGRAM_VIRTUALLY_FRAME" val="{&quot;height&quot;:217.44,&quot;left&quot;:608.3999212598426,&quot;top&quot;:118.8,&quot;width&quot;:233.99999999999991}"/>
+</p:tagLst>
+</file>
+
+<file path=ppt/tags/tag30.xml><?xml version="1.0" encoding="utf-8"?>
+<p:tagLst xmlns:p="http://schemas.openxmlformats.org/presentationml/2006/main">
+  <p:tag name="KSO_WM_DIAGRAM_VIRTUALLY_FRAME" val="{&quot;height&quot;:68.4,&quot;left&quot;:48.959999999999994,&quot;top&quot;:97.2,&quot;width&quot;:853.1999999999998}"/>
+</p:tagLst>
+</file>
+
+<file path=ppt/tags/tag31.xml><?xml version="1.0" encoding="utf-8"?>
+<p:tagLst xmlns:p="http://schemas.openxmlformats.org/presentationml/2006/main">
+  <p:tag name="KSO_WM_DIAGRAM_VIRTUALLY_FRAME" val="{&quot;height&quot;:68.4,&quot;left&quot;:48.959999999999994,&quot;top&quot;:97.2,&quot;width&quot;:853.1999999999998}"/>
+</p:tagLst>
+</file>
+
+<file path=ppt/tags/tag32.xml><?xml version="1.0" encoding="utf-8"?>
+<p:tagLst xmlns:p="http://schemas.openxmlformats.org/presentationml/2006/main">
+  <p:tag name="KSO_WM_DIAGRAM_VIRTUALLY_FRAME" val="{&quot;height&quot;:68.4,&quot;left&quot;:48.959999999999994,&quot;top&quot;:97.2,&quot;width&quot;:853.1999999999998}"/>
+</p:tagLst>
+</file>
+
+<file path=ppt/tags/tag33.xml><?xml version="1.0" encoding="utf-8"?>
+<p:tagLst xmlns:p="http://schemas.openxmlformats.org/presentationml/2006/main">
+  <p:tag name="KSO_WM_DIAGRAM_VIRTUALLY_FRAME" val="{&quot;height&quot;:68.4,&quot;left&quot;:48.959999999999994,&quot;top&quot;:97.2,&quot;width&quot;:853.1999999999998}"/>
+</p:tagLst>
+</file>
+
+<file path=ppt/tags/tag34.xml><?xml version="1.0" encoding="utf-8"?>
+<p:tagLst xmlns:p="http://schemas.openxmlformats.org/presentationml/2006/main">
+  <p:tag name="KSO_WM_DIAGRAM_VIRTUALLY_FRAME" val="{&quot;height&quot;:68.4,&quot;left&quot;:48.959999999999994,&quot;top&quot;:97.2,&quot;width&quot;:853.1999999999998}"/>
+</p:tagLst>
+</file>
+
+<file path=ppt/tags/tag35.xml><?xml version="1.0" encoding="utf-8"?>
+<p:tagLst xmlns:p="http://schemas.openxmlformats.org/presentationml/2006/main">
+  <p:tag name="KSO_WM_DIAGRAM_VIRTUALLY_FRAME" val="{&quot;height&quot;:68.4,&quot;left&quot;:48.959999999999994,&quot;top&quot;:97.2,&quot;width&quot;:853.1999999999998}"/>
+</p:tagLst>
+</file>
+
+<file path=ppt/tags/tag36.xml><?xml version="1.0" encoding="utf-8"?>
+<p:tagLst xmlns:p="http://schemas.openxmlformats.org/presentationml/2006/main">
+  <p:tag name="KSO_WM_DIAGRAM_VIRTUALLY_FRAME" val="{&quot;height&quot;:68.4,&quot;left&quot;:48.959999999999994,&quot;top&quot;:97.2,&quot;width&quot;:853.1999999999998}"/>
+</p:tagLst>
+</file>
+
+<file path=ppt/tags/tag4.xml><?xml version="1.0" encoding="utf-8"?>
+<p:tagLst xmlns:p="http://schemas.openxmlformats.org/presentationml/2006/main">
+  <p:tag name="KSO_WM_DIAGRAM_VIRTUALLY_FRAME" val="{&quot;height&quot;:217.44,&quot;left&quot;:608.3999212598426,&quot;top&quot;:118.8,&quot;width&quot;:233.99999999999991}"/>
+</p:tagLst>
+</file>
+
+<file path=ppt/tags/tag5.xml><?xml version="1.0" encoding="utf-8"?>
+<p:tagLst xmlns:p="http://schemas.openxmlformats.org/presentationml/2006/main">
+  <p:tag name="KSO_WM_DIAGRAM_VIRTUALLY_FRAME" val="{&quot;height&quot;:217.44,&quot;left&quot;:608.3999212598426,&quot;top&quot;:118.8,&quot;width&quot;:233.99999999999991}"/>
+</p:tagLst>
+</file>
+
+<file path=ppt/tags/tag6.xml><?xml version="1.0" encoding="utf-8"?>
+<p:tagLst xmlns:p="http://schemas.openxmlformats.org/presentationml/2006/main">
+  <p:tag name="KSO_WM_DIAGRAM_VIRTUALLY_FRAME" val="{&quot;height&quot;:217.44,&quot;left&quot;:608.3999212598426,&quot;top&quot;:118.8,&quot;width&quot;:233.99999999999991}"/>
+</p:tagLst>
+</file>
+
+<file path=ppt/tags/tag7.xml><?xml version="1.0" encoding="utf-8"?>
+<p:tagLst xmlns:p="http://schemas.openxmlformats.org/presentationml/2006/main">
+  <p:tag name="KSO_WM_DIAGRAM_VIRTUALLY_FRAME" val="{&quot;height&quot;:217.44,&quot;left&quot;:608.3999212598426,&quot;top&quot;:118.8,&quot;width&quot;:233.99999999999991}"/>
+</p:tagLst>
+</file>
+
+<file path=ppt/tags/tag8.xml><?xml version="1.0" encoding="utf-8"?>
+<p:tagLst xmlns:p="http://schemas.openxmlformats.org/presentationml/2006/main">
+  <p:tag name="KSO_WM_DIAGRAM_VIRTUALLY_FRAME" val="{&quot;height&quot;:217.44,&quot;left&quot;:608.3999212598426,&quot;top&quot;:118.8,&quot;width&quot;:233.99999999999991}"/>
+</p:tagLst>
+</file>
+
+<file path=ppt/tags/tag9.xml><?xml version="1.0" encoding="utf-8"?>
+<p:tagLst xmlns:p="http://schemas.openxmlformats.org/presentationml/2006/main">
+  <p:tag name="KSO_WM_DIAGRAM_VIRTUALLY_FRAME" val="{&quot;height&quot;:217.44,&quot;left&quot;:608.3999212598426,&quot;top&quot;:118.8,&quot;width&quot;:233.99999999999991}"/>
+</p:tagLst>
 </file>
 
 <file path=ppt/theme/theme1.xml><?xml version="1.0" encoding="utf-8"?>
@@ -28851,4 +32832,263 @@
     </a:ext>
   </a:extLst>
 </a:theme>
+</file>
+
+<file path=ppt/theme/theme2.xml><?xml version="1.0" encoding="utf-8"?>
+<a:theme xmlns:a="http://schemas.openxmlformats.org/drawingml/2006/main" name="Office 主题">
+  <a:themeElements>
+    <a:clrScheme name="Office">
+      <a:dk1>
+        <a:sysClr val="windowText" lastClr="000000"/>
+      </a:dk1>
+      <a:lt1>
+        <a:sysClr val="window" lastClr="FFFFFF"/>
+      </a:lt1>
+      <a:dk2>
+        <a:srgbClr val="44546A"/>
+      </a:dk2>
+      <a:lt2>
+        <a:srgbClr val="E7E6E6"/>
+      </a:lt2>
+      <a:accent1>
+        <a:srgbClr val="5B9BD5"/>
+      </a:accent1>
+      <a:accent2>
+        <a:srgbClr val="ED7D31"/>
+      </a:accent2>
+      <a:accent3>
+        <a:srgbClr val="A5A5A5"/>
+      </a:accent3>
+      <a:accent4>
+        <a:srgbClr val="FFC000"/>
+      </a:accent4>
+      <a:accent5>
+        <a:srgbClr val="4472C4"/>
+      </a:accent5>
+      <a:accent6>
+        <a:srgbClr val="70AD47"/>
+      </a:accent6>
+      <a:hlink>
+        <a:srgbClr val="0563C1"/>
+      </a:hlink>
+      <a:folHlink>
+        <a:srgbClr val="954F72"/>
+      </a:folHlink>
+    </a:clrScheme>
+    <a:fontScheme name="Office">
+      <a:majorFont>
+        <a:latin typeface="Calibri Light"/>
+        <a:ea typeface=""/>
+        <a:cs typeface=""/>
+        <a:font script="Jpan" typeface="ＭＳ Ｐゴシック"/>
+        <a:font script="Hang" typeface="맑은 고딕"/>
+        <a:font script="Hans" typeface="宋体"/>
+        <a:font script="Hant" typeface="新細明體"/>
+        <a:font script="Arab" typeface="Times New Roman"/>
+        <a:font script="Hebr" typeface="Times New Roman"/>
+        <a:font script="Thai" typeface="Angsana New"/>
+        <a:font script="Ethi" typeface="Nyala"/>
+        <a:font script="Beng" typeface="Vrinda"/>
+        <a:font script="Gujr" typeface="Shruti"/>
+        <a:font script="Khmr" typeface="MoolBoran"/>
+        <a:font script="Knda" typeface="Tunga"/>
+        <a:font script="Guru" typeface="Raavi"/>
+        <a:font script="Cans" typeface="Euphemia"/>
+        <a:font script="Cher" typeface="Plantagenet Cherokee"/>
+        <a:font script="Yiii" typeface="Microsoft Yi Baiti"/>
+        <a:font script="Tibt" typeface="Microsoft Himalaya"/>
+        <a:font script="Thaa" typeface="MV Boli"/>
+        <a:font script="Deva" typeface="Mangal"/>
+        <a:font script="Telu" typeface="Gautami"/>
+        <a:font script="Taml" typeface="Latha"/>
+        <a:font script="Syrc" typeface="Estrangelo Edessa"/>
+        <a:font script="Orya" typeface="Kalinga"/>
+        <a:font script="Mlym" typeface="Kartika"/>
+        <a:font script="Laoo" typeface="DokChampa"/>
+        <a:font script="Sinh" typeface="Iskoola Pota"/>
+        <a:font script="Mong" typeface="Mongolian Baiti"/>
+        <a:font script="Viet" typeface="Times New Roman"/>
+        <a:font script="Uigh" typeface="Microsoft Uighur"/>
+        <a:font script="Geor" typeface="Sylfaen"/>
+      </a:majorFont>
+      <a:minorFont>
+        <a:latin typeface="Calibri"/>
+        <a:ea typeface=""/>
+        <a:cs typeface=""/>
+        <a:font script="Jpan" typeface="ＭＳ Ｐゴシック"/>
+        <a:font script="Hang" typeface="맑은 고딕"/>
+        <a:font script="Hans" typeface="宋体"/>
+        <a:font script="Hant" typeface="新細明體"/>
+        <a:font script="Arab" typeface="Arial"/>
+        <a:font script="Hebr" typeface="Arial"/>
+        <a:font script="Thai" typeface="Cordia New"/>
+        <a:font script="Ethi" typeface="Nyala"/>
+        <a:font script="Beng" typeface="Vrinda"/>
+        <a:font script="Gujr" typeface="Shruti"/>
+        <a:font script="Khmr" typeface="DaunPenh"/>
+        <a:font script="Knda" typeface="Tunga"/>
+        <a:font script="Guru" typeface="Raavi"/>
+        <a:font script="Cans" typeface="Euphemia"/>
+        <a:font script="Cher" typeface="Plantagenet Cherokee"/>
+        <a:font script="Yiii" typeface="Microsoft Yi Baiti"/>
+        <a:font script="Tibt" typeface="Microsoft Himalaya"/>
+        <a:font script="Thaa" typeface="MV Boli"/>
+        <a:font script="Deva" typeface="Mangal"/>
+        <a:font script="Telu" typeface="Gautami"/>
+        <a:font script="Taml" typeface="Latha"/>
+        <a:font script="Syrc" typeface="Estrangelo Edessa"/>
+        <a:font script="Orya" typeface="Kalinga"/>
+        <a:font script="Mlym" typeface="Kartika"/>
+        <a:font script="Laoo" typeface="DokChampa"/>
+        <a:font script="Sinh" typeface="Iskoola Pota"/>
+        <a:font script="Mong" typeface="Mongolian Baiti"/>
+        <a:font script="Viet" typeface="Arial"/>
+        <a:font script="Uigh" typeface="Microsoft Uighur"/>
+        <a:font script="Geor" typeface="Sylfaen"/>
+      </a:minorFont>
+    </a:fontScheme>
+    <a:fmtScheme name="Office">
+      <a:fillStyleLst>
+        <a:solidFill>
+          <a:schemeClr val="phClr"/>
+        </a:solidFill>
+        <a:gradFill rotWithShape="1">
+          <a:gsLst>
+            <a:gs pos="0">
+              <a:schemeClr val="phClr">
+                <a:lumMod val="110000"/>
+                <a:satMod val="105000"/>
+                <a:tint val="67000"/>
+              </a:schemeClr>
+            </a:gs>
+            <a:gs pos="50000">
+              <a:schemeClr val="phClr">
+                <a:lumMod val="105000"/>
+                <a:satMod val="103000"/>
+                <a:tint val="73000"/>
+              </a:schemeClr>
+            </a:gs>
+            <a:gs pos="100000">
+              <a:schemeClr val="phClr">
+                <a:lumMod val="105000"/>
+                <a:satMod val="109000"/>
+                <a:tint val="81000"/>
+              </a:schemeClr>
+            </a:gs>
+          </a:gsLst>
+          <a:lin ang="5400000" scaled="0"/>
+        </a:gradFill>
+        <a:gradFill rotWithShape="1">
+          <a:gsLst>
+            <a:gs pos="0">
+              <a:schemeClr val="phClr">
+                <a:satMod val="103000"/>
+                <a:lumMod val="102000"/>
+                <a:tint val="94000"/>
+              </a:schemeClr>
+            </a:gs>
+            <a:gs pos="50000">
+              <a:schemeClr val="phClr">
+                <a:satMod val="110000"/>
+                <a:lumMod val="100000"/>
+                <a:shade val="100000"/>
+              </a:schemeClr>
+            </a:gs>
+            <a:gs pos="100000">
+              <a:schemeClr val="phClr">
+                <a:lumMod val="99000"/>
+                <a:satMod val="120000"/>
+                <a:shade val="78000"/>
+              </a:schemeClr>
+            </a:gs>
+          </a:gsLst>
+          <a:lin ang="5400000" scaled="0"/>
+        </a:gradFill>
+      </a:fillStyleLst>
+      <a:lnStyleLst>
+        <a:ln w="6350" cap="flat" cmpd="sng" algn="ctr">
+          <a:solidFill>
+            <a:schemeClr val="phClr"/>
+          </a:solidFill>
+          <a:prstDash val="solid"/>
+          <a:miter lim="800000"/>
+        </a:ln>
+        <a:ln w="12700" cap="flat" cmpd="sng" algn="ctr">
+          <a:solidFill>
+            <a:schemeClr val="phClr"/>
+          </a:solidFill>
+          <a:prstDash val="solid"/>
+          <a:miter lim="800000"/>
+        </a:ln>
+        <a:ln w="19050" cap="flat" cmpd="sng" algn="ctr">
+          <a:solidFill>
+            <a:schemeClr val="phClr"/>
+          </a:solidFill>
+          <a:prstDash val="solid"/>
+          <a:miter lim="800000"/>
+        </a:ln>
+      </a:lnStyleLst>
+      <a:effectStyleLst>
+        <a:effectStyle>
+          <a:effectLst/>
+        </a:effectStyle>
+        <a:effectStyle>
+          <a:effectLst/>
+        </a:effectStyle>
+        <a:effectStyle>
+          <a:effectLst>
+            <a:outerShdw blurRad="57150" dist="19050" dir="5400000" algn="ctr" rotWithShape="0">
+              <a:srgbClr val="000000">
+                <a:alpha val="63000"/>
+              </a:srgbClr>
+            </a:outerShdw>
+          </a:effectLst>
+        </a:effectStyle>
+      </a:effectStyleLst>
+      <a:bgFillStyleLst>
+        <a:solidFill>
+          <a:schemeClr val="phClr"/>
+        </a:solidFill>
+        <a:solidFill>
+          <a:schemeClr val="phClr">
+            <a:tint val="95000"/>
+            <a:satMod val="170000"/>
+          </a:schemeClr>
+        </a:solidFill>
+        <a:gradFill rotWithShape="1">
+          <a:gsLst>
+            <a:gs pos="0">
+              <a:schemeClr val="phClr">
+                <a:tint val="93000"/>
+                <a:satMod val="150000"/>
+                <a:shade val="98000"/>
+                <a:lumMod val="102000"/>
+              </a:schemeClr>
+            </a:gs>
+            <a:gs pos="50000">
+              <a:schemeClr val="phClr">
+                <a:tint val="98000"/>
+                <a:satMod val="130000"/>
+                <a:shade val="90000"/>
+                <a:lumMod val="103000"/>
+              </a:schemeClr>
+            </a:gs>
+            <a:gs pos="100000">
+              <a:schemeClr val="phClr">
+                <a:shade val="63000"/>
+                <a:satMod val="120000"/>
+              </a:schemeClr>
+            </a:gs>
+          </a:gsLst>
+          <a:lin ang="5400000" scaled="0"/>
+        </a:gradFill>
+      </a:bgFillStyleLst>
+    </a:fmtScheme>
+  </a:themeElements>
+  <a:extLst>
+    <a:ext uri="{05A4C25C-085E-4340-85A3-A5531E510DB2}">
+      <thm15:themeFamily xmlns:thm15="http://schemas.microsoft.com/office/thememl/2012/main" name="Office Theme" id="{62F939B6-93AF-4DB8-9C6B-D6C7DFDC589F}" vid="{4A3C46E8-61CC-4603-A589-7422A47A8E4A}"/>
+    </a:ext>
+  </a:extLst>
+</a:theme>
 </file>